--- a/statistics_07_t_distribution.pptx
+++ b/statistics_07_t_distribution.pptx
@@ -14969,7 +14969,15 @@
           <a:p>
             <a:r>
               <a:rPr lang="en-US" dirty="0"/>
-              <a:t>Let Xi be independently and identically drawn from the normal distribution with expected mean value</a:t>
+              <a:t>Let X</a:t>
+            </a:r>
+            <a:r>
+              <a:rPr lang="en-US" baseline="-25000" dirty="0"/>
+              <a:t>i</a:t>
+            </a:r>
+            <a:r>
+              <a:rPr lang="en-US" dirty="0"/>
+              <a:t> be independently and identically drawn from the normal distribution with expected mean value</a:t>
             </a:r>
             <a:r>
               <a:rPr lang="el-GR" dirty="0"/>
@@ -16798,7 +16806,7 @@
           <a:graphicData uri="http://schemas.openxmlformats.org/presentationml/2006/ole">
             <mc:AlternateContent xmlns:mc="http://schemas.openxmlformats.org/markup-compatibility/2006">
               <mc:Choice xmlns:v="urn:schemas-microsoft-com:vml" Requires="v">
-                <p:oleObj spid="_x0000_s1205" name="Equation" r:id="rId3" imgW="3022560" imgH="431640" progId="Equation.DSMT4">
+                <p:oleObj spid="_x0000_s1207" name="Equation" r:id="rId3" imgW="3022560" imgH="431640" progId="Equation.DSMT4">
                   <p:embed/>
                 </p:oleObj>
               </mc:Choice>
@@ -17470,7 +17478,7 @@
           <a:graphicData uri="http://schemas.openxmlformats.org/presentationml/2006/ole">
             <mc:AlternateContent xmlns:mc="http://schemas.openxmlformats.org/markup-compatibility/2006">
               <mc:Choice xmlns:v="urn:schemas-microsoft-com:vml" Requires="v">
-                <p:oleObj spid="_x0000_s2581" name="Equation" r:id="rId3" imgW="2438280" imgH="444240" progId="Equation.DSMT4">
+                <p:oleObj spid="_x0000_s2587" name="Equation" r:id="rId3" imgW="2438280" imgH="444240" progId="Equation.DSMT4">
                   <p:embed/>
                 </p:oleObj>
               </mc:Choice>
@@ -17629,7 +17637,7 @@
           <a:graphicData uri="http://schemas.openxmlformats.org/presentationml/2006/ole">
             <mc:AlternateContent xmlns:mc="http://schemas.openxmlformats.org/markup-compatibility/2006">
               <mc:Choice xmlns:v="urn:schemas-microsoft-com:vml" Requires="v">
-                <p:oleObj spid="_x0000_s2582" name="Equation" r:id="rId5" imgW="660113" imgH="431613" progId="Equation.3">
+                <p:oleObj spid="_x0000_s2588" name="Equation" r:id="rId5" imgW="660113" imgH="431613" progId="Equation.3">
                   <p:embed/>
                 </p:oleObj>
               </mc:Choice>
@@ -17706,7 +17714,7 @@
           <a:graphicData uri="http://schemas.openxmlformats.org/presentationml/2006/ole">
             <mc:AlternateContent xmlns:mc="http://schemas.openxmlformats.org/markup-compatibility/2006">
               <mc:Choice xmlns:v="urn:schemas-microsoft-com:vml" Requires="v">
-                <p:oleObj spid="_x0000_s2583" name="Equation" r:id="rId7" imgW="787058" imgH="215806" progId="Equation.3">
+                <p:oleObj spid="_x0000_s2589" name="Equation" r:id="rId7" imgW="787058" imgH="215806" progId="Equation.3">
                   <p:embed/>
                 </p:oleObj>
               </mc:Choice>
@@ -18093,7 +18101,7 @@
           <a:graphicData uri="http://schemas.openxmlformats.org/presentationml/2006/ole">
             <mc:AlternateContent xmlns:mc="http://schemas.openxmlformats.org/markup-compatibility/2006">
               <mc:Choice xmlns:v="urn:schemas-microsoft-com:vml" Requires="v">
-                <p:oleObj spid="_x0000_s3779" name="Equation" r:id="rId4" imgW="1054100" imgH="228600" progId="Equation.3">
+                <p:oleObj spid="_x0000_s3787" name="Equation" r:id="rId4" imgW="1054100" imgH="228600" progId="Equation.3">
                   <p:embed/>
                 </p:oleObj>
               </mc:Choice>
@@ -18205,7 +18213,7 @@
           <a:graphicData uri="http://schemas.openxmlformats.org/presentationml/2006/ole">
             <mc:AlternateContent xmlns:mc="http://schemas.openxmlformats.org/markup-compatibility/2006">
               <mc:Choice xmlns:v="urn:schemas-microsoft-com:vml" Requires="v">
-                <p:oleObj spid="_x0000_s3780" name="Equation" r:id="rId6" imgW="1701800" imgH="495300" progId="Equation.3">
+                <p:oleObj spid="_x0000_s3788" name="Equation" r:id="rId6" imgW="1701800" imgH="495300" progId="Equation.3">
                   <p:embed/>
                 </p:oleObj>
               </mc:Choice>
@@ -18282,7 +18290,7 @@
           <a:graphicData uri="http://schemas.openxmlformats.org/presentationml/2006/ole">
             <mc:AlternateContent xmlns:mc="http://schemas.openxmlformats.org/markup-compatibility/2006">
               <mc:Choice xmlns:v="urn:schemas-microsoft-com:vml" Requires="v">
-                <p:oleObj spid="_x0000_s3781" name="Equation" r:id="rId8" imgW="1282700" imgH="546100" progId="Equation.3">
+                <p:oleObj spid="_x0000_s3789" name="Equation" r:id="rId8" imgW="1282700" imgH="546100" progId="Equation.3">
                   <p:embed/>
                 </p:oleObj>
               </mc:Choice>
@@ -18394,7 +18402,7 @@
           <a:graphicData uri="http://schemas.openxmlformats.org/presentationml/2006/ole">
             <mc:AlternateContent xmlns:mc="http://schemas.openxmlformats.org/markup-compatibility/2006">
               <mc:Choice xmlns:v="urn:schemas-microsoft-com:vml" Requires="v">
-                <p:oleObj spid="_x0000_s3782" name="Equation" r:id="rId10" imgW="927100" imgH="431800" progId="Equation.3">
+                <p:oleObj spid="_x0000_s3790" name="Equation" r:id="rId10" imgW="927100" imgH="431800" progId="Equation.3">
                   <p:embed/>
                 </p:oleObj>
               </mc:Choice>
@@ -18922,7 +18930,7 @@
           <a:graphicData uri="http://schemas.openxmlformats.org/presentationml/2006/ole">
             <mc:AlternateContent xmlns:mc="http://schemas.openxmlformats.org/markup-compatibility/2006">
               <mc:Choice xmlns:v="urn:schemas-microsoft-com:vml" Requires="v">
-                <p:oleObj spid="_x0000_s16394" name="Equation" r:id="rId4" imgW="17373600" imgH="10058400" progId="Equation.3">
+                <p:oleObj spid="_x0000_s16406" name="Equation" r:id="rId4" imgW="17373600" imgH="10058400" progId="Equation.3">
                   <p:embed/>
                 </p:oleObj>
               </mc:Choice>
@@ -19054,7 +19062,7 @@
           <a:graphicData uri="http://schemas.openxmlformats.org/presentationml/2006/ole">
             <mc:AlternateContent xmlns:mc="http://schemas.openxmlformats.org/markup-compatibility/2006">
               <mc:Choice xmlns:v="urn:schemas-microsoft-com:vml" Requires="v">
-                <p:oleObj spid="_x0000_s16395" name="Equation" r:id="rId6" imgW="18592800" imgH="10363200" progId="Equation.3">
+                <p:oleObj spid="_x0000_s16407" name="Equation" r:id="rId6" imgW="18592800" imgH="10363200" progId="Equation.3">
                   <p:embed/>
                 </p:oleObj>
               </mc:Choice>
@@ -19131,7 +19139,7 @@
           <a:graphicData uri="http://schemas.openxmlformats.org/presentationml/2006/ole">
             <mc:AlternateContent xmlns:mc="http://schemas.openxmlformats.org/markup-compatibility/2006">
               <mc:Choice xmlns:v="urn:schemas-microsoft-com:vml" Requires="v">
-                <p:oleObj spid="_x0000_s16396" name="Equation" r:id="rId8" imgW="36271200" imgH="21945600" progId="Equation.3">
+                <p:oleObj spid="_x0000_s16408" name="Equation" r:id="rId8" imgW="36271200" imgH="21945600" progId="Equation.3">
                   <p:embed/>
                 </p:oleObj>
               </mc:Choice>
@@ -19208,7 +19216,7 @@
           <a:graphicData uri="http://schemas.openxmlformats.org/presentationml/2006/ole">
             <mc:AlternateContent xmlns:mc="http://schemas.openxmlformats.org/markup-compatibility/2006">
               <mc:Choice xmlns:v="urn:schemas-microsoft-com:vml" Requires="v">
-                <p:oleObj spid="_x0000_s16397" name="Equation" r:id="rId10" imgW="38404800" imgH="8839200" progId="Equation.3">
+                <p:oleObj spid="_x0000_s16409" name="Equation" r:id="rId10" imgW="38404800" imgH="8839200" progId="Equation.3">
                   <p:embed/>
                 </p:oleObj>
               </mc:Choice>
@@ -19285,7 +19293,7 @@
           <a:graphicData uri="http://schemas.openxmlformats.org/presentationml/2006/ole">
             <mc:AlternateContent xmlns:mc="http://schemas.openxmlformats.org/markup-compatibility/2006">
               <mc:Choice xmlns:v="urn:schemas-microsoft-com:vml" Requires="v">
-                <p:oleObj spid="_x0000_s16398" name="Equation" r:id="rId12" imgW="19812000" imgH="11277600" progId="Equation.3">
+                <p:oleObj spid="_x0000_s16410" name="Equation" r:id="rId12" imgW="19812000" imgH="11277600" progId="Equation.3">
                   <p:embed/>
                 </p:oleObj>
               </mc:Choice>
@@ -19362,7 +19370,7 @@
           <a:graphicData uri="http://schemas.openxmlformats.org/presentationml/2006/ole">
             <mc:AlternateContent xmlns:mc="http://schemas.openxmlformats.org/markup-compatibility/2006">
               <mc:Choice xmlns:v="urn:schemas-microsoft-com:vml" Requires="v">
-                <p:oleObj spid="_x0000_s16399" name="Equation" r:id="rId14" imgW="42976800" imgH="5791200" progId="Equation.3">
+                <p:oleObj spid="_x0000_s16411" name="Equation" r:id="rId14" imgW="42976800" imgH="5791200" progId="Equation.3">
                   <p:embed/>
                 </p:oleObj>
               </mc:Choice>

--- a/statistics_07_t_distribution.pptx
+++ b/statistics_07_t_distribution.pptx
@@ -5,7 +5,7 @@
     <p:sldMasterId id="2147483659" r:id="rId1"/>
   </p:sldMasterIdLst>
   <p:notesMasterIdLst>
-    <p:notesMasterId r:id="rId9"/>
+    <p:notesMasterId r:id="rId10"/>
   </p:notesMasterIdLst>
   <p:sldIdLst>
     <p:sldId id="275" r:id="rId2"/>
@@ -13,8 +13,9 @@
     <p:sldId id="281" r:id="rId4"/>
     <p:sldId id="282" r:id="rId5"/>
     <p:sldId id="283" r:id="rId6"/>
-    <p:sldId id="284" r:id="rId7"/>
-    <p:sldId id="288" r:id="rId8"/>
+    <p:sldId id="289" r:id="rId7"/>
+    <p:sldId id="284" r:id="rId8"/>
+    <p:sldId id="288" r:id="rId9"/>
   </p:sldIdLst>
   <p:sldSz cx="12192000" cy="6858000"/>
   <p:notesSz cx="6858000" cy="9144000"/>
@@ -16806,7 +16807,7 @@
           <a:graphicData uri="http://schemas.openxmlformats.org/presentationml/2006/ole">
             <mc:AlternateContent xmlns:mc="http://schemas.openxmlformats.org/markup-compatibility/2006">
               <mc:Choice xmlns:v="urn:schemas-microsoft-com:vml" Requires="v">
-                <p:oleObj spid="_x0000_s1207" name="Equation" r:id="rId3" imgW="3022560" imgH="431640" progId="Equation.DSMT4">
+                <p:oleObj spid="_x0000_s1210" name="Equation" r:id="rId3" imgW="3022560" imgH="431640" progId="Equation.DSMT4">
                   <p:embed/>
                 </p:oleObj>
               </mc:Choice>
@@ -16840,7 +16841,6 @@
                       <a:ln>
                         <a:noFill/>
                       </a:ln>
-                      <a:extLst/>
                     </p:spPr>
                   </p:pic>
                 </p:oleObj>
@@ -17478,7 +17478,7 @@
           <a:graphicData uri="http://schemas.openxmlformats.org/presentationml/2006/ole">
             <mc:AlternateContent xmlns:mc="http://schemas.openxmlformats.org/markup-compatibility/2006">
               <mc:Choice xmlns:v="urn:schemas-microsoft-com:vml" Requires="v">
-                <p:oleObj spid="_x0000_s2587" name="Equation" r:id="rId3" imgW="2438280" imgH="444240" progId="Equation.DSMT4">
+                <p:oleObj spid="_x0000_s2596" name="Equation" r:id="rId3" imgW="2438280" imgH="444240" progId="Equation.DSMT4">
                   <p:embed/>
                 </p:oleObj>
               </mc:Choice>
@@ -17512,7 +17512,6 @@
                       <a:ln>
                         <a:noFill/>
                       </a:ln>
-                      <a:extLst/>
                     </p:spPr>
                   </p:pic>
                 </p:oleObj>
@@ -17637,7 +17636,7 @@
           <a:graphicData uri="http://schemas.openxmlformats.org/presentationml/2006/ole">
             <mc:AlternateContent xmlns:mc="http://schemas.openxmlformats.org/markup-compatibility/2006">
               <mc:Choice xmlns:v="urn:schemas-microsoft-com:vml" Requires="v">
-                <p:oleObj spid="_x0000_s2588" name="Equation" r:id="rId5" imgW="660113" imgH="431613" progId="Equation.3">
+                <p:oleObj spid="_x0000_s2597" name="Equation" r:id="rId5" imgW="660113" imgH="431613" progId="Equation.3">
                   <p:embed/>
                 </p:oleObj>
               </mc:Choice>
@@ -17677,7 +17676,6 @@
                       <a:ln>
                         <a:noFill/>
                       </a:ln>
-                      <a:extLst/>
                     </p:spPr>
                   </p:pic>
                 </p:oleObj>
@@ -17714,7 +17712,7 @@
           <a:graphicData uri="http://schemas.openxmlformats.org/presentationml/2006/ole">
             <mc:AlternateContent xmlns:mc="http://schemas.openxmlformats.org/markup-compatibility/2006">
               <mc:Choice xmlns:v="urn:schemas-microsoft-com:vml" Requires="v">
-                <p:oleObj spid="_x0000_s2589" name="Equation" r:id="rId7" imgW="787058" imgH="215806" progId="Equation.3">
+                <p:oleObj spid="_x0000_s2598" name="Equation" r:id="rId7" imgW="787058" imgH="215806" progId="Equation.3">
                   <p:embed/>
                 </p:oleObj>
               </mc:Choice>
@@ -17754,7 +17752,6 @@
                       <a:ln>
                         <a:noFill/>
                       </a:ln>
-                      <a:extLst/>
                     </p:spPr>
                   </p:pic>
                 </p:oleObj>
@@ -18101,7 +18098,7 @@
           <a:graphicData uri="http://schemas.openxmlformats.org/presentationml/2006/ole">
             <mc:AlternateContent xmlns:mc="http://schemas.openxmlformats.org/markup-compatibility/2006">
               <mc:Choice xmlns:v="urn:schemas-microsoft-com:vml" Requires="v">
-                <p:oleObj spid="_x0000_s3787" name="Equation" r:id="rId4" imgW="1054100" imgH="228600" progId="Equation.3">
+                <p:oleObj spid="_x0000_s3799" name="Equation" r:id="rId4" imgW="1054100" imgH="228600" progId="Equation.3">
                   <p:embed/>
                 </p:oleObj>
               </mc:Choice>
@@ -18141,7 +18138,6 @@
                       <a:ln>
                         <a:noFill/>
                       </a:ln>
-                      <a:extLst/>
                     </p:spPr>
                   </p:pic>
                 </p:oleObj>
@@ -18213,7 +18209,7 @@
           <a:graphicData uri="http://schemas.openxmlformats.org/presentationml/2006/ole">
             <mc:AlternateContent xmlns:mc="http://schemas.openxmlformats.org/markup-compatibility/2006">
               <mc:Choice xmlns:v="urn:schemas-microsoft-com:vml" Requires="v">
-                <p:oleObj spid="_x0000_s3788" name="Equation" r:id="rId6" imgW="1701800" imgH="495300" progId="Equation.3">
+                <p:oleObj spid="_x0000_s3800" name="Equation" r:id="rId6" imgW="1701800" imgH="495300" progId="Equation.3">
                   <p:embed/>
                 </p:oleObj>
               </mc:Choice>
@@ -18253,7 +18249,6 @@
                       <a:ln>
                         <a:noFill/>
                       </a:ln>
-                      <a:extLst/>
                     </p:spPr>
                   </p:pic>
                 </p:oleObj>
@@ -18290,7 +18285,7 @@
           <a:graphicData uri="http://schemas.openxmlformats.org/presentationml/2006/ole">
             <mc:AlternateContent xmlns:mc="http://schemas.openxmlformats.org/markup-compatibility/2006">
               <mc:Choice xmlns:v="urn:schemas-microsoft-com:vml" Requires="v">
-                <p:oleObj spid="_x0000_s3789" name="Equation" r:id="rId8" imgW="1282700" imgH="546100" progId="Equation.3">
+                <p:oleObj spid="_x0000_s3801" name="Equation" r:id="rId8" imgW="1282700" imgH="546100" progId="Equation.3">
                   <p:embed/>
                 </p:oleObj>
               </mc:Choice>
@@ -18330,7 +18325,6 @@
                       <a:ln>
                         <a:noFill/>
                       </a:ln>
-                      <a:extLst/>
                     </p:spPr>
                   </p:pic>
                 </p:oleObj>
@@ -18402,7 +18396,7 @@
           <a:graphicData uri="http://schemas.openxmlformats.org/presentationml/2006/ole">
             <mc:AlternateContent xmlns:mc="http://schemas.openxmlformats.org/markup-compatibility/2006">
               <mc:Choice xmlns:v="urn:schemas-microsoft-com:vml" Requires="v">
-                <p:oleObj spid="_x0000_s3790" name="Equation" r:id="rId10" imgW="927100" imgH="431800" progId="Equation.3">
+                <p:oleObj spid="_x0000_s3802" name="Equation" r:id="rId10" imgW="927100" imgH="431800" progId="Equation.3">
                   <p:embed/>
                 </p:oleObj>
               </mc:Choice>
@@ -18442,7 +18436,6 @@
                       <a:ln>
                         <a:noFill/>
                       </a:ln>
-                      <a:extLst/>
                     </p:spPr>
                   </p:pic>
                 </p:oleObj>
@@ -18648,6 +18641,403 @@
 </file>
 
 <file path=ppt/slides/slide6.xml><?xml version="1.0" encoding="utf-8"?>
+<p:sld xmlns:a="http://schemas.openxmlformats.org/drawingml/2006/main" xmlns:r="http://schemas.openxmlformats.org/officeDocument/2006/relationships" xmlns:p="http://schemas.openxmlformats.org/presentationml/2006/main">
+  <p:cSld>
+    <p:spTree>
+      <p:nvGrpSpPr>
+        <p:cNvPr id="1" name=""/>
+        <p:cNvGrpSpPr/>
+        <p:nvPr/>
+      </p:nvGrpSpPr>
+      <p:grpSpPr>
+        <a:xfrm>
+          <a:off x="0" y="0"/>
+          <a:ext cx="0" cy="0"/>
+          <a:chOff x="0" y="0"/>
+          <a:chExt cx="0" cy="0"/>
+        </a:xfrm>
+      </p:grpSpPr>
+      <p:sp>
+        <p:nvSpPr>
+          <p:cNvPr id="5" name="TextBox 4">
+            <a:extLst>
+              <a:ext uri="{FF2B5EF4-FFF2-40B4-BE49-F238E27FC236}">
+                <a16:creationId xmlns:a16="http://schemas.microsoft.com/office/drawing/2014/main" id="{A47F806F-C963-C443-8137-5603A474DE43}"/>
+              </a:ext>
+            </a:extLst>
+          </p:cNvPr>
+          <p:cNvSpPr txBox="1"/>
+          <p:nvPr/>
+        </p:nvSpPr>
+        <p:spPr>
+          <a:xfrm>
+            <a:off x="329184" y="512064"/>
+            <a:ext cx="5291328" cy="738664"/>
+          </a:xfrm>
+          <a:prstGeom prst="rect">
+            <a:avLst/>
+          </a:prstGeom>
+          <a:noFill/>
+        </p:spPr>
+        <p:txBody>
+          <a:bodyPr wrap="square" rtlCol="0">
+            <a:spAutoFit/>
+          </a:bodyPr>
+          <a:lstStyle/>
+          <a:p>
+            <a:r>
+              <a:rPr lang="en-US" dirty="0"/>
+              <a:t>When the two independent samples are assumed to be drawn </a:t>
+            </a:r>
+          </a:p>
+          <a:p>
+            <a:r>
+              <a:rPr lang="en-US" dirty="0"/>
+              <a:t>from populations with unequal variances</a:t>
+            </a:r>
+            <a:r>
+              <a:rPr lang="el-GR" dirty="0"/>
+              <a:t>, </a:t>
+            </a:r>
+            <a:endParaRPr lang="en-US" dirty="0"/>
+          </a:p>
+          <a:p>
+            <a:r>
+              <a:rPr lang="en-US" dirty="0"/>
+              <a:t>the test statistic t is computed as:</a:t>
+            </a:r>
+          </a:p>
+        </p:txBody>
+      </p:sp>
+      <p:sp>
+        <p:nvSpPr>
+          <p:cNvPr id="8" name="TextBox 7">
+            <a:extLst>
+              <a:ext uri="{FF2B5EF4-FFF2-40B4-BE49-F238E27FC236}">
+                <a16:creationId xmlns:a16="http://schemas.microsoft.com/office/drawing/2014/main" id="{22DAE4BB-2800-A14E-A6C3-02DE368C36A6}"/>
+              </a:ext>
+            </a:extLst>
+          </p:cNvPr>
+          <p:cNvSpPr txBox="1"/>
+          <p:nvPr/>
+        </p:nvSpPr>
+        <p:spPr>
+          <a:xfrm>
+            <a:off x="329184" y="3928634"/>
+            <a:ext cx="5606288" cy="1384995"/>
+          </a:xfrm>
+          <a:prstGeom prst="rect">
+            <a:avLst/>
+          </a:prstGeom>
+          <a:noFill/>
+        </p:spPr>
+        <p:txBody>
+          <a:bodyPr wrap="square" rtlCol="0">
+            <a:spAutoFit/>
+          </a:bodyPr>
+          <a:lstStyle/>
+          <a:p>
+            <a:r>
+              <a:rPr lang="en-US" dirty="0"/>
+              <a:t>x¯</a:t>
+            </a:r>
+            <a:r>
+              <a:rPr lang="en-US" baseline="-25000" dirty="0"/>
+              <a:t>1</a:t>
+            </a:r>
+            <a:r>
+              <a:rPr lang="en-US" dirty="0"/>
+              <a:t> = Mean of first sample</a:t>
+            </a:r>
+          </a:p>
+          <a:p>
+            <a:r>
+              <a:rPr lang="en-US" dirty="0"/>
+              <a:t>x¯</a:t>
+            </a:r>
+            <a:r>
+              <a:rPr lang="en-US" baseline="-25000" dirty="0"/>
+              <a:t>2</a:t>
+            </a:r>
+            <a:r>
+              <a:rPr lang="en-US" dirty="0"/>
+              <a:t> = Mean of second sample</a:t>
+            </a:r>
+          </a:p>
+          <a:p>
+            <a:r>
+              <a:rPr lang="en-US" dirty="0"/>
+              <a:t>n</a:t>
+            </a:r>
+            <a:r>
+              <a:rPr lang="en-US" baseline="-25000" dirty="0"/>
+              <a:t>1</a:t>
+            </a:r>
+            <a:r>
+              <a:rPr lang="en-US" dirty="0"/>
+              <a:t> = Sample size (i.e., number of observations) of first sample</a:t>
+            </a:r>
+          </a:p>
+          <a:p>
+            <a:r>
+              <a:rPr lang="en-US" dirty="0"/>
+              <a:t>n</a:t>
+            </a:r>
+            <a:r>
+              <a:rPr lang="en-US" baseline="-25000" dirty="0"/>
+              <a:t>2</a:t>
+            </a:r>
+            <a:r>
+              <a:rPr lang="en-US" dirty="0"/>
+              <a:t> = Sample size (i.e., number of observations) of second sample</a:t>
+            </a:r>
+          </a:p>
+          <a:p>
+            <a:r>
+              <a:rPr lang="en-US" dirty="0"/>
+              <a:t>s</a:t>
+            </a:r>
+            <a:r>
+              <a:rPr lang="en-US" baseline="-25000" dirty="0"/>
+              <a:t>1</a:t>
+            </a:r>
+            <a:r>
+              <a:rPr lang="en-US" dirty="0"/>
+              <a:t> = Standard deviation of first sample</a:t>
+            </a:r>
+          </a:p>
+          <a:p>
+            <a:r>
+              <a:rPr lang="en-US" dirty="0"/>
+              <a:t>s</a:t>
+            </a:r>
+            <a:r>
+              <a:rPr lang="en-US" baseline="-25000" dirty="0"/>
+              <a:t>2</a:t>
+            </a:r>
+            <a:r>
+              <a:rPr lang="en-US" dirty="0"/>
+              <a:t> = Standard deviation of second sample</a:t>
+            </a:r>
+          </a:p>
+        </p:txBody>
+      </p:sp>
+      <p:sp>
+        <p:nvSpPr>
+          <p:cNvPr id="9" name="TextBox 8">
+            <a:extLst>
+              <a:ext uri="{FF2B5EF4-FFF2-40B4-BE49-F238E27FC236}">
+                <a16:creationId xmlns:a16="http://schemas.microsoft.com/office/drawing/2014/main" id="{D3D314F0-7B71-354C-970C-65F2B47262EB}"/>
+              </a:ext>
+            </a:extLst>
+          </p:cNvPr>
+          <p:cNvSpPr txBox="1"/>
+          <p:nvPr/>
+        </p:nvSpPr>
+        <p:spPr>
+          <a:xfrm>
+            <a:off x="243840" y="3525552"/>
+            <a:ext cx="1011936" cy="307777"/>
+          </a:xfrm>
+          <a:prstGeom prst="rect">
+            <a:avLst/>
+          </a:prstGeom>
+          <a:noFill/>
+        </p:spPr>
+        <p:txBody>
+          <a:bodyPr wrap="square" rtlCol="0">
+            <a:spAutoFit/>
+          </a:bodyPr>
+          <a:lstStyle/>
+          <a:p>
+            <a:r>
+              <a:rPr lang="en-US" dirty="0"/>
+              <a:t>Where:</a:t>
+            </a:r>
+          </a:p>
+        </p:txBody>
+      </p:sp>
+      <p:sp>
+        <p:nvSpPr>
+          <p:cNvPr id="10" name="TextBox 9">
+            <a:extLst>
+              <a:ext uri="{FF2B5EF4-FFF2-40B4-BE49-F238E27FC236}">
+                <a16:creationId xmlns:a16="http://schemas.microsoft.com/office/drawing/2014/main" id="{2132E263-18B8-1547-A9D9-02886A939AE9}"/>
+              </a:ext>
+            </a:extLst>
+          </p:cNvPr>
+          <p:cNvSpPr txBox="1"/>
+          <p:nvPr/>
+        </p:nvSpPr>
+        <p:spPr>
+          <a:xfrm>
+            <a:off x="7546848" y="725535"/>
+            <a:ext cx="4401312" cy="2462213"/>
+          </a:xfrm>
+          <a:prstGeom prst="rect">
+            <a:avLst/>
+          </a:prstGeom>
+          <a:noFill/>
+        </p:spPr>
+        <p:txBody>
+          <a:bodyPr wrap="square" rtlCol="0">
+            <a:spAutoFit/>
+          </a:bodyPr>
+          <a:lstStyle/>
+          <a:p>
+            <a:r>
+              <a:rPr lang="en-US" dirty="0"/>
+              <a:t>Suppose that standard deviations are about the same</a:t>
+            </a:r>
+          </a:p>
+          <a:p>
+            <a:r>
+              <a:rPr lang="en-US" dirty="0"/>
+              <a:t>(s</a:t>
+            </a:r>
+            <a:r>
+              <a:rPr lang="en-US" baseline="-25000" dirty="0"/>
+              <a:t>1</a:t>
+            </a:r>
+            <a:r>
+              <a:rPr lang="en-US" dirty="0"/>
+              <a:t> = s</a:t>
+            </a:r>
+            <a:r>
+              <a:rPr lang="en-US" baseline="-25000" dirty="0"/>
+              <a:t>2</a:t>
+            </a:r>
+            <a:r>
+              <a:rPr lang="en-US" dirty="0"/>
+              <a:t> = s)</a:t>
+            </a:r>
+          </a:p>
+          <a:p>
+            <a:endParaRPr lang="en-US" dirty="0"/>
+          </a:p>
+          <a:p>
+            <a:r>
+              <a:rPr lang="en-US" dirty="0"/>
+              <a:t>and numbers observations are equal and big</a:t>
+            </a:r>
+          </a:p>
+          <a:p>
+            <a:r>
+              <a:rPr lang="en-US" dirty="0"/>
+              <a:t>(n</a:t>
+            </a:r>
+            <a:r>
+              <a:rPr lang="en-US" baseline="-25000" dirty="0"/>
+              <a:t>1</a:t>
+            </a:r>
+            <a:r>
+              <a:rPr lang="en-US" dirty="0"/>
+              <a:t> = n</a:t>
+            </a:r>
+            <a:r>
+              <a:rPr lang="en-US" baseline="-25000" dirty="0"/>
+              <a:t>2</a:t>
+            </a:r>
+            <a:r>
+              <a:rPr lang="en-US" dirty="0"/>
+              <a:t> = n)</a:t>
+            </a:r>
+          </a:p>
+          <a:p>
+            <a:endParaRPr lang="en-US" dirty="0"/>
+          </a:p>
+          <a:p>
+            <a:r>
+              <a:rPr lang="en-US" dirty="0"/>
+              <a:t>Then t-statistics simplifies to:</a:t>
+            </a:r>
+          </a:p>
+          <a:p>
+            <a:endParaRPr lang="en-US" dirty="0"/>
+          </a:p>
+          <a:p>
+            <a:r>
+              <a:rPr lang="en-US" dirty="0"/>
+              <a:t>      t = (x¯</a:t>
+            </a:r>
+            <a:r>
+              <a:rPr lang="en-US" baseline="-25000" dirty="0"/>
+              <a:t>1 </a:t>
+            </a:r>
+            <a:r>
+              <a:rPr lang="en-US" dirty="0"/>
+              <a:t>- x¯</a:t>
+            </a:r>
+            <a:r>
+              <a:rPr lang="en-US" baseline="-25000" dirty="0"/>
+              <a:t>2</a:t>
+            </a:r>
+            <a:r>
+              <a:rPr lang="en-US" dirty="0"/>
+              <a:t>) / ( s*sqrt(2/n) )</a:t>
+            </a:r>
+          </a:p>
+          <a:p>
+            <a:endParaRPr lang="en-US" dirty="0"/>
+          </a:p>
+          <a:p>
+            <a:r>
+              <a:rPr lang="en-US" dirty="0"/>
+              <a:t>so  t  grows as sqrt(n)</a:t>
+            </a:r>
+          </a:p>
+        </p:txBody>
+      </p:sp>
+      <p:pic>
+        <p:nvPicPr>
+          <p:cNvPr id="11" name="Picture 10">
+            <a:extLst>
+              <a:ext uri="{FF2B5EF4-FFF2-40B4-BE49-F238E27FC236}">
+                <a16:creationId xmlns:a16="http://schemas.microsoft.com/office/drawing/2014/main" id="{0FC688BB-FA34-104C-A9D4-A1591AE65B4F}"/>
+              </a:ext>
+            </a:extLst>
+          </p:cNvPr>
+          <p:cNvPicPr>
+            <a:picLocks noChangeAspect="1"/>
+          </p:cNvPicPr>
+          <p:nvPr/>
+        </p:nvPicPr>
+        <p:blipFill>
+          <a:blip r:embed="rId2" cstate="email">
+            <a:extLst>
+              <a:ext uri="{28A0092B-C50C-407E-A947-70E740481C1C}">
+                <a14:useLocalDpi xmlns:a14="http://schemas.microsoft.com/office/drawing/2010/main"/>
+              </a:ext>
+            </a:extLst>
+          </a:blip>
+          <a:stretch>
+            <a:fillRect/>
+          </a:stretch>
+        </p:blipFill>
+        <p:spPr>
+          <a:xfrm>
+            <a:off x="1457706" y="1328928"/>
+            <a:ext cx="2400300" cy="1460500"/>
+          </a:xfrm>
+          <a:prstGeom prst="rect">
+            <a:avLst/>
+          </a:prstGeom>
+        </p:spPr>
+      </p:pic>
+    </p:spTree>
+    <p:extLst>
+      <p:ext uri="{BB962C8B-B14F-4D97-AF65-F5344CB8AC3E}">
+        <p14:creationId xmlns:p14="http://schemas.microsoft.com/office/powerpoint/2010/main" val="3953362428"/>
+      </p:ext>
+    </p:extLst>
+  </p:cSld>
+  <p:clrMapOvr>
+    <a:masterClrMapping/>
+  </p:clrMapOvr>
+</p:sld>
+</file>
+
+<file path=ppt/slides/slide7.xml><?xml version="1.0" encoding="utf-8"?>
 <p:sld xmlns:a="http://schemas.openxmlformats.org/drawingml/2006/main" xmlns:r="http://schemas.openxmlformats.org/officeDocument/2006/relationships" xmlns:p="http://schemas.openxmlformats.org/presentationml/2006/main">
   <p:cSld>
     <p:spTree>
@@ -18930,7 +19320,7 @@
           <a:graphicData uri="http://schemas.openxmlformats.org/presentationml/2006/ole">
             <mc:AlternateContent xmlns:mc="http://schemas.openxmlformats.org/markup-compatibility/2006">
               <mc:Choice xmlns:v="urn:schemas-microsoft-com:vml" Requires="v">
-                <p:oleObj spid="_x0000_s16406" name="Equation" r:id="rId4" imgW="17373600" imgH="10058400" progId="Equation.3">
+                <p:oleObj spid="_x0000_s16424" name="Equation" r:id="rId4" imgW="17373600" imgH="10058400" progId="Equation.3">
                   <p:embed/>
                 </p:oleObj>
               </mc:Choice>
@@ -18970,7 +19360,6 @@
                       <a:ln>
                         <a:noFill/>
                       </a:ln>
-                      <a:extLst/>
                     </p:spPr>
                   </p:pic>
                 </p:oleObj>
@@ -19062,7 +19451,7 @@
           <a:graphicData uri="http://schemas.openxmlformats.org/presentationml/2006/ole">
             <mc:AlternateContent xmlns:mc="http://schemas.openxmlformats.org/markup-compatibility/2006">
               <mc:Choice xmlns:v="urn:schemas-microsoft-com:vml" Requires="v">
-                <p:oleObj spid="_x0000_s16407" name="Equation" r:id="rId6" imgW="18592800" imgH="10363200" progId="Equation.3">
+                <p:oleObj spid="_x0000_s16425" name="Equation" r:id="rId6" imgW="18592800" imgH="10363200" progId="Equation.3">
                   <p:embed/>
                 </p:oleObj>
               </mc:Choice>
@@ -19102,7 +19491,6 @@
                       <a:ln>
                         <a:noFill/>
                       </a:ln>
-                      <a:extLst/>
                     </p:spPr>
                   </p:pic>
                 </p:oleObj>
@@ -19139,7 +19527,7 @@
           <a:graphicData uri="http://schemas.openxmlformats.org/presentationml/2006/ole">
             <mc:AlternateContent xmlns:mc="http://schemas.openxmlformats.org/markup-compatibility/2006">
               <mc:Choice xmlns:v="urn:schemas-microsoft-com:vml" Requires="v">
-                <p:oleObj spid="_x0000_s16408" name="Equation" r:id="rId8" imgW="36271200" imgH="21945600" progId="Equation.3">
+                <p:oleObj spid="_x0000_s16426" name="Equation" r:id="rId8" imgW="36271200" imgH="21945600" progId="Equation.3">
                   <p:embed/>
                 </p:oleObj>
               </mc:Choice>
@@ -19179,7 +19567,6 @@
                       <a:ln>
                         <a:noFill/>
                       </a:ln>
-                      <a:extLst/>
                     </p:spPr>
                   </p:pic>
                 </p:oleObj>
@@ -19216,7 +19603,7 @@
           <a:graphicData uri="http://schemas.openxmlformats.org/presentationml/2006/ole">
             <mc:AlternateContent xmlns:mc="http://schemas.openxmlformats.org/markup-compatibility/2006">
               <mc:Choice xmlns:v="urn:schemas-microsoft-com:vml" Requires="v">
-                <p:oleObj spid="_x0000_s16409" name="Equation" r:id="rId10" imgW="38404800" imgH="8839200" progId="Equation.3">
+                <p:oleObj spid="_x0000_s16427" name="Equation" r:id="rId10" imgW="38404800" imgH="8839200" progId="Equation.3">
                   <p:embed/>
                 </p:oleObj>
               </mc:Choice>
@@ -19256,7 +19643,6 @@
                       <a:ln>
                         <a:noFill/>
                       </a:ln>
-                      <a:extLst/>
                     </p:spPr>
                   </p:pic>
                 </p:oleObj>
@@ -19293,7 +19679,7 @@
           <a:graphicData uri="http://schemas.openxmlformats.org/presentationml/2006/ole">
             <mc:AlternateContent xmlns:mc="http://schemas.openxmlformats.org/markup-compatibility/2006">
               <mc:Choice xmlns:v="urn:schemas-microsoft-com:vml" Requires="v">
-                <p:oleObj spid="_x0000_s16410" name="Equation" r:id="rId12" imgW="19812000" imgH="11277600" progId="Equation.3">
+                <p:oleObj spid="_x0000_s16428" name="Equation" r:id="rId12" imgW="19812000" imgH="11277600" progId="Equation.3">
                   <p:embed/>
                 </p:oleObj>
               </mc:Choice>
@@ -19333,7 +19719,6 @@
                       <a:ln>
                         <a:noFill/>
                       </a:ln>
-                      <a:extLst/>
                     </p:spPr>
                   </p:pic>
                 </p:oleObj>
@@ -19370,7 +19755,7 @@
           <a:graphicData uri="http://schemas.openxmlformats.org/presentationml/2006/ole">
             <mc:AlternateContent xmlns:mc="http://schemas.openxmlformats.org/markup-compatibility/2006">
               <mc:Choice xmlns:v="urn:schemas-microsoft-com:vml" Requires="v">
-                <p:oleObj spid="_x0000_s16411" name="Equation" r:id="rId14" imgW="42976800" imgH="5791200" progId="Equation.3">
+                <p:oleObj spid="_x0000_s16429" name="Equation" r:id="rId14" imgW="42976800" imgH="5791200" progId="Equation.3">
                   <p:embed/>
                 </p:oleObj>
               </mc:Choice>
@@ -19410,7 +19795,6 @@
                       <a:ln>
                         <a:noFill/>
                       </a:ln>
-                      <a:extLst/>
                     </p:spPr>
                   </p:pic>
                 </p:oleObj>
@@ -19467,7 +19851,7 @@
 </p:sld>
 </file>
 
-<file path=ppt/slides/slide7.xml><?xml version="1.0" encoding="utf-8"?>
+<file path=ppt/slides/slide8.xml><?xml version="1.0" encoding="utf-8"?>
 <p:sld xmlns:a="http://schemas.openxmlformats.org/drawingml/2006/main" xmlns:r="http://schemas.openxmlformats.org/officeDocument/2006/relationships" xmlns:p="http://schemas.openxmlformats.org/presentationml/2006/main">
   <p:cSld>
     <p:spTree>

--- a/statistics_07_t_distribution.pptx
+++ b/statistics_07_t_distribution.pptx
@@ -16298,7 +16298,7 @@
         <p:spPr>
           <a:xfrm>
             <a:off x="6685911" y="222037"/>
-            <a:ext cx="4946073" cy="5816977"/>
+            <a:ext cx="4946073" cy="6217087"/>
           </a:xfrm>
           <a:prstGeom prst="rect">
             <a:avLst/>
@@ -16343,7 +16343,7 @@
                   <a:srgbClr val="FF0000"/>
                 </a:solidFill>
               </a:rPr>
-              <a:t>t = (x-</a:t>
+              <a:t>t = (X – </a:t>
             </a:r>
             <a:r>
               <a:rPr lang="el-GR" sz="1200" b="1" dirty="0">
@@ -16351,7 +16351,36 @@
                   <a:srgbClr val="FF0000"/>
                 </a:solidFill>
               </a:rPr>
-              <a:t>μ)/</a:t>
+              <a:t>μ) / [ </a:t>
+            </a:r>
+            <a:r>
+              <a:rPr lang="en-US" sz="1200" b="1" dirty="0">
+                <a:solidFill>
+                  <a:srgbClr val="FF0000"/>
+                </a:solidFill>
+              </a:rPr>
+              <a:t>s/√(n) ]</a:t>
+            </a:r>
+          </a:p>
+          <a:p>
+            <a:endParaRPr lang="en-US" sz="1200" b="1" dirty="0"/>
+          </a:p>
+          <a:p>
+            <a:r>
+              <a:rPr lang="en-US" sz="1200" dirty="0"/>
+              <a:t>Here </a:t>
+            </a:r>
+            <a:r>
+              <a:rPr lang="el-GR" sz="1200" b="1" dirty="0">
+                <a:solidFill>
+                  <a:srgbClr val="FF0000"/>
+                </a:solidFill>
+              </a:rPr>
+              <a:t>μ</a:t>
+            </a:r>
+            <a:r>
+              <a:rPr lang="en-US" sz="1200" dirty="0"/>
+              <a:t> is a sample mean, </a:t>
             </a:r>
             <a:r>
               <a:rPr lang="en-US" sz="1200" b="1" dirty="0">
@@ -16361,14 +16390,18 @@
               </a:rPr>
               <a:t>s</a:t>
             </a:r>
-          </a:p>
-          <a:p>
-            <a:endParaRPr lang="en-US" sz="1200" b="1" dirty="0"/>
-          </a:p>
-          <a:p>
             <a:r>
               <a:rPr lang="en-US" sz="1200" dirty="0"/>
-              <a:t>Here </a:t>
+              <a:t> is a sample deviation.</a:t>
+            </a:r>
+          </a:p>
+          <a:p>
+            <a:endParaRPr lang="en-US" sz="1200" dirty="0"/>
+          </a:p>
+          <a:p>
+            <a:r>
+              <a:rPr lang="en-US" sz="1200" dirty="0"/>
+              <a:t>Note that </a:t>
             </a:r>
             <a:r>
               <a:rPr lang="en-US" sz="1200" b="1" dirty="0">
@@ -16376,11 +16409,7 @@
                   <a:srgbClr val="FF0000"/>
                 </a:solidFill>
               </a:rPr>
-              <a:t>s</a:t>
-            </a:r>
-            <a:r>
-              <a:rPr lang="en-US" sz="1200" dirty="0"/>
-              <a:t> is a sample mean.</a:t>
+              <a:t>t ~ √(n)</a:t>
             </a:r>
           </a:p>
           <a:p>
@@ -16747,8 +16776,8 @@
         </p:nvSpPr>
         <p:spPr>
           <a:xfrm>
-            <a:off x="75372" y="703840"/>
-            <a:ext cx="6082148" cy="400079"/>
+            <a:off x="0" y="698202"/>
+            <a:ext cx="6727764" cy="400079"/>
           </a:xfrm>
           <a:noFill/>
         </p:spPr>
@@ -16779,76 +16808,34 @@
                 <a:cs typeface="Arial"/>
                 <a:sym typeface="Arial"/>
               </a:rPr>
-              <a:t>The one-sample t test statistic (assuming the  null hypothesis is true)</a:t>
+              <a:t>The one-sample t test from: </a:t>
+            </a:r>
+            <a:r>
+              <a:rPr lang="en-US" sz="1400" dirty="0">
+                <a:solidFill>
+                  <a:srgbClr val="000000"/>
+                </a:solidFill>
+                <a:latin typeface="Arial"/>
+                <a:cs typeface="Arial"/>
+                <a:sym typeface="Arial"/>
+                <a:hlinkClick r:id="rId2"/>
+              </a:rPr>
+              <a:t>https://www.statisticshowto.com/one-sample-t-test/</a:t>
+            </a:r>
+            <a:r>
+              <a:rPr lang="en-US" sz="1400" dirty="0">
+                <a:solidFill>
+                  <a:srgbClr val="000000"/>
+                </a:solidFill>
+                <a:latin typeface="Arial"/>
+                <a:cs typeface="Arial"/>
+                <a:sym typeface="Arial"/>
+              </a:rPr>
+              <a:t>  </a:t>
             </a:r>
           </a:p>
         </p:txBody>
       </p:sp>
-      <p:graphicFrame>
-        <p:nvGraphicFramePr>
-          <p:cNvPr id="9" name="Object 3" descr="An equation reads t equals sample mean minus population mean divided by estimated standard error equals M minus mu divided by S subscript M equals 0."/>
-          <p:cNvGraphicFramePr>
-            <a:graphicFrameLocks noGrp="1" noChangeAspect="1"/>
-          </p:cNvGraphicFramePr>
-          <p:nvPr>
-            <p:ph sz="half" idx="2"/>
-            <p:extLst>
-              <p:ext uri="{D42A27DB-BD31-4B8C-83A1-F6EECF244321}">
-                <p14:modId xmlns:p14="http://schemas.microsoft.com/office/powerpoint/2010/main" val="309610310"/>
-              </p:ext>
-            </p:extLst>
-          </p:nvPr>
-        </p:nvGraphicFramePr>
-        <p:xfrm>
-          <a:off x="793142" y="1190979"/>
-          <a:ext cx="4373746" cy="625083"/>
-        </p:xfrm>
-        <a:graphic>
-          <a:graphicData uri="http://schemas.openxmlformats.org/presentationml/2006/ole">
-            <mc:AlternateContent xmlns:mc="http://schemas.openxmlformats.org/markup-compatibility/2006">
-              <mc:Choice xmlns:v="urn:schemas-microsoft-com:vml" Requires="v">
-                <p:oleObj spid="_x0000_s1210" name="Equation" r:id="rId3" imgW="3022560" imgH="431640" progId="Equation.DSMT4">
-                  <p:embed/>
-                </p:oleObj>
-              </mc:Choice>
-              <mc:Fallback>
-                <p:oleObj name="Equation" r:id="rId3" imgW="3022560" imgH="431640" progId="Equation.DSMT4">
-                  <p:embed/>
-                  <p:pic>
-                    <p:nvPicPr>
-                      <p:cNvPr id="9" name="Object 3" descr="An equation reads t equals sample mean minus population mean divided by estimated standard error equals M minus mu divided by S subscript M equals 0."/>
-                      <p:cNvPicPr>
-                        <a:picLocks noChangeAspect="1" noChangeArrowheads="1"/>
-                      </p:cNvPicPr>
-                      <p:nvPr/>
-                    </p:nvPicPr>
-                    <p:blipFill>
-                      <a:blip r:embed="rId4"/>
-                      <a:srcRect/>
-                      <a:stretch>
-                        <a:fillRect/>
-                      </a:stretch>
-                    </p:blipFill>
-                    <p:spPr bwMode="auto">
-                      <a:xfrm>
-                        <a:off x="793142" y="1190979"/>
-                        <a:ext cx="4373746" cy="625083"/>
-                      </a:xfrm>
-                      <a:prstGeom prst="rect">
-                        <a:avLst/>
-                      </a:prstGeom>
-                      <a:noFill/>
-                      <a:ln>
-                        <a:noFill/>
-                      </a:ln>
-                    </p:spPr>
-                  </p:pic>
-                </p:oleObj>
-              </mc:Fallback>
-            </mc:AlternateContent>
-          </a:graphicData>
-        </a:graphic>
-      </p:graphicFrame>
       <p:sp>
         <p:nvSpPr>
           <p:cNvPr id="2" name="TextBox 1">
@@ -16863,7 +16850,7 @@
         </p:nvSpPr>
         <p:spPr>
           <a:xfrm>
-            <a:off x="180107" y="2118117"/>
+            <a:off x="6654856" y="2502654"/>
             <a:ext cx="3541287" cy="318977"/>
           </a:xfrm>
           <a:prstGeom prst="rect">
@@ -16899,7 +16886,7 @@
           <p:nvPr/>
         </p:nvPicPr>
         <p:blipFill>
-          <a:blip r:embed="rId5" cstate="email">
+          <a:blip r:embed="rId3" cstate="email">
             <a:extLst>
               <a:ext uri="{28A0092B-C50C-407E-A947-70E740481C1C}">
                 <a14:useLocalDpi xmlns:a14="http://schemas.microsoft.com/office/drawing/2010/main"/>
@@ -16912,7 +16899,7 @@
         </p:blipFill>
         <p:spPr bwMode="auto">
           <a:xfrm>
-            <a:off x="249129" y="2515674"/>
+            <a:off x="6654856" y="2841296"/>
             <a:ext cx="5461772" cy="2503029"/>
           </a:xfrm>
           <a:prstGeom prst="rect">
@@ -16947,7 +16934,7 @@
         </p:nvSpPr>
         <p:spPr>
           <a:xfrm>
-            <a:off x="75373" y="5162943"/>
+            <a:off x="6645498" y="5210542"/>
             <a:ext cx="5466446" cy="1384995"/>
           </a:xfrm>
           <a:prstGeom prst="rect">
@@ -17008,10 +16995,10 @@
       </p:sp>
       <p:sp>
         <p:nvSpPr>
-          <p:cNvPr id="7" name="TextBox 6">
+          <p:cNvPr id="11" name="TextBox 10">
             <a:extLst>
               <a:ext uri="{FF2B5EF4-FFF2-40B4-BE49-F238E27FC236}">
-                <a16:creationId xmlns:a16="http://schemas.microsoft.com/office/drawing/2014/main" id="{E1651FCF-C8B8-B147-A9E8-56B390038799}"/>
+                <a16:creationId xmlns:a16="http://schemas.microsoft.com/office/drawing/2014/main" id="{A3CEBD2E-DE8D-9248-A305-B38E9A451EA3}"/>
               </a:ext>
             </a:extLst>
           </p:cNvPr>
@@ -17020,8 +17007,8 @@
         </p:nvSpPr>
         <p:spPr>
           <a:xfrm>
-            <a:off x="6442364" y="776446"/>
-            <a:ext cx="5749636" cy="3108543"/>
+            <a:off x="70688" y="1005583"/>
+            <a:ext cx="6452336" cy="3108543"/>
           </a:xfrm>
           <a:prstGeom prst="rect">
             <a:avLst/>
@@ -17036,128 +17023,230 @@
           <a:p>
             <a:r>
               <a:rPr lang="en-US" dirty="0"/>
-              <a:t>Four (4) Steps of Hypothesis Testing:</a:t>
+              <a:t>Your company wants to improve sales. Past sales data indicate that the average sale was $100 per transaction. After training your sales force, recent sales data (taken from a sample of 25 salesmen) indicates an average sale of $130, with a standard deviation of $15. </a:t>
+            </a:r>
+            <a:br>
+              <a:rPr lang="en-US" dirty="0"/>
+            </a:br>
+            <a:r>
+              <a:rPr lang="en-US" dirty="0"/>
+              <a:t>Did the training work? Test your hypothesis at a 5% alpha level.</a:t>
             </a:r>
           </a:p>
           <a:p>
             <a:endParaRPr lang="en-US" dirty="0"/>
           </a:p>
           <a:p>
-            <a:pPr marL="342900" indent="-342900">
-              <a:buFont typeface="+mj-lt"/>
-              <a:buAutoNum type="arabicPeriod"/>
-            </a:pPr>
             <a:r>
               <a:rPr lang="en-US" dirty="0"/>
-              <a:t>State the null hypotheses  (H0) and alternative hypotheses, and select an alpha level</a:t>
-            </a:r>
-          </a:p>
-          <a:p>
-            <a:pPr marL="342900" indent="-342900">
-              <a:buFont typeface="+mj-lt"/>
-              <a:buAutoNum type="arabicPeriod"/>
-            </a:pPr>
+              <a:t>Step 1: Write your null hypothesis.  H0: </a:t>
+            </a:r>
+            <a:r>
+              <a:rPr lang="el-GR" dirty="0"/>
+              <a:t>μ = $100</a:t>
+            </a:r>
             <a:r>
               <a:rPr lang="en-US" dirty="0"/>
-              <a:t>Locate the critical region using the t-distribution table and </a:t>
-            </a:r>
-            <a:r>
-              <a:rPr lang="en-US" dirty="0" err="1"/>
-              <a:t>df</a:t>
-            </a:r>
-            <a:endParaRPr lang="en-US" dirty="0"/>
-          </a:p>
-          <a:p>
-            <a:pPr marL="342900" indent="-342900">
-              <a:buFont typeface="+mj-lt"/>
-              <a:buAutoNum type="arabicPeriod"/>
-            </a:pPr>
+              <a:t> , has not changed.</a:t>
+            </a:r>
+            <a:endParaRPr lang="el-GR" dirty="0"/>
+          </a:p>
+          <a:p>
             <a:r>
               <a:rPr lang="en-US" dirty="0"/>
-              <a:t>Calculate the t test statistic</a:t>
-            </a:r>
-          </a:p>
-          <a:p>
-            <a:pPr marL="342900" indent="-342900">
-              <a:buFont typeface="+mj-lt"/>
-              <a:buAutoNum type="arabicPeriod"/>
-            </a:pPr>
+              <a:t>Step 2: Write your alternate hypothesis. H1: </a:t>
+            </a:r>
+            <a:r>
+              <a:rPr lang="el-GR" dirty="0"/>
+              <a:t>μ &gt; $100</a:t>
+            </a:r>
             <a:r>
               <a:rPr lang="en-US" dirty="0"/>
-              <a:t>Make a decision regarding H0 (null hypothesis)</a:t>
-            </a:r>
-          </a:p>
-          <a:p>
-            <a:pPr marL="342900" indent="-342900">
-              <a:buFont typeface="+mj-lt"/>
-              <a:buAutoNum type="arabicPeriod"/>
-            </a:pPr>
-            <a:endParaRPr lang="en-US" dirty="0"/>
+              <a:t> , increased.</a:t>
+            </a:r>
+            <a:endParaRPr lang="el-GR" dirty="0"/>
           </a:p>
           <a:p>
             <a:r>
               <a:rPr lang="en-US" dirty="0"/>
-              <a:t>For example:</a:t>
-            </a:r>
-          </a:p>
-          <a:p>
-            <a:pPr marL="342900" indent="-342900">
-              <a:buFont typeface="+mj-lt"/>
-              <a:buAutoNum type="arabicPeriod"/>
-            </a:pPr>
+              <a:t>Step 3: Calculate some items:</a:t>
+            </a:r>
+          </a:p>
+          <a:p>
             <a:r>
               <a:rPr lang="en-US" dirty="0"/>
-              <a:t>H0: no effect (same mean), two-tailed test, alpha = 0.01</a:t>
-            </a:r>
-          </a:p>
-          <a:p>
-            <a:pPr marL="342900" indent="-342900">
-              <a:buFont typeface="+mj-lt"/>
-              <a:buAutoNum type="arabicPeriod"/>
-            </a:pPr>
+              <a:t>     The sample mean(x̄). This is given in the question as $130.</a:t>
+            </a:r>
+          </a:p>
+          <a:p>
             <a:r>
               <a:rPr lang="en-US" dirty="0"/>
-              <a:t>For sample size 100, critical t-values = +/-2.6264</a:t>
-            </a:r>
-          </a:p>
-          <a:p>
-            <a:pPr marL="342900" indent="-342900">
-              <a:buFont typeface="+mj-lt"/>
-              <a:buAutoNum type="arabicPeriod"/>
-            </a:pPr>
+              <a:t>     The population mean(</a:t>
+            </a:r>
+            <a:r>
+              <a:rPr lang="el-GR" dirty="0"/>
+              <a:t>μ). </a:t>
+            </a:r>
             <a:r>
               <a:rPr lang="en-US" dirty="0"/>
-              <a:t>t-statistics = (</a:t>
-            </a:r>
-            <a:r>
-              <a:rPr lang="en-US" dirty="0" err="1"/>
-              <a:t>sample_mean</a:t>
-            </a:r>
+              <a:t>Given as $100 (from past data).</a:t>
+            </a:r>
+          </a:p>
+          <a:p>
             <a:r>
               <a:rPr lang="en-US" dirty="0"/>
-              <a:t> – </a:t>
-            </a:r>
-            <a:r>
-              <a:rPr lang="en-US" dirty="0" err="1"/>
-              <a:t>population_mean</a:t>
-            </a:r>
+              <a:t>     The sample standard deviation(s) = $15.</a:t>
+            </a:r>
+          </a:p>
+          <a:p>
             <a:r>
               <a:rPr lang="en-US" dirty="0"/>
-              <a:t>) / s , where s is an estimated standard error (calculated from sample)</a:t>
-            </a:r>
-          </a:p>
-          <a:p>
-            <a:pPr marL="342900" indent="-342900">
-              <a:buFont typeface="+mj-lt"/>
-              <a:buAutoNum type="arabicPeriod"/>
-            </a:pPr>
+              <a:t>     Number of observations(n) = 25.</a:t>
+            </a:r>
+          </a:p>
+          <a:p>
             <a:r>
               <a:rPr lang="en-US" dirty="0"/>
-              <a:t>if || t-statistics ||  &gt; critical value, then we reject the H0</a:t>
+              <a:t>Step 4: Insert the items from above into the t score formula.</a:t>
             </a:r>
           </a:p>
         </p:txBody>
       </p:sp>
+      <p:pic>
+        <p:nvPicPr>
+          <p:cNvPr id="12" name="Picture 11">
+            <a:extLst>
+              <a:ext uri="{FF2B5EF4-FFF2-40B4-BE49-F238E27FC236}">
+                <a16:creationId xmlns:a16="http://schemas.microsoft.com/office/drawing/2014/main" id="{9B2564E7-5A3F-D04E-A99B-FD18F0F9D7AF}"/>
+              </a:ext>
+            </a:extLst>
+          </p:cNvPr>
+          <p:cNvPicPr>
+            <a:picLocks noChangeAspect="1"/>
+          </p:cNvPicPr>
+          <p:nvPr/>
+        </p:nvPicPr>
+        <p:blipFill>
+          <a:blip r:embed="rId4" cstate="email">
+            <a:extLst>
+              <a:ext uri="{28A0092B-C50C-407E-A947-70E740481C1C}">
+                <a14:useLocalDpi xmlns:a14="http://schemas.microsoft.com/office/drawing/2010/main"/>
+              </a:ext>
+            </a:extLst>
+          </a:blip>
+          <a:stretch>
+            <a:fillRect/>
+          </a:stretch>
+        </p:blipFill>
+        <p:spPr>
+          <a:xfrm>
+            <a:off x="1612088" y="4092811"/>
+            <a:ext cx="1149092" cy="808373"/>
+          </a:xfrm>
+          <a:prstGeom prst="rect">
+            <a:avLst/>
+          </a:prstGeom>
+        </p:spPr>
+      </p:pic>
+      <p:sp>
+        <p:nvSpPr>
+          <p:cNvPr id="13" name="TextBox 12">
+            <a:extLst>
+              <a:ext uri="{FF2B5EF4-FFF2-40B4-BE49-F238E27FC236}">
+                <a16:creationId xmlns:a16="http://schemas.microsoft.com/office/drawing/2014/main" id="{1522FEED-884D-CA41-9ED2-F831DAFAB007}"/>
+              </a:ext>
+            </a:extLst>
+          </p:cNvPr>
+          <p:cNvSpPr txBox="1"/>
+          <p:nvPr/>
+        </p:nvSpPr>
+        <p:spPr>
+          <a:xfrm>
+            <a:off x="75372" y="4901184"/>
+            <a:ext cx="5749635" cy="1815882"/>
+          </a:xfrm>
+          <a:prstGeom prst="rect">
+            <a:avLst/>
+          </a:prstGeom>
+          <a:noFill/>
+        </p:spPr>
+        <p:txBody>
+          <a:bodyPr wrap="square" rtlCol="0">
+            <a:spAutoFit/>
+          </a:bodyPr>
+          <a:lstStyle/>
+          <a:p>
+            <a:r>
+              <a:rPr lang="en-US" dirty="0"/>
+              <a:t>t = (130 – 100) / ((15 / √(25)) = 30/3 = 10</a:t>
+            </a:r>
+          </a:p>
+          <a:p>
+            <a:endParaRPr lang="en-US" dirty="0"/>
+          </a:p>
+          <a:p>
+            <a:r>
+              <a:rPr lang="en-US" dirty="0"/>
+              <a:t>Step 5: Find the t-table value for alpha = 5% </a:t>
+            </a:r>
+          </a:p>
+          <a:p>
+            <a:r>
+              <a:rPr lang="en-US" dirty="0"/>
+              <a:t>and degrees of freedom = Number of observations – 1 = 24. </a:t>
+            </a:r>
+          </a:p>
+          <a:p>
+            <a:r>
+              <a:rPr lang="en-US" dirty="0"/>
+              <a:t>The intersection is 1.711 . This is your one-tailed critical t-value. </a:t>
+            </a:r>
+          </a:p>
+          <a:p>
+            <a:r>
+              <a:rPr lang="en-US" dirty="0"/>
+              <a:t>As 10 &gt; 1.711, we reject the null hypothesis. it’s highly likely that the mean sale has become greater. The sales training was probably a success.</a:t>
+            </a:r>
+          </a:p>
+        </p:txBody>
+      </p:sp>
+      <p:cxnSp>
+        <p:nvCxnSpPr>
+          <p:cNvPr id="15" name="Straight Connector 14">
+            <a:extLst>
+              <a:ext uri="{FF2B5EF4-FFF2-40B4-BE49-F238E27FC236}">
+                <a16:creationId xmlns:a16="http://schemas.microsoft.com/office/drawing/2014/main" id="{9ACEF70A-E15C-754B-9FAE-A5AECDA6E552}"/>
+              </a:ext>
+            </a:extLst>
+          </p:cNvPr>
+          <p:cNvCxnSpPr/>
+          <p:nvPr/>
+        </p:nvCxnSpPr>
+        <p:spPr>
+          <a:xfrm>
+            <a:off x="6494202" y="1950720"/>
+            <a:ext cx="0" cy="4766346"/>
+          </a:xfrm>
+          <a:prstGeom prst="line">
+            <a:avLst/>
+          </a:prstGeom>
+          <a:ln w="63500"/>
+        </p:spPr>
+        <p:style>
+          <a:lnRef idx="1">
+            <a:schemeClr val="accent1"/>
+          </a:lnRef>
+          <a:fillRef idx="0">
+            <a:schemeClr val="accent1"/>
+          </a:fillRef>
+          <a:effectRef idx="0">
+            <a:schemeClr val="accent1"/>
+          </a:effectRef>
+          <a:fontRef idx="minor">
+            <a:schemeClr val="tx1"/>
+          </a:fontRef>
+        </p:style>
+      </p:cxnSp>
     </p:spTree>
     <p:extLst>
       <p:ext uri="{BB962C8B-B14F-4D97-AF65-F5344CB8AC3E}">
@@ -17478,7 +17567,7 @@
           <a:graphicData uri="http://schemas.openxmlformats.org/presentationml/2006/ole">
             <mc:AlternateContent xmlns:mc="http://schemas.openxmlformats.org/markup-compatibility/2006">
               <mc:Choice xmlns:v="urn:schemas-microsoft-com:vml" Requires="v">
-                <p:oleObj spid="_x0000_s2596" name="Equation" r:id="rId3" imgW="2438280" imgH="444240" progId="Equation.DSMT4">
+                <p:oleObj spid="_x0000_s2605" name="Equation" r:id="rId3" imgW="2438280" imgH="444240" progId="Equation.DSMT4">
                   <p:embed/>
                 </p:oleObj>
               </mc:Choice>
@@ -17636,7 +17725,7 @@
           <a:graphicData uri="http://schemas.openxmlformats.org/presentationml/2006/ole">
             <mc:AlternateContent xmlns:mc="http://schemas.openxmlformats.org/markup-compatibility/2006">
               <mc:Choice xmlns:v="urn:schemas-microsoft-com:vml" Requires="v">
-                <p:oleObj spid="_x0000_s2597" name="Equation" r:id="rId5" imgW="660113" imgH="431613" progId="Equation.3">
+                <p:oleObj spid="_x0000_s2606" name="Equation" r:id="rId5" imgW="660113" imgH="431613" progId="Equation.3">
                   <p:embed/>
                 </p:oleObj>
               </mc:Choice>
@@ -17712,7 +17801,7 @@
           <a:graphicData uri="http://schemas.openxmlformats.org/presentationml/2006/ole">
             <mc:AlternateContent xmlns:mc="http://schemas.openxmlformats.org/markup-compatibility/2006">
               <mc:Choice xmlns:v="urn:schemas-microsoft-com:vml" Requires="v">
-                <p:oleObj spid="_x0000_s2598" name="Equation" r:id="rId7" imgW="787058" imgH="215806" progId="Equation.3">
+                <p:oleObj spid="_x0000_s2607" name="Equation" r:id="rId7" imgW="787058" imgH="215806" progId="Equation.3">
                   <p:embed/>
                 </p:oleObj>
               </mc:Choice>
@@ -18098,7 +18187,7 @@
           <a:graphicData uri="http://schemas.openxmlformats.org/presentationml/2006/ole">
             <mc:AlternateContent xmlns:mc="http://schemas.openxmlformats.org/markup-compatibility/2006">
               <mc:Choice xmlns:v="urn:schemas-microsoft-com:vml" Requires="v">
-                <p:oleObj spid="_x0000_s3799" name="Equation" r:id="rId4" imgW="1054100" imgH="228600" progId="Equation.3">
+                <p:oleObj spid="_x0000_s3811" name="Equation" r:id="rId4" imgW="1054100" imgH="228600" progId="Equation.3">
                   <p:embed/>
                 </p:oleObj>
               </mc:Choice>
@@ -18209,7 +18298,7 @@
           <a:graphicData uri="http://schemas.openxmlformats.org/presentationml/2006/ole">
             <mc:AlternateContent xmlns:mc="http://schemas.openxmlformats.org/markup-compatibility/2006">
               <mc:Choice xmlns:v="urn:schemas-microsoft-com:vml" Requires="v">
-                <p:oleObj spid="_x0000_s3800" name="Equation" r:id="rId6" imgW="1701800" imgH="495300" progId="Equation.3">
+                <p:oleObj spid="_x0000_s3812" name="Equation" r:id="rId6" imgW="1701800" imgH="495300" progId="Equation.3">
                   <p:embed/>
                 </p:oleObj>
               </mc:Choice>
@@ -18285,7 +18374,7 @@
           <a:graphicData uri="http://schemas.openxmlformats.org/presentationml/2006/ole">
             <mc:AlternateContent xmlns:mc="http://schemas.openxmlformats.org/markup-compatibility/2006">
               <mc:Choice xmlns:v="urn:schemas-microsoft-com:vml" Requires="v">
-                <p:oleObj spid="_x0000_s3801" name="Equation" r:id="rId8" imgW="1282700" imgH="546100" progId="Equation.3">
+                <p:oleObj spid="_x0000_s3813" name="Equation" r:id="rId8" imgW="1282700" imgH="546100" progId="Equation.3">
                   <p:embed/>
                 </p:oleObj>
               </mc:Choice>
@@ -18396,7 +18485,7 @@
           <a:graphicData uri="http://schemas.openxmlformats.org/presentationml/2006/ole">
             <mc:AlternateContent xmlns:mc="http://schemas.openxmlformats.org/markup-compatibility/2006">
               <mc:Choice xmlns:v="urn:schemas-microsoft-com:vml" Requires="v">
-                <p:oleObj spid="_x0000_s3802" name="Equation" r:id="rId10" imgW="927100" imgH="431800" progId="Equation.3">
+                <p:oleObj spid="_x0000_s3814" name="Equation" r:id="rId10" imgW="927100" imgH="431800" progId="Equation.3">
                   <p:embed/>
                 </p:oleObj>
               </mc:Choice>
@@ -18958,32 +19047,16 @@
           <a:p>
             <a:r>
               <a:rPr lang="en-US" dirty="0"/>
-              <a:t>      t = (x¯</a:t>
-            </a:r>
-            <a:r>
-              <a:rPr lang="en-US" baseline="-25000" dirty="0"/>
-              <a:t>1 </a:t>
-            </a:r>
+              <a:t>      t = (x¯1 - x¯2) / ( s*√(2/n) )</a:t>
+            </a:r>
+          </a:p>
+          <a:p>
+            <a:endParaRPr lang="en-US" dirty="0"/>
+          </a:p>
+          <a:p>
             <a:r>
               <a:rPr lang="en-US" dirty="0"/>
-              <a:t>- x¯</a:t>
-            </a:r>
-            <a:r>
-              <a:rPr lang="en-US" baseline="-25000" dirty="0"/>
-              <a:t>2</a:t>
-            </a:r>
-            <a:r>
-              <a:rPr lang="en-US" dirty="0"/>
-              <a:t>) / ( s*sqrt(2/n) )</a:t>
-            </a:r>
-          </a:p>
-          <a:p>
-            <a:endParaRPr lang="en-US" dirty="0"/>
-          </a:p>
-          <a:p>
-            <a:r>
-              <a:rPr lang="en-US" dirty="0"/>
-              <a:t>so  t  grows as sqrt(n)</a:t>
+              <a:t>so  t  grows as √(n)</a:t>
             </a:r>
           </a:p>
         </p:txBody>
@@ -19320,7 +19393,7 @@
           <a:graphicData uri="http://schemas.openxmlformats.org/presentationml/2006/ole">
             <mc:AlternateContent xmlns:mc="http://schemas.openxmlformats.org/markup-compatibility/2006">
               <mc:Choice xmlns:v="urn:schemas-microsoft-com:vml" Requires="v">
-                <p:oleObj spid="_x0000_s16424" name="Equation" r:id="rId4" imgW="17373600" imgH="10058400" progId="Equation.3">
+                <p:oleObj spid="_x0000_s16442" name="Equation" r:id="rId4" imgW="17373600" imgH="10058400" progId="Equation.3">
                   <p:embed/>
                 </p:oleObj>
               </mc:Choice>
@@ -19451,7 +19524,7 @@
           <a:graphicData uri="http://schemas.openxmlformats.org/presentationml/2006/ole">
             <mc:AlternateContent xmlns:mc="http://schemas.openxmlformats.org/markup-compatibility/2006">
               <mc:Choice xmlns:v="urn:schemas-microsoft-com:vml" Requires="v">
-                <p:oleObj spid="_x0000_s16425" name="Equation" r:id="rId6" imgW="18592800" imgH="10363200" progId="Equation.3">
+                <p:oleObj spid="_x0000_s16443" name="Equation" r:id="rId6" imgW="18592800" imgH="10363200" progId="Equation.3">
                   <p:embed/>
                 </p:oleObj>
               </mc:Choice>
@@ -19527,7 +19600,7 @@
           <a:graphicData uri="http://schemas.openxmlformats.org/presentationml/2006/ole">
             <mc:AlternateContent xmlns:mc="http://schemas.openxmlformats.org/markup-compatibility/2006">
               <mc:Choice xmlns:v="urn:schemas-microsoft-com:vml" Requires="v">
-                <p:oleObj spid="_x0000_s16426" name="Equation" r:id="rId8" imgW="36271200" imgH="21945600" progId="Equation.3">
+                <p:oleObj spid="_x0000_s16444" name="Equation" r:id="rId8" imgW="36271200" imgH="21945600" progId="Equation.3">
                   <p:embed/>
                 </p:oleObj>
               </mc:Choice>
@@ -19603,7 +19676,7 @@
           <a:graphicData uri="http://schemas.openxmlformats.org/presentationml/2006/ole">
             <mc:AlternateContent xmlns:mc="http://schemas.openxmlformats.org/markup-compatibility/2006">
               <mc:Choice xmlns:v="urn:schemas-microsoft-com:vml" Requires="v">
-                <p:oleObj spid="_x0000_s16427" name="Equation" r:id="rId10" imgW="38404800" imgH="8839200" progId="Equation.3">
+                <p:oleObj spid="_x0000_s16445" name="Equation" r:id="rId10" imgW="38404800" imgH="8839200" progId="Equation.3">
                   <p:embed/>
                 </p:oleObj>
               </mc:Choice>
@@ -19679,7 +19752,7 @@
           <a:graphicData uri="http://schemas.openxmlformats.org/presentationml/2006/ole">
             <mc:AlternateContent xmlns:mc="http://schemas.openxmlformats.org/markup-compatibility/2006">
               <mc:Choice xmlns:v="urn:schemas-microsoft-com:vml" Requires="v">
-                <p:oleObj spid="_x0000_s16428" name="Equation" r:id="rId12" imgW="19812000" imgH="11277600" progId="Equation.3">
+                <p:oleObj spid="_x0000_s16446" name="Equation" r:id="rId12" imgW="19812000" imgH="11277600" progId="Equation.3">
                   <p:embed/>
                 </p:oleObj>
               </mc:Choice>
@@ -19755,7 +19828,7 @@
           <a:graphicData uri="http://schemas.openxmlformats.org/presentationml/2006/ole">
             <mc:AlternateContent xmlns:mc="http://schemas.openxmlformats.org/markup-compatibility/2006">
               <mc:Choice xmlns:v="urn:schemas-microsoft-com:vml" Requires="v">
-                <p:oleObj spid="_x0000_s16429" name="Equation" r:id="rId14" imgW="42976800" imgH="5791200" progId="Equation.3">
+                <p:oleObj spid="_x0000_s16447" name="Equation" r:id="rId14" imgW="42976800" imgH="5791200" progId="Equation.3">
                   <p:embed/>
                 </p:oleObj>
               </mc:Choice>

--- a/statistics_07_t_distribution.pptx
+++ b/statistics_07_t_distribution.pptx
@@ -16326,7 +16326,7 @@
           <a:p>
             <a:r>
               <a:rPr lang="en-US" sz="1200" dirty="0"/>
-              <a:t>When sample size is small ( N &lt; 30 ), then even if we know that the underlying distribution is gaussian, we still can not evaluate the distribution's sigma with enough precision. In this case we need to use t-distribution and t-statistics.</a:t>
+              <a:t>When sample size is small ( N &lt; 30 ), then even if we know that the underlying distribution is Gaussian, we still can not evaluate the distribution's sigma with enough precision. In this case we need to use t-distribution and t-statistics.</a:t>
             </a:r>
           </a:p>
           <a:p>
@@ -16392,7 +16392,7 @@
             </a:r>
             <a:r>
               <a:rPr lang="en-US" sz="1200" dirty="0"/>
-              <a:t> is a sample deviation.</a:t>
+              <a:t> is a sample standard deviation.</a:t>
             </a:r>
           </a:p>
           <a:p>
@@ -16729,7 +16729,7 @@
         <p:spPr>
           <a:xfrm>
             <a:off x="180108" y="131765"/>
-            <a:ext cx="8070757" cy="809626"/>
+            <a:ext cx="8070757" cy="566437"/>
           </a:xfrm>
           <a:noFill/>
         </p:spPr>
@@ -16776,8 +16776,8 @@
         </p:nvSpPr>
         <p:spPr>
           <a:xfrm>
-            <a:off x="0" y="698202"/>
-            <a:ext cx="6727764" cy="400079"/>
+            <a:off x="-73152" y="698202"/>
+            <a:ext cx="5462016" cy="400079"/>
           </a:xfrm>
           <a:noFill/>
         </p:spPr>
@@ -16811,7 +16811,7 @@
               <a:t>The one-sample t test from: </a:t>
             </a:r>
             <a:r>
-              <a:rPr lang="en-US" sz="1400" dirty="0">
+              <a:rPr lang="en-US" sz="1000" dirty="0">
                 <a:solidFill>
                   <a:srgbClr val="000000"/>
                 </a:solidFill>
@@ -16823,7 +16823,7 @@
               <a:t>https://www.statisticshowto.com/one-sample-t-test/</a:t>
             </a:r>
             <a:r>
-              <a:rPr lang="en-US" sz="1400" dirty="0">
+              <a:rPr lang="en-US" sz="1000" dirty="0">
                 <a:solidFill>
                   <a:srgbClr val="000000"/>
                 </a:solidFill>
@@ -16831,7 +16831,18 @@
                 <a:cs typeface="Arial"/>
                 <a:sym typeface="Arial"/>
               </a:rPr>
-              <a:t>  </a:t>
+              <a:t> </a:t>
+            </a:r>
+            <a:r>
+              <a:rPr lang="en-US" sz="1400" dirty="0">
+                <a:solidFill>
+                  <a:srgbClr val="000000"/>
+                </a:solidFill>
+                <a:latin typeface="Arial"/>
+                <a:cs typeface="Arial"/>
+                <a:sym typeface="Arial"/>
+              </a:rPr>
+              <a:t> </a:t>
             </a:r>
           </a:p>
         </p:txBody>
@@ -16850,8 +16861,8 @@
         </p:nvSpPr>
         <p:spPr>
           <a:xfrm>
-            <a:off x="6654856" y="2502654"/>
-            <a:ext cx="3541287" cy="318977"/>
+            <a:off x="6654856" y="2844030"/>
+            <a:ext cx="4708084" cy="307777"/>
           </a:xfrm>
           <a:prstGeom prst="rect">
             <a:avLst/>
@@ -16865,8 +16876,12 @@
           <a:lstStyle/>
           <a:p>
             <a:r>
-              <a:rPr lang="en-US" dirty="0"/>
-              <a:t>Basic Research Situation for t Statistic:</a:t>
+              <a:rPr lang="en-US" b="1" dirty="0">
+                <a:solidFill>
+                  <a:srgbClr val="FF0000"/>
+                </a:solidFill>
+              </a:rPr>
+              <a:t>Common Basic Research Situation for t Statistic:</a:t>
             </a:r>
           </a:p>
         </p:txBody>
@@ -16885,7 +16900,7 @@
           </p:cNvPicPr>
           <p:nvPr/>
         </p:nvPicPr>
-        <p:blipFill>
+        <p:blipFill rotWithShape="1">
           <a:blip r:embed="rId3" cstate="email">
             <a:extLst>
               <a:ext uri="{28A0092B-C50C-407E-A947-70E740481C1C}">
@@ -16893,14 +16908,13 @@
               </a:ext>
             </a:extLst>
           </a:blip>
-          <a:stretch>
-            <a:fillRect/>
-          </a:stretch>
+          <a:srcRect/>
+          <a:stretch/>
         </p:blipFill>
         <p:spPr bwMode="auto">
           <a:xfrm>
-            <a:off x="6654856" y="2841296"/>
-            <a:ext cx="5461772" cy="2503029"/>
+            <a:off x="6645498" y="3142740"/>
+            <a:ext cx="5461772" cy="2284133"/>
           </a:xfrm>
           <a:prstGeom prst="rect">
             <a:avLst/>
@@ -16934,7 +16948,7 @@
         </p:nvSpPr>
         <p:spPr>
           <a:xfrm>
-            <a:off x="6645498" y="5210542"/>
+            <a:off x="6645498" y="5381230"/>
             <a:ext cx="5466446" cy="1384995"/>
           </a:xfrm>
           <a:prstGeom prst="rect">
@@ -17007,7 +17021,7 @@
         </p:nvSpPr>
         <p:spPr>
           <a:xfrm>
-            <a:off x="70688" y="1005583"/>
+            <a:off x="-2464" y="1005583"/>
             <a:ext cx="6452336" cy="3108543"/>
           </a:xfrm>
           <a:prstGeom prst="rect">
@@ -17038,8 +17052,16 @@
           </a:p>
           <a:p>
             <a:r>
+              <a:rPr lang="en-US" b="1" dirty="0">
+                <a:solidFill>
+                  <a:srgbClr val="FF0000"/>
+                </a:solidFill>
+              </a:rPr>
+              <a:t>Step 1:</a:t>
+            </a:r>
+            <a:r>
               <a:rPr lang="en-US" dirty="0"/>
-              <a:t>Step 1: Write your null hypothesis.  H0: </a:t>
+              <a:t> Write your null hypothesis.  H0: </a:t>
             </a:r>
             <a:r>
               <a:rPr lang="el-GR" dirty="0"/>
@@ -17053,8 +17075,16 @@
           </a:p>
           <a:p>
             <a:r>
+              <a:rPr lang="en-US" b="1" dirty="0">
+                <a:solidFill>
+                  <a:srgbClr val="FF0000"/>
+                </a:solidFill>
+              </a:rPr>
+              <a:t>Step 2:</a:t>
+            </a:r>
+            <a:r>
               <a:rPr lang="en-US" dirty="0"/>
-              <a:t>Step 2: Write your alternate hypothesis. H1: </a:t>
+              <a:t> Write your alternate hypothesis. H1: </a:t>
             </a:r>
             <a:r>
               <a:rPr lang="el-GR" dirty="0"/>
@@ -17068,8 +17098,16 @@
           </a:p>
           <a:p>
             <a:r>
+              <a:rPr lang="en-US" b="1" dirty="0">
+                <a:solidFill>
+                  <a:srgbClr val="FF0000"/>
+                </a:solidFill>
+              </a:rPr>
+              <a:t>Step 3:</a:t>
+            </a:r>
+            <a:r>
               <a:rPr lang="en-US" dirty="0"/>
-              <a:t>Step 3: Calculate some items:</a:t>
+              <a:t> Calculate some items:</a:t>
             </a:r>
           </a:p>
           <a:p>
@@ -17106,8 +17144,16 @@
           </a:p>
           <a:p>
             <a:r>
+              <a:rPr lang="en-US" b="1" dirty="0">
+                <a:solidFill>
+                  <a:srgbClr val="FF0000"/>
+                </a:solidFill>
+              </a:rPr>
+              <a:t>Step 4:</a:t>
+            </a:r>
+            <a:r>
               <a:rPr lang="en-US" dirty="0"/>
-              <a:t>Step 4: Insert the items from above into the t score formula.</a:t>
+              <a:t> Insert the items from above into the t score formula.</a:t>
             </a:r>
           </a:p>
         </p:txBody>
@@ -17140,7 +17186,7 @@
         </p:blipFill>
         <p:spPr>
           <a:xfrm>
-            <a:off x="1612088" y="4092811"/>
+            <a:off x="1538936" y="4092811"/>
             <a:ext cx="1149092" cy="808373"/>
           </a:xfrm>
           <a:prstGeom prst="rect">
@@ -17162,7 +17208,7 @@
         </p:nvSpPr>
         <p:spPr>
           <a:xfrm>
-            <a:off x="75372" y="4901184"/>
+            <a:off x="2220" y="4998720"/>
             <a:ext cx="5749635" cy="1815882"/>
           </a:xfrm>
           <a:prstGeom prst="rect">
@@ -17177,17 +17223,29 @@
           <a:lstStyle/>
           <a:p>
             <a:r>
+              <a:rPr lang="en-US" b="1" dirty="0">
+                <a:solidFill>
+                  <a:srgbClr val="0070C0"/>
+                </a:solidFill>
+              </a:rPr>
+              <a:t>         t = (130 – 100) / ((15 / √(25)) = 30/3 = 10</a:t>
+            </a:r>
+          </a:p>
+          <a:p>
+            <a:endParaRPr lang="en-US" dirty="0"/>
+          </a:p>
+          <a:p>
+            <a:r>
+              <a:rPr lang="en-US" b="1" dirty="0">
+                <a:solidFill>
+                  <a:srgbClr val="FF0000"/>
+                </a:solidFill>
+              </a:rPr>
+              <a:t>Step 5:</a:t>
+            </a:r>
+            <a:r>
               <a:rPr lang="en-US" dirty="0"/>
-              <a:t>t = (130 – 100) / ((15 / √(25)) = 30/3 = 10</a:t>
-            </a:r>
-          </a:p>
-          <a:p>
-            <a:endParaRPr lang="en-US" dirty="0"/>
-          </a:p>
-          <a:p>
-            <a:r>
-              <a:rPr lang="en-US" dirty="0"/>
-              <a:t>Step 5: Find the t-table value for alpha = 5% </a:t>
+              <a:t> Find the t-table value for alpha = 5% </a:t>
             </a:r>
           </a:p>
           <a:p>
@@ -17219,13 +17277,15 @@
               </a:ext>
             </a:extLst>
           </p:cNvPr>
-          <p:cNvCxnSpPr/>
+          <p:cNvCxnSpPr>
+            <a:cxnSpLocks/>
+          </p:cNvCxnSpPr>
           <p:nvPr/>
         </p:nvCxnSpPr>
         <p:spPr>
           <a:xfrm>
-            <a:off x="6494202" y="1950720"/>
-            <a:ext cx="0" cy="4766346"/>
+            <a:off x="6494202" y="851507"/>
+            <a:ext cx="0" cy="5865559"/>
           </a:xfrm>
           <a:prstGeom prst="line">
             <a:avLst/>
@@ -17247,6 +17307,102 @@
           </a:fontRef>
         </p:style>
       </p:cxnSp>
+      <p:sp>
+        <p:nvSpPr>
+          <p:cNvPr id="7" name="TextBox 6">
+            <a:extLst>
+              <a:ext uri="{FF2B5EF4-FFF2-40B4-BE49-F238E27FC236}">
+                <a16:creationId xmlns:a16="http://schemas.microsoft.com/office/drawing/2014/main" id="{0F0D611A-BD17-3B42-B163-449C47361BB8}"/>
+              </a:ext>
+            </a:extLst>
+          </p:cNvPr>
+          <p:cNvSpPr txBox="1"/>
+          <p:nvPr/>
+        </p:nvSpPr>
+        <p:spPr>
+          <a:xfrm>
+            <a:off x="6645498" y="851507"/>
+            <a:ext cx="5366452" cy="1477328"/>
+          </a:xfrm>
+          <a:prstGeom prst="rect">
+            <a:avLst/>
+          </a:prstGeom>
+          <a:noFill/>
+        </p:spPr>
+        <p:txBody>
+          <a:bodyPr wrap="square" rtlCol="0">
+            <a:spAutoFit/>
+          </a:bodyPr>
+          <a:lstStyle/>
+          <a:p>
+            <a:r>
+              <a:rPr lang="en-US" sz="2000" b="1" dirty="0">
+                <a:solidFill>
+                  <a:srgbClr val="FF0000"/>
+                </a:solidFill>
+              </a:rPr>
+              <a:t>Three types of t-tests:</a:t>
+            </a:r>
+          </a:p>
+          <a:p>
+            <a:endParaRPr lang="en-US" dirty="0"/>
+          </a:p>
+          <a:p>
+            <a:pPr marL="285750" indent="-285750">
+              <a:buFont typeface="Arial" panose="020B0604020202020204" pitchFamily="34" charset="0"/>
+              <a:buChar char="•"/>
+            </a:pPr>
+            <a:r>
+              <a:rPr lang="en-US" b="1" dirty="0">
+                <a:solidFill>
+                  <a:srgbClr val="FF0000"/>
+                </a:solidFill>
+              </a:rPr>
+              <a:t>one-sample t-test</a:t>
+            </a:r>
+            <a:r>
+              <a:rPr lang="en-US" dirty="0"/>
+              <a:t> - compare sample mean with given value</a:t>
+            </a:r>
+          </a:p>
+          <a:p>
+            <a:pPr marL="285750" indent="-285750">
+              <a:buFont typeface="Arial" panose="020B0604020202020204" pitchFamily="34" charset="0"/>
+              <a:buChar char="•"/>
+            </a:pPr>
+            <a:r>
+              <a:rPr lang="en-US" b="1" dirty="0">
+                <a:solidFill>
+                  <a:srgbClr val="FF0000"/>
+                </a:solidFill>
+              </a:rPr>
+              <a:t>two-sample t-test</a:t>
+            </a:r>
+            <a:r>
+              <a:rPr lang="en-US" dirty="0"/>
+              <a:t> (a.k.a. Independent Samples t Test) compares the means of two independent groups</a:t>
+            </a:r>
+          </a:p>
+          <a:p>
+            <a:pPr marL="285750" indent="-285750">
+              <a:buFont typeface="Arial" panose="020B0604020202020204" pitchFamily="34" charset="0"/>
+              <a:buChar char="•"/>
+            </a:pPr>
+            <a:r>
+              <a:rPr lang="en-US" b="1" dirty="0">
+                <a:solidFill>
+                  <a:srgbClr val="FF0000"/>
+                </a:solidFill>
+              </a:rPr>
+              <a:t>paired t-test</a:t>
+            </a:r>
+            <a:r>
+              <a:rPr lang="en-US" dirty="0"/>
+              <a:t> (for dependent samples - before/after treatment)</a:t>
+            </a:r>
+          </a:p>
+        </p:txBody>
+      </p:sp>
     </p:spTree>
     <p:extLst>
       <p:ext uri="{BB962C8B-B14F-4D97-AF65-F5344CB8AC3E}">
@@ -17567,7 +17723,7 @@
           <a:graphicData uri="http://schemas.openxmlformats.org/presentationml/2006/ole">
             <mc:AlternateContent xmlns:mc="http://schemas.openxmlformats.org/markup-compatibility/2006">
               <mc:Choice xmlns:v="urn:schemas-microsoft-com:vml" Requires="v">
-                <p:oleObj spid="_x0000_s2605" name="Equation" r:id="rId3" imgW="2438280" imgH="444240" progId="Equation.DSMT4">
+                <p:oleObj spid="_x0000_s2611" name="Equation" r:id="rId3" imgW="2438280" imgH="444240" progId="Equation.DSMT4">
                   <p:embed/>
                 </p:oleObj>
               </mc:Choice>
@@ -17725,7 +17881,7 @@
           <a:graphicData uri="http://schemas.openxmlformats.org/presentationml/2006/ole">
             <mc:AlternateContent xmlns:mc="http://schemas.openxmlformats.org/markup-compatibility/2006">
               <mc:Choice xmlns:v="urn:schemas-microsoft-com:vml" Requires="v">
-                <p:oleObj spid="_x0000_s2606" name="Equation" r:id="rId5" imgW="660113" imgH="431613" progId="Equation.3">
+                <p:oleObj spid="_x0000_s2612" name="Equation" r:id="rId5" imgW="660113" imgH="431613" progId="Equation.3">
                   <p:embed/>
                 </p:oleObj>
               </mc:Choice>
@@ -17801,7 +17957,7 @@
           <a:graphicData uri="http://schemas.openxmlformats.org/presentationml/2006/ole">
             <mc:AlternateContent xmlns:mc="http://schemas.openxmlformats.org/markup-compatibility/2006">
               <mc:Choice xmlns:v="urn:schemas-microsoft-com:vml" Requires="v">
-                <p:oleObj spid="_x0000_s2607" name="Equation" r:id="rId7" imgW="787058" imgH="215806" progId="Equation.3">
+                <p:oleObj spid="_x0000_s2613" name="Equation" r:id="rId7" imgW="787058" imgH="215806" progId="Equation.3">
                   <p:embed/>
                 </p:oleObj>
               </mc:Choice>
@@ -18187,7 +18343,7 @@
           <a:graphicData uri="http://schemas.openxmlformats.org/presentationml/2006/ole">
             <mc:AlternateContent xmlns:mc="http://schemas.openxmlformats.org/markup-compatibility/2006">
               <mc:Choice xmlns:v="urn:schemas-microsoft-com:vml" Requires="v">
-                <p:oleObj spid="_x0000_s3811" name="Equation" r:id="rId4" imgW="1054100" imgH="228600" progId="Equation.3">
+                <p:oleObj spid="_x0000_s3819" name="Equation" r:id="rId4" imgW="1054100" imgH="228600" progId="Equation.3">
                   <p:embed/>
                 </p:oleObj>
               </mc:Choice>
@@ -18298,7 +18454,7 @@
           <a:graphicData uri="http://schemas.openxmlformats.org/presentationml/2006/ole">
             <mc:AlternateContent xmlns:mc="http://schemas.openxmlformats.org/markup-compatibility/2006">
               <mc:Choice xmlns:v="urn:schemas-microsoft-com:vml" Requires="v">
-                <p:oleObj spid="_x0000_s3812" name="Equation" r:id="rId6" imgW="1701800" imgH="495300" progId="Equation.3">
+                <p:oleObj spid="_x0000_s3820" name="Equation" r:id="rId6" imgW="1701800" imgH="495300" progId="Equation.3">
                   <p:embed/>
                 </p:oleObj>
               </mc:Choice>
@@ -18374,7 +18530,7 @@
           <a:graphicData uri="http://schemas.openxmlformats.org/presentationml/2006/ole">
             <mc:AlternateContent xmlns:mc="http://schemas.openxmlformats.org/markup-compatibility/2006">
               <mc:Choice xmlns:v="urn:schemas-microsoft-com:vml" Requires="v">
-                <p:oleObj spid="_x0000_s3813" name="Equation" r:id="rId8" imgW="1282700" imgH="546100" progId="Equation.3">
+                <p:oleObj spid="_x0000_s3821" name="Equation" r:id="rId8" imgW="1282700" imgH="546100" progId="Equation.3">
                   <p:embed/>
                 </p:oleObj>
               </mc:Choice>
@@ -18485,7 +18641,7 @@
           <a:graphicData uri="http://schemas.openxmlformats.org/presentationml/2006/ole">
             <mc:AlternateContent xmlns:mc="http://schemas.openxmlformats.org/markup-compatibility/2006">
               <mc:Choice xmlns:v="urn:schemas-microsoft-com:vml" Requires="v">
-                <p:oleObj spid="_x0000_s3814" name="Equation" r:id="rId10" imgW="927100" imgH="431800" progId="Equation.3">
+                <p:oleObj spid="_x0000_s3822" name="Equation" r:id="rId10" imgW="927100" imgH="431800" progId="Equation.3">
                   <p:embed/>
                 </p:oleObj>
               </mc:Choice>
@@ -18960,7 +19116,7 @@
         </p:nvSpPr>
         <p:spPr>
           <a:xfrm>
-            <a:off x="7546848" y="725535"/>
+            <a:off x="7546848" y="1327544"/>
             <a:ext cx="4401312" cy="2462213"/>
           </a:xfrm>
           <a:prstGeom prst="rect">
@@ -19089,7 +19245,7 @@
         </p:blipFill>
         <p:spPr>
           <a:xfrm>
-            <a:off x="1457706" y="1328928"/>
+            <a:off x="1255776" y="1690232"/>
             <a:ext cx="2400300" cy="1460500"/>
           </a:xfrm>
           <a:prstGeom prst="rect">
@@ -19097,6 +19253,43 @@
           </a:prstGeom>
         </p:spPr>
       </p:pic>
+      <p:cxnSp>
+        <p:nvCxnSpPr>
+          <p:cNvPr id="3" name="Straight Connector 2">
+            <a:extLst>
+              <a:ext uri="{FF2B5EF4-FFF2-40B4-BE49-F238E27FC236}">
+                <a16:creationId xmlns:a16="http://schemas.microsoft.com/office/drawing/2014/main" id="{04AACF8B-CD37-7B41-B7C1-CCFE29570096}"/>
+              </a:ext>
+            </a:extLst>
+          </p:cNvPr>
+          <p:cNvCxnSpPr/>
+          <p:nvPr/>
+        </p:nvCxnSpPr>
+        <p:spPr>
+          <a:xfrm>
+            <a:off x="6656832" y="256032"/>
+            <a:ext cx="0" cy="6291072"/>
+          </a:xfrm>
+          <a:prstGeom prst="line">
+            <a:avLst/>
+          </a:prstGeom>
+          <a:ln w="63500"/>
+        </p:spPr>
+        <p:style>
+          <a:lnRef idx="1">
+            <a:schemeClr val="accent1"/>
+          </a:lnRef>
+          <a:fillRef idx="0">
+            <a:schemeClr val="accent1"/>
+          </a:fillRef>
+          <a:effectRef idx="0">
+            <a:schemeClr val="accent1"/>
+          </a:effectRef>
+          <a:fontRef idx="minor">
+            <a:schemeClr val="tx1"/>
+          </a:fontRef>
+        </p:style>
+      </p:cxnSp>
     </p:spTree>
     <p:extLst>
       <p:ext uri="{BB962C8B-B14F-4D97-AF65-F5344CB8AC3E}">
@@ -19393,7 +19586,7 @@
           <a:graphicData uri="http://schemas.openxmlformats.org/presentationml/2006/ole">
             <mc:AlternateContent xmlns:mc="http://schemas.openxmlformats.org/markup-compatibility/2006">
               <mc:Choice xmlns:v="urn:schemas-microsoft-com:vml" Requires="v">
-                <p:oleObj spid="_x0000_s16442" name="Equation" r:id="rId4" imgW="17373600" imgH="10058400" progId="Equation.3">
+                <p:oleObj spid="_x0000_s16454" name="Equation" r:id="rId4" imgW="17373600" imgH="10058400" progId="Equation.3">
                   <p:embed/>
                 </p:oleObj>
               </mc:Choice>
@@ -19524,7 +19717,7 @@
           <a:graphicData uri="http://schemas.openxmlformats.org/presentationml/2006/ole">
             <mc:AlternateContent xmlns:mc="http://schemas.openxmlformats.org/markup-compatibility/2006">
               <mc:Choice xmlns:v="urn:schemas-microsoft-com:vml" Requires="v">
-                <p:oleObj spid="_x0000_s16443" name="Equation" r:id="rId6" imgW="18592800" imgH="10363200" progId="Equation.3">
+                <p:oleObj spid="_x0000_s16455" name="Equation" r:id="rId6" imgW="18592800" imgH="10363200" progId="Equation.3">
                   <p:embed/>
                 </p:oleObj>
               </mc:Choice>
@@ -19600,7 +19793,7 @@
           <a:graphicData uri="http://schemas.openxmlformats.org/presentationml/2006/ole">
             <mc:AlternateContent xmlns:mc="http://schemas.openxmlformats.org/markup-compatibility/2006">
               <mc:Choice xmlns:v="urn:schemas-microsoft-com:vml" Requires="v">
-                <p:oleObj spid="_x0000_s16444" name="Equation" r:id="rId8" imgW="36271200" imgH="21945600" progId="Equation.3">
+                <p:oleObj spid="_x0000_s16456" name="Equation" r:id="rId8" imgW="36271200" imgH="21945600" progId="Equation.3">
                   <p:embed/>
                 </p:oleObj>
               </mc:Choice>
@@ -19676,7 +19869,7 @@
           <a:graphicData uri="http://schemas.openxmlformats.org/presentationml/2006/ole">
             <mc:AlternateContent xmlns:mc="http://schemas.openxmlformats.org/markup-compatibility/2006">
               <mc:Choice xmlns:v="urn:schemas-microsoft-com:vml" Requires="v">
-                <p:oleObj spid="_x0000_s16445" name="Equation" r:id="rId10" imgW="38404800" imgH="8839200" progId="Equation.3">
+                <p:oleObj spid="_x0000_s16457" name="Equation" r:id="rId10" imgW="38404800" imgH="8839200" progId="Equation.3">
                   <p:embed/>
                 </p:oleObj>
               </mc:Choice>
@@ -19752,7 +19945,7 @@
           <a:graphicData uri="http://schemas.openxmlformats.org/presentationml/2006/ole">
             <mc:AlternateContent xmlns:mc="http://schemas.openxmlformats.org/markup-compatibility/2006">
               <mc:Choice xmlns:v="urn:schemas-microsoft-com:vml" Requires="v">
-                <p:oleObj spid="_x0000_s16446" name="Equation" r:id="rId12" imgW="19812000" imgH="11277600" progId="Equation.3">
+                <p:oleObj spid="_x0000_s16458" name="Equation" r:id="rId12" imgW="19812000" imgH="11277600" progId="Equation.3">
                   <p:embed/>
                 </p:oleObj>
               </mc:Choice>
@@ -19828,7 +20021,7 @@
           <a:graphicData uri="http://schemas.openxmlformats.org/presentationml/2006/ole">
             <mc:AlternateContent xmlns:mc="http://schemas.openxmlformats.org/markup-compatibility/2006">
               <mc:Choice xmlns:v="urn:schemas-microsoft-com:vml" Requires="v">
-                <p:oleObj spid="_x0000_s16447" name="Equation" r:id="rId14" imgW="42976800" imgH="5791200" progId="Equation.3">
+                <p:oleObj spid="_x0000_s16459" name="Equation" r:id="rId14" imgW="42976800" imgH="5791200" progId="Equation.3">
                   <p:embed/>
                 </p:oleObj>
               </mc:Choice>

--- a/statistics_07_t_distribution.pptx
+++ b/statistics_07_t_distribution.pptx
@@ -5,7 +5,7 @@
     <p:sldMasterId id="2147483659" r:id="rId1"/>
   </p:sldMasterIdLst>
   <p:notesMasterIdLst>
-    <p:notesMasterId r:id="rId10"/>
+    <p:notesMasterId r:id="rId11"/>
   </p:notesMasterIdLst>
   <p:sldIdLst>
     <p:sldId id="275" r:id="rId2"/>
@@ -13,9 +13,10 @@
     <p:sldId id="281" r:id="rId4"/>
     <p:sldId id="282" r:id="rId5"/>
     <p:sldId id="283" r:id="rId6"/>
-    <p:sldId id="289" r:id="rId7"/>
-    <p:sldId id="284" r:id="rId8"/>
-    <p:sldId id="288" r:id="rId9"/>
+    <p:sldId id="290" r:id="rId7"/>
+    <p:sldId id="289" r:id="rId8"/>
+    <p:sldId id="284" r:id="rId9"/>
+    <p:sldId id="288" r:id="rId10"/>
   </p:sldIdLst>
   <p:sldSz cx="12192000" cy="6858000"/>
   <p:notesSz cx="6858000" cy="9144000"/>
@@ -17723,7 +17724,7 @@
           <a:graphicData uri="http://schemas.openxmlformats.org/presentationml/2006/ole">
             <mc:AlternateContent xmlns:mc="http://schemas.openxmlformats.org/markup-compatibility/2006">
               <mc:Choice xmlns:v="urn:schemas-microsoft-com:vml" Requires="v">
-                <p:oleObj spid="_x0000_s2611" name="Equation" r:id="rId3" imgW="2438280" imgH="444240" progId="Equation.DSMT4">
+                <p:oleObj spid="_x0000_s2626" name="Equation" r:id="rId3" imgW="2438280" imgH="444240" progId="Equation.DSMT4">
                   <p:embed/>
                 </p:oleObj>
               </mc:Choice>
@@ -17795,19 +17796,43 @@
           <a:p>
             <a:r>
               <a:rPr lang="en-US" dirty="0"/>
-              <a:t>r2 = 0.01   small effect</a:t>
-            </a:r>
-          </a:p>
-          <a:p>
+              <a:t>r</a:t>
+            </a:r>
+            <a:r>
+              <a:rPr lang="en-US" baseline="30000" dirty="0"/>
+              <a:t>2</a:t>
+            </a:r>
             <a:r>
               <a:rPr lang="en-US" dirty="0"/>
-              <a:t>r2 = 0.09   medium effect</a:t>
+              <a:t> = 0.01   small effect</a:t>
             </a:r>
           </a:p>
           <a:p>
             <a:r>
               <a:rPr lang="en-US" dirty="0"/>
-              <a:t>r2 = 0.25   large effect</a:t>
+              <a:t>r</a:t>
+            </a:r>
+            <a:r>
+              <a:rPr lang="en-US" baseline="30000" dirty="0"/>
+              <a:t>2</a:t>
+            </a:r>
+            <a:r>
+              <a:rPr lang="en-US" dirty="0"/>
+              <a:t> = 0.09   medium effect</a:t>
+            </a:r>
+          </a:p>
+          <a:p>
+            <a:r>
+              <a:rPr lang="en-US" dirty="0"/>
+              <a:t>r</a:t>
+            </a:r>
+            <a:r>
+              <a:rPr lang="en-US" baseline="30000" dirty="0"/>
+              <a:t>2</a:t>
+            </a:r>
+            <a:r>
+              <a:rPr lang="en-US" dirty="0"/>
+              <a:t> = 0.25   large effect</a:t>
             </a:r>
           </a:p>
         </p:txBody>
@@ -17881,7 +17906,7 @@
           <a:graphicData uri="http://schemas.openxmlformats.org/presentationml/2006/ole">
             <mc:AlternateContent xmlns:mc="http://schemas.openxmlformats.org/markup-compatibility/2006">
               <mc:Choice xmlns:v="urn:schemas-microsoft-com:vml" Requires="v">
-                <p:oleObj spid="_x0000_s2612" name="Equation" r:id="rId5" imgW="660113" imgH="431613" progId="Equation.3">
+                <p:oleObj spid="_x0000_s2627" name="Equation" r:id="rId5" imgW="660113" imgH="431613" progId="Equation.3">
                   <p:embed/>
                 </p:oleObj>
               </mc:Choice>
@@ -17957,7 +17982,7 @@
           <a:graphicData uri="http://schemas.openxmlformats.org/presentationml/2006/ole">
             <mc:AlternateContent xmlns:mc="http://schemas.openxmlformats.org/markup-compatibility/2006">
               <mc:Choice xmlns:v="urn:schemas-microsoft-com:vml" Requires="v">
-                <p:oleObj spid="_x0000_s2613" name="Equation" r:id="rId7" imgW="787058" imgH="215806" progId="Equation.3">
+                <p:oleObj spid="_x0000_s2628" name="Equation" r:id="rId7" imgW="787058" imgH="215806" progId="Equation.3">
                   <p:embed/>
                 </p:oleObj>
               </mc:Choice>
@@ -18343,7 +18368,7 @@
           <a:graphicData uri="http://schemas.openxmlformats.org/presentationml/2006/ole">
             <mc:AlternateContent xmlns:mc="http://schemas.openxmlformats.org/markup-compatibility/2006">
               <mc:Choice xmlns:v="urn:schemas-microsoft-com:vml" Requires="v">
-                <p:oleObj spid="_x0000_s3819" name="Equation" r:id="rId4" imgW="1054100" imgH="228600" progId="Equation.3">
+                <p:oleObj spid="_x0000_s3839" name="Equation" r:id="rId4" imgW="1054100" imgH="228600" progId="Equation.3">
                   <p:embed/>
                 </p:oleObj>
               </mc:Choice>
@@ -18454,7 +18479,7 @@
           <a:graphicData uri="http://schemas.openxmlformats.org/presentationml/2006/ole">
             <mc:AlternateContent xmlns:mc="http://schemas.openxmlformats.org/markup-compatibility/2006">
               <mc:Choice xmlns:v="urn:schemas-microsoft-com:vml" Requires="v">
-                <p:oleObj spid="_x0000_s3820" name="Equation" r:id="rId6" imgW="1701800" imgH="495300" progId="Equation.3">
+                <p:oleObj spid="_x0000_s3840" name="Equation" r:id="rId6" imgW="1701800" imgH="495300" progId="Equation.3">
                   <p:embed/>
                 </p:oleObj>
               </mc:Choice>
@@ -18530,7 +18555,7 @@
           <a:graphicData uri="http://schemas.openxmlformats.org/presentationml/2006/ole">
             <mc:AlternateContent xmlns:mc="http://schemas.openxmlformats.org/markup-compatibility/2006">
               <mc:Choice xmlns:v="urn:schemas-microsoft-com:vml" Requires="v">
-                <p:oleObj spid="_x0000_s3821" name="Equation" r:id="rId8" imgW="1282700" imgH="546100" progId="Equation.3">
+                <p:oleObj spid="_x0000_s3841" name="Equation" r:id="rId8" imgW="1282700" imgH="546100" progId="Equation.3">
                   <p:embed/>
                 </p:oleObj>
               </mc:Choice>
@@ -18641,7 +18666,7 @@
           <a:graphicData uri="http://schemas.openxmlformats.org/presentationml/2006/ole">
             <mc:AlternateContent xmlns:mc="http://schemas.openxmlformats.org/markup-compatibility/2006">
               <mc:Choice xmlns:v="urn:schemas-microsoft-com:vml" Requires="v">
-                <p:oleObj spid="_x0000_s3822" name="Equation" r:id="rId10" imgW="927100" imgH="431800" progId="Equation.3">
+                <p:oleObj spid="_x0000_s3842" name="Equation" r:id="rId10" imgW="927100" imgH="431800" progId="Equation.3">
                   <p:embed/>
                 </p:oleObj>
               </mc:Choice>
@@ -18907,6 +18932,613 @@
           <p:cNvPr id="5" name="TextBox 4">
             <a:extLst>
               <a:ext uri="{FF2B5EF4-FFF2-40B4-BE49-F238E27FC236}">
+                <a16:creationId xmlns:a16="http://schemas.microsoft.com/office/drawing/2014/main" id="{95839D38-840F-AB46-91D6-AE1BF857766F}"/>
+              </a:ext>
+            </a:extLst>
+          </p:cNvPr>
+          <p:cNvSpPr txBox="1"/>
+          <p:nvPr/>
+        </p:nvSpPr>
+        <p:spPr>
+          <a:xfrm>
+            <a:off x="59637" y="79516"/>
+            <a:ext cx="4830417" cy="523220"/>
+          </a:xfrm>
+          <a:prstGeom prst="rect">
+            <a:avLst/>
+          </a:prstGeom>
+          <a:noFill/>
+        </p:spPr>
+        <p:txBody>
+          <a:bodyPr wrap="square" rtlCol="0">
+            <a:spAutoFit/>
+          </a:bodyPr>
+          <a:lstStyle/>
+          <a:p>
+            <a:r>
+              <a:rPr lang="en-US" sz="2800" b="1" dirty="0"/>
+              <a:t>Independent t-test formula</a:t>
+            </a:r>
+          </a:p>
+        </p:txBody>
+      </p:sp>
+      <p:sp>
+        <p:nvSpPr>
+          <p:cNvPr id="6" name="TextBox 5">
+            <a:extLst>
+              <a:ext uri="{FF2B5EF4-FFF2-40B4-BE49-F238E27FC236}">
+                <a16:creationId xmlns:a16="http://schemas.microsoft.com/office/drawing/2014/main" id="{0678EC34-E769-A049-B0D4-14A84745DEFB}"/>
+              </a:ext>
+            </a:extLst>
+          </p:cNvPr>
+          <p:cNvSpPr txBox="1"/>
+          <p:nvPr/>
+        </p:nvSpPr>
+        <p:spPr>
+          <a:xfrm>
+            <a:off x="59637" y="777481"/>
+            <a:ext cx="5068956" cy="523220"/>
+          </a:xfrm>
+          <a:prstGeom prst="rect">
+            <a:avLst/>
+          </a:prstGeom>
+          <a:noFill/>
+        </p:spPr>
+        <p:txBody>
+          <a:bodyPr wrap="square" rtlCol="0">
+            <a:spAutoFit/>
+          </a:bodyPr>
+          <a:lstStyle/>
+          <a:p>
+            <a:r>
+              <a:rPr lang="en-US" sz="2800" b="1" dirty="0">
+                <a:solidFill>
+                  <a:srgbClr val="0070C0"/>
+                </a:solidFill>
+              </a:rPr>
+              <a:t>Student t-test formula</a:t>
+            </a:r>
+          </a:p>
+        </p:txBody>
+      </p:sp>
+      <p:sp>
+        <p:nvSpPr>
+          <p:cNvPr id="7" name="TextBox 6">
+            <a:extLst>
+              <a:ext uri="{FF2B5EF4-FFF2-40B4-BE49-F238E27FC236}">
+                <a16:creationId xmlns:a16="http://schemas.microsoft.com/office/drawing/2014/main" id="{44A88323-6919-B943-8EF7-07DDBC73846E}"/>
+              </a:ext>
+            </a:extLst>
+          </p:cNvPr>
+          <p:cNvSpPr txBox="1"/>
+          <p:nvPr/>
+        </p:nvSpPr>
+        <p:spPr>
+          <a:xfrm>
+            <a:off x="59637" y="1417745"/>
+            <a:ext cx="5665304" cy="738664"/>
+          </a:xfrm>
+          <a:prstGeom prst="rect">
+            <a:avLst/>
+          </a:prstGeom>
+          <a:noFill/>
+        </p:spPr>
+        <p:txBody>
+          <a:bodyPr wrap="square" rtlCol="0">
+            <a:spAutoFit/>
+          </a:bodyPr>
+          <a:lstStyle/>
+          <a:p>
+            <a:r>
+              <a:rPr lang="en-US" dirty="0"/>
+              <a:t>If the variance of the two groups are equivalent (</a:t>
+            </a:r>
+            <a:r>
+              <a:rPr lang="en-US" b="1" dirty="0">
+                <a:solidFill>
+                  <a:srgbClr val="FF0000"/>
+                </a:solidFill>
+              </a:rPr>
+              <a:t>homoscedasticity</a:t>
+            </a:r>
+            <a:r>
+              <a:rPr lang="en-US" dirty="0"/>
+              <a:t>), the t-test value, comparing the two samples (A and B), can be calculated as following:</a:t>
+            </a:r>
+          </a:p>
+        </p:txBody>
+      </p:sp>
+      <p:pic>
+        <p:nvPicPr>
+          <p:cNvPr id="8" name="Picture 7">
+            <a:extLst>
+              <a:ext uri="{FF2B5EF4-FFF2-40B4-BE49-F238E27FC236}">
+                <a16:creationId xmlns:a16="http://schemas.microsoft.com/office/drawing/2014/main" id="{1B3E1D2C-D1B0-CF4C-BC05-AA7BFCDFCFB3}"/>
+              </a:ext>
+            </a:extLst>
+          </p:cNvPr>
+          <p:cNvPicPr>
+            <a:picLocks noChangeAspect="1"/>
+          </p:cNvPicPr>
+          <p:nvPr/>
+        </p:nvPicPr>
+        <p:blipFill>
+          <a:blip r:embed="rId2" cstate="email">
+            <a:extLst>
+              <a:ext uri="{28A0092B-C50C-407E-A947-70E740481C1C}">
+                <a14:useLocalDpi xmlns:a14="http://schemas.microsoft.com/office/drawing/2010/main"/>
+              </a:ext>
+            </a:extLst>
+          </a:blip>
+          <a:stretch>
+            <a:fillRect/>
+          </a:stretch>
+        </p:blipFill>
+        <p:spPr>
+          <a:xfrm>
+            <a:off x="1573145" y="2290420"/>
+            <a:ext cx="1803400" cy="939800"/>
+          </a:xfrm>
+          <a:prstGeom prst="rect">
+            <a:avLst/>
+          </a:prstGeom>
+        </p:spPr>
+      </p:pic>
+      <p:sp>
+        <p:nvSpPr>
+          <p:cNvPr id="9" name="TextBox 8">
+            <a:extLst>
+              <a:ext uri="{FF2B5EF4-FFF2-40B4-BE49-F238E27FC236}">
+                <a16:creationId xmlns:a16="http://schemas.microsoft.com/office/drawing/2014/main" id="{8D88D210-1CC6-294A-ABBF-BD40990F5A04}"/>
+              </a:ext>
+            </a:extLst>
+          </p:cNvPr>
+          <p:cNvSpPr txBox="1"/>
+          <p:nvPr/>
+        </p:nvSpPr>
+        <p:spPr>
+          <a:xfrm>
+            <a:off x="258418" y="3498577"/>
+            <a:ext cx="6202017" cy="1169551"/>
+          </a:xfrm>
+          <a:prstGeom prst="rect">
+            <a:avLst/>
+          </a:prstGeom>
+          <a:noFill/>
+        </p:spPr>
+        <p:txBody>
+          <a:bodyPr wrap="square" rtlCol="0">
+            <a:spAutoFit/>
+          </a:bodyPr>
+          <a:lstStyle/>
+          <a:p>
+            <a:r>
+              <a:rPr lang="en-US" dirty="0"/>
+              <a:t>where,</a:t>
+            </a:r>
+          </a:p>
+          <a:p>
+            <a:pPr marL="285750" indent="-285750">
+              <a:buFont typeface="Arial" panose="020B0604020202020204" pitchFamily="34" charset="0"/>
+              <a:buChar char="•"/>
+            </a:pPr>
+            <a:r>
+              <a:rPr lang="en-US" dirty="0"/>
+              <a:t>m</a:t>
+            </a:r>
+            <a:r>
+              <a:rPr lang="en-US" baseline="-25000" dirty="0"/>
+              <a:t>A</a:t>
+            </a:r>
+            <a:r>
+              <a:rPr lang="en-US" dirty="0"/>
+              <a:t> and </a:t>
+            </a:r>
+            <a:r>
+              <a:rPr lang="en-US" dirty="0" err="1"/>
+              <a:t>m</a:t>
+            </a:r>
+            <a:r>
+              <a:rPr lang="en-US" baseline="-25000" dirty="0" err="1"/>
+              <a:t>B</a:t>
+            </a:r>
+            <a:r>
+              <a:rPr lang="en-US" dirty="0"/>
+              <a:t> represent the mean value of the group A and B, respectively.</a:t>
+            </a:r>
+          </a:p>
+          <a:p>
+            <a:pPr marL="285750" indent="-285750">
+              <a:buFont typeface="Arial" panose="020B0604020202020204" pitchFamily="34" charset="0"/>
+              <a:buChar char="•"/>
+            </a:pPr>
+            <a:r>
+              <a:rPr lang="en-US" dirty="0" err="1"/>
+              <a:t>n</a:t>
+            </a:r>
+            <a:r>
+              <a:rPr lang="en-US" baseline="-25000" dirty="0" err="1"/>
+              <a:t>A</a:t>
+            </a:r>
+            <a:r>
+              <a:rPr lang="en-US" dirty="0"/>
+              <a:t> and </a:t>
+            </a:r>
+            <a:r>
+              <a:rPr lang="en-US" dirty="0" err="1"/>
+              <a:t>n</a:t>
+            </a:r>
+            <a:r>
+              <a:rPr lang="en-US" baseline="-25000" dirty="0" err="1"/>
+              <a:t>B</a:t>
+            </a:r>
+            <a:r>
+              <a:rPr lang="en-US" dirty="0"/>
+              <a:t> represent the sizes of the group A and B, respectively.</a:t>
+            </a:r>
+          </a:p>
+          <a:p>
+            <a:pPr marL="285750" indent="-285750">
+              <a:buFont typeface="Arial" panose="020B0604020202020204" pitchFamily="34" charset="0"/>
+              <a:buChar char="•"/>
+            </a:pPr>
+            <a:r>
+              <a:rPr lang="en-US" dirty="0"/>
+              <a:t>S</a:t>
+            </a:r>
+            <a:r>
+              <a:rPr lang="en-US" baseline="30000" dirty="0"/>
+              <a:t>2</a:t>
+            </a:r>
+            <a:r>
+              <a:rPr lang="en-US" dirty="0"/>
+              <a:t> is an estimator of the pooled variance of the two groups. </a:t>
+            </a:r>
+            <a:br>
+              <a:rPr lang="en-US" dirty="0"/>
+            </a:br>
+            <a:r>
+              <a:rPr lang="en-US" dirty="0"/>
+              <a:t>It can be calculated as following :</a:t>
+            </a:r>
+          </a:p>
+        </p:txBody>
+      </p:sp>
+      <p:pic>
+        <p:nvPicPr>
+          <p:cNvPr id="10" name="Picture 9">
+            <a:extLst>
+              <a:ext uri="{FF2B5EF4-FFF2-40B4-BE49-F238E27FC236}">
+                <a16:creationId xmlns:a16="http://schemas.microsoft.com/office/drawing/2014/main" id="{4C19111F-E2D5-8E4A-8C2B-4ABC7790F639}"/>
+              </a:ext>
+            </a:extLst>
+          </p:cNvPr>
+          <p:cNvPicPr>
+            <a:picLocks noChangeAspect="1"/>
+          </p:cNvPicPr>
+          <p:nvPr/>
+        </p:nvPicPr>
+        <p:blipFill>
+          <a:blip r:embed="rId3" cstate="email">
+            <a:extLst>
+              <a:ext uri="{28A0092B-C50C-407E-A947-70E740481C1C}">
+                <a14:useLocalDpi xmlns:a14="http://schemas.microsoft.com/office/drawing/2010/main"/>
+              </a:ext>
+            </a:extLst>
+          </a:blip>
+          <a:stretch>
+            <a:fillRect/>
+          </a:stretch>
+        </p:blipFill>
+        <p:spPr>
+          <a:xfrm>
+            <a:off x="1614006" y="4830802"/>
+            <a:ext cx="3860800" cy="825500"/>
+          </a:xfrm>
+          <a:prstGeom prst="rect">
+            <a:avLst/>
+          </a:prstGeom>
+        </p:spPr>
+      </p:pic>
+      <p:sp>
+        <p:nvSpPr>
+          <p:cNvPr id="11" name="TextBox 10">
+            <a:extLst>
+              <a:ext uri="{FF2B5EF4-FFF2-40B4-BE49-F238E27FC236}">
+                <a16:creationId xmlns:a16="http://schemas.microsoft.com/office/drawing/2014/main" id="{C37B3D75-5E54-2642-B093-F70EA2BD9854}"/>
+              </a:ext>
+            </a:extLst>
+          </p:cNvPr>
+          <p:cNvSpPr txBox="1"/>
+          <p:nvPr/>
+        </p:nvSpPr>
+        <p:spPr>
+          <a:xfrm>
+            <a:off x="258418" y="5865795"/>
+            <a:ext cx="5466523" cy="307777"/>
+          </a:xfrm>
+          <a:prstGeom prst="rect">
+            <a:avLst/>
+          </a:prstGeom>
+          <a:noFill/>
+        </p:spPr>
+        <p:txBody>
+          <a:bodyPr wrap="square" rtlCol="0">
+            <a:spAutoFit/>
+          </a:bodyPr>
+          <a:lstStyle/>
+          <a:p>
+            <a:r>
+              <a:rPr lang="en-US" dirty="0"/>
+              <a:t>Degrees of freedom (df): df=nA+nB−2</a:t>
+            </a:r>
+          </a:p>
+        </p:txBody>
+      </p:sp>
+      <p:sp>
+        <p:nvSpPr>
+          <p:cNvPr id="12" name="TextBox 11">
+            <a:extLst>
+              <a:ext uri="{FF2B5EF4-FFF2-40B4-BE49-F238E27FC236}">
+                <a16:creationId xmlns:a16="http://schemas.microsoft.com/office/drawing/2014/main" id="{710416CA-81B5-7043-A0E5-9BDC3E96E0DA}"/>
+              </a:ext>
+            </a:extLst>
+          </p:cNvPr>
+          <p:cNvSpPr txBox="1"/>
+          <p:nvPr/>
+        </p:nvSpPr>
+        <p:spPr>
+          <a:xfrm>
+            <a:off x="7195931" y="221687"/>
+            <a:ext cx="4472608" cy="523220"/>
+          </a:xfrm>
+          <a:prstGeom prst="rect">
+            <a:avLst/>
+          </a:prstGeom>
+          <a:noFill/>
+        </p:spPr>
+        <p:txBody>
+          <a:bodyPr wrap="square" rtlCol="0">
+            <a:spAutoFit/>
+          </a:bodyPr>
+          <a:lstStyle/>
+          <a:p>
+            <a:r>
+              <a:rPr lang="en-US" sz="2800" b="1" dirty="0"/>
+              <a:t>Paired t-test formula</a:t>
+            </a:r>
+          </a:p>
+        </p:txBody>
+      </p:sp>
+      <p:pic>
+        <p:nvPicPr>
+          <p:cNvPr id="13" name="Picture 12">
+            <a:extLst>
+              <a:ext uri="{FF2B5EF4-FFF2-40B4-BE49-F238E27FC236}">
+                <a16:creationId xmlns:a16="http://schemas.microsoft.com/office/drawing/2014/main" id="{2CBE27C7-6F21-A64B-963A-DC7497965794}"/>
+              </a:ext>
+            </a:extLst>
+          </p:cNvPr>
+          <p:cNvPicPr>
+            <a:picLocks noChangeAspect="1"/>
+          </p:cNvPicPr>
+          <p:nvPr/>
+        </p:nvPicPr>
+        <p:blipFill>
+          <a:blip r:embed="rId4" cstate="email">
+            <a:extLst>
+              <a:ext uri="{28A0092B-C50C-407E-A947-70E740481C1C}">
+                <a14:useLocalDpi xmlns:a14="http://schemas.microsoft.com/office/drawing/2010/main"/>
+              </a:ext>
+            </a:extLst>
+          </a:blip>
+          <a:stretch>
+            <a:fillRect/>
+          </a:stretch>
+        </p:blipFill>
+        <p:spPr>
+          <a:xfrm>
+            <a:off x="8443291" y="1727445"/>
+            <a:ext cx="1143000" cy="698500"/>
+          </a:xfrm>
+          <a:prstGeom prst="rect">
+            <a:avLst/>
+          </a:prstGeom>
+        </p:spPr>
+      </p:pic>
+      <p:sp>
+        <p:nvSpPr>
+          <p:cNvPr id="14" name="TextBox 13">
+            <a:extLst>
+              <a:ext uri="{FF2B5EF4-FFF2-40B4-BE49-F238E27FC236}">
+                <a16:creationId xmlns:a16="http://schemas.microsoft.com/office/drawing/2014/main" id="{9B3D9FCD-309C-6240-B32B-8BF14D48E17D}"/>
+              </a:ext>
+            </a:extLst>
+          </p:cNvPr>
+          <p:cNvSpPr txBox="1"/>
+          <p:nvPr/>
+        </p:nvSpPr>
+        <p:spPr>
+          <a:xfrm>
+            <a:off x="7434471" y="2981739"/>
+            <a:ext cx="3717234" cy="1384995"/>
+          </a:xfrm>
+          <a:prstGeom prst="rect">
+            <a:avLst/>
+          </a:prstGeom>
+          <a:noFill/>
+        </p:spPr>
+        <p:txBody>
+          <a:bodyPr wrap="square" rtlCol="0">
+            <a:spAutoFit/>
+          </a:bodyPr>
+          <a:lstStyle/>
+          <a:p>
+            <a:r>
+              <a:rPr lang="en-US" dirty="0"/>
+              <a:t>where,</a:t>
+            </a:r>
+          </a:p>
+          <a:p>
+            <a:endParaRPr lang="en-US" dirty="0"/>
+          </a:p>
+          <a:p>
+            <a:pPr marL="285750" indent="-285750">
+              <a:buFont typeface="Arial" panose="020B0604020202020204" pitchFamily="34" charset="0"/>
+              <a:buChar char="•"/>
+            </a:pPr>
+            <a:r>
+              <a:rPr lang="en-US" dirty="0"/>
+              <a:t>m is the mean differences</a:t>
+            </a:r>
+          </a:p>
+          <a:p>
+            <a:pPr marL="285750" indent="-285750">
+              <a:buFont typeface="Arial" panose="020B0604020202020204" pitchFamily="34" charset="0"/>
+              <a:buChar char="•"/>
+            </a:pPr>
+            <a:r>
+              <a:rPr lang="en-US" dirty="0"/>
+              <a:t>n is the sample size (i.e., size of d)</a:t>
+            </a:r>
+          </a:p>
+          <a:p>
+            <a:pPr marL="285750" indent="-285750">
+              <a:buFont typeface="Arial" panose="020B0604020202020204" pitchFamily="34" charset="0"/>
+              <a:buChar char="•"/>
+            </a:pPr>
+            <a:r>
+              <a:rPr lang="en-US" dirty="0"/>
+              <a:t>s is the standard deviation of d</a:t>
+            </a:r>
+          </a:p>
+          <a:p>
+            <a:pPr marL="285750" indent="-285750">
+              <a:buFont typeface="Arial" panose="020B0604020202020204" pitchFamily="34" charset="0"/>
+              <a:buChar char="•"/>
+            </a:pPr>
+            <a:r>
+              <a:rPr lang="en-US" dirty="0"/>
+              <a:t>Degrees of freedom (df): df=n−1</a:t>
+            </a:r>
+          </a:p>
+        </p:txBody>
+      </p:sp>
+      <p:sp>
+        <p:nvSpPr>
+          <p:cNvPr id="15" name="TextBox 14">
+            <a:extLst>
+              <a:ext uri="{FF2B5EF4-FFF2-40B4-BE49-F238E27FC236}">
+                <a16:creationId xmlns:a16="http://schemas.microsoft.com/office/drawing/2014/main" id="{4156CE12-3B00-0E4E-826A-95BB91E56C61}"/>
+              </a:ext>
+            </a:extLst>
+          </p:cNvPr>
+          <p:cNvSpPr txBox="1"/>
+          <p:nvPr/>
+        </p:nvSpPr>
+        <p:spPr>
+          <a:xfrm>
+            <a:off x="7275443" y="777481"/>
+            <a:ext cx="4393096" cy="523220"/>
+          </a:xfrm>
+          <a:prstGeom prst="rect">
+            <a:avLst/>
+          </a:prstGeom>
+          <a:noFill/>
+        </p:spPr>
+        <p:txBody>
+          <a:bodyPr wrap="square" rtlCol="0">
+            <a:spAutoFit/>
+          </a:bodyPr>
+          <a:lstStyle/>
+          <a:p>
+            <a:r>
+              <a:rPr lang="en-US" dirty="0"/>
+              <a:t>The </a:t>
+            </a:r>
+            <a:r>
+              <a:rPr lang="en-US" b="1" dirty="0"/>
+              <a:t>paired t-test</a:t>
+            </a:r>
+            <a:r>
+              <a:rPr lang="en-US" dirty="0"/>
+              <a:t> is used to compare the means of two related groups of samples</a:t>
+            </a:r>
+          </a:p>
+        </p:txBody>
+      </p:sp>
+      <p:cxnSp>
+        <p:nvCxnSpPr>
+          <p:cNvPr id="17" name="Straight Connector 16">
+            <a:extLst>
+              <a:ext uri="{FF2B5EF4-FFF2-40B4-BE49-F238E27FC236}">
+                <a16:creationId xmlns:a16="http://schemas.microsoft.com/office/drawing/2014/main" id="{BB233B1F-891E-9141-BEE8-8AC67EB81D35}"/>
+              </a:ext>
+            </a:extLst>
+          </p:cNvPr>
+          <p:cNvCxnSpPr/>
+          <p:nvPr/>
+        </p:nvCxnSpPr>
+        <p:spPr>
+          <a:xfrm>
+            <a:off x="6599583" y="79516"/>
+            <a:ext cx="0" cy="6399143"/>
+          </a:xfrm>
+          <a:prstGeom prst="line">
+            <a:avLst/>
+          </a:prstGeom>
+          <a:ln w="63500"/>
+        </p:spPr>
+        <p:style>
+          <a:lnRef idx="1">
+            <a:schemeClr val="accent1"/>
+          </a:lnRef>
+          <a:fillRef idx="0">
+            <a:schemeClr val="accent1"/>
+          </a:fillRef>
+          <a:effectRef idx="0">
+            <a:schemeClr val="accent1"/>
+          </a:effectRef>
+          <a:fontRef idx="minor">
+            <a:schemeClr val="tx1"/>
+          </a:fontRef>
+        </p:style>
+      </p:cxnSp>
+    </p:spTree>
+    <p:extLst>
+      <p:ext uri="{BB962C8B-B14F-4D97-AF65-F5344CB8AC3E}">
+        <p14:creationId xmlns:p14="http://schemas.microsoft.com/office/powerpoint/2010/main" val="2869005700"/>
+      </p:ext>
+    </p:extLst>
+  </p:cSld>
+  <p:clrMapOvr>
+    <a:masterClrMapping/>
+  </p:clrMapOvr>
+</p:sld>
+</file>
+
+<file path=ppt/slides/slide7.xml><?xml version="1.0" encoding="utf-8"?>
+<p:sld xmlns:a="http://schemas.openxmlformats.org/drawingml/2006/main" xmlns:r="http://schemas.openxmlformats.org/officeDocument/2006/relationships" xmlns:p="http://schemas.openxmlformats.org/presentationml/2006/main">
+  <p:cSld>
+    <p:spTree>
+      <p:nvGrpSpPr>
+        <p:cNvPr id="1" name=""/>
+        <p:cNvGrpSpPr/>
+        <p:nvPr/>
+      </p:nvGrpSpPr>
+      <p:grpSpPr>
+        <a:xfrm>
+          <a:off x="0" y="0"/>
+          <a:ext cx="0" cy="0"/>
+          <a:chOff x="0" y="0"/>
+          <a:chExt cx="0" cy="0"/>
+        </a:xfrm>
+      </p:grpSpPr>
+      <p:sp>
+        <p:nvSpPr>
+          <p:cNvPr id="5" name="TextBox 4">
+            <a:extLst>
+              <a:ext uri="{FF2B5EF4-FFF2-40B4-BE49-F238E27FC236}">
                 <a16:creationId xmlns:a16="http://schemas.microsoft.com/office/drawing/2014/main" id="{A47F806F-C963-C443-8137-5603A474DE43}"/>
               </a:ext>
             </a:extLst>
@@ -18916,7 +19548,7 @@
         </p:nvSpPr>
         <p:spPr>
           <a:xfrm>
-            <a:off x="329184" y="512064"/>
+            <a:off x="243840" y="173666"/>
             <a:ext cx="5291328" cy="738664"/>
           </a:xfrm>
           <a:prstGeom prst="rect">
@@ -18938,7 +19570,15 @@
           <a:p>
             <a:r>
               <a:rPr lang="en-US" dirty="0"/>
-              <a:t>from populations with unequal variances</a:t>
+              <a:t>from populations with </a:t>
+            </a:r>
+            <a:r>
+              <a:rPr lang="en-US" b="1" dirty="0">
+                <a:solidFill>
+                  <a:srgbClr val="0070C0"/>
+                </a:solidFill>
+              </a:rPr>
+              <a:t>unequal variances</a:t>
             </a:r>
             <a:r>
               <a:rPr lang="el-GR" dirty="0"/>
@@ -18949,7 +19589,19 @@
           <a:p>
             <a:r>
               <a:rPr lang="en-US" dirty="0"/>
-              <a:t>the test statistic t is computed as:</a:t>
+              <a:t>the test statistic t is computed as </a:t>
+            </a:r>
+            <a:r>
+              <a:rPr lang="en-US" b="1" dirty="0">
+                <a:solidFill>
+                  <a:srgbClr val="0070C0"/>
+                </a:solidFill>
+              </a:rPr>
+              <a:t>Welch’s t test</a:t>
+            </a:r>
+            <a:r>
+              <a:rPr lang="en-US" dirty="0"/>
+              <a:t>:</a:t>
             </a:r>
           </a:p>
         </p:txBody>
@@ -18968,7 +19620,7 @@
         </p:nvSpPr>
         <p:spPr>
           <a:xfrm>
-            <a:off x="329184" y="3928634"/>
+            <a:off x="243840" y="2802325"/>
             <a:ext cx="5606288" cy="1384995"/>
           </a:xfrm>
           <a:prstGeom prst="rect">
@@ -19081,7 +19733,7 @@
         </p:nvSpPr>
         <p:spPr>
           <a:xfrm>
-            <a:off x="243840" y="3525552"/>
+            <a:off x="158496" y="2399243"/>
             <a:ext cx="1011936" cy="307777"/>
           </a:xfrm>
           <a:prstGeom prst="rect">
@@ -19116,8 +19768,8 @@
         </p:nvSpPr>
         <p:spPr>
           <a:xfrm>
-            <a:off x="7546848" y="1327544"/>
-            <a:ext cx="4401312" cy="2462213"/>
+            <a:off x="7129405" y="1196691"/>
+            <a:ext cx="4401312" cy="3200876"/>
           </a:xfrm>
           <a:prstGeom prst="rect">
             <a:avLst/>
@@ -19131,6 +19783,18 @@
           <a:lstStyle/>
           <a:p>
             <a:r>
+              <a:rPr lang="en-US" sz="2000" b="1" dirty="0"/>
+              <a:t>Simple estimate:</a:t>
+            </a:r>
+          </a:p>
+          <a:p>
+            <a:endParaRPr lang="en-US" dirty="0"/>
+          </a:p>
+          <a:p>
+            <a:endParaRPr lang="en-US" dirty="0"/>
+          </a:p>
+          <a:p>
+            <a:r>
               <a:rPr lang="en-US" dirty="0"/>
               <a:t>Suppose that standard deviations are about the same</a:t>
             </a:r>
@@ -19163,7 +19827,7 @@
           <a:p>
             <a:r>
               <a:rPr lang="en-US" dirty="0"/>
-              <a:t>and numbers observations are equal and big</a:t>
+              <a:t>and numbers of observations are equal and large</a:t>
             </a:r>
           </a:p>
           <a:p>
@@ -19203,7 +19867,23 @@
           <a:p>
             <a:r>
               <a:rPr lang="en-US" dirty="0"/>
-              <a:t>      t = (x¯1 - x¯2) / ( s*√(2/n) )</a:t>
+              <a:t>      t = (x¯</a:t>
+            </a:r>
+            <a:r>
+              <a:rPr lang="en-US" baseline="-25000" dirty="0"/>
+              <a:t>1</a:t>
+            </a:r>
+            <a:r>
+              <a:rPr lang="en-US" dirty="0"/>
+              <a:t> - x¯</a:t>
+            </a:r>
+            <a:r>
+              <a:rPr lang="en-US" baseline="-25000" dirty="0"/>
+              <a:t>2</a:t>
+            </a:r>
+            <a:r>
+              <a:rPr lang="en-US" dirty="0"/>
+              <a:t>) / ( s*√(2/n) )</a:t>
             </a:r>
           </a:p>
           <a:p>
@@ -19245,7 +19925,7 @@
         </p:blipFill>
         <p:spPr>
           <a:xfrm>
-            <a:off x="1255776" y="1690232"/>
+            <a:off x="917845" y="967298"/>
             <a:ext cx="2400300" cy="1460500"/>
           </a:xfrm>
           <a:prstGeom prst="rect">
@@ -19290,6 +19970,77 @@
           </a:fontRef>
         </p:style>
       </p:cxnSp>
+      <p:pic>
+        <p:nvPicPr>
+          <p:cNvPr id="2" name="Picture 1">
+            <a:extLst>
+              <a:ext uri="{FF2B5EF4-FFF2-40B4-BE49-F238E27FC236}">
+                <a16:creationId xmlns:a16="http://schemas.microsoft.com/office/drawing/2014/main" id="{5106897E-A2FF-554B-A65C-9BCCFAACB20F}"/>
+              </a:ext>
+            </a:extLst>
+          </p:cNvPr>
+          <p:cNvPicPr>
+            <a:picLocks noChangeAspect="1"/>
+          </p:cNvPicPr>
+          <p:nvPr/>
+        </p:nvPicPr>
+        <p:blipFill>
+          <a:blip r:embed="rId3" cstate="email">
+            <a:extLst>
+              <a:ext uri="{28A0092B-C50C-407E-A947-70E740481C1C}">
+                <a14:useLocalDpi xmlns:a14="http://schemas.microsoft.com/office/drawing/2010/main"/>
+              </a:ext>
+            </a:extLst>
+          </a:blip>
+          <a:stretch>
+            <a:fillRect/>
+          </a:stretch>
+        </p:blipFill>
+        <p:spPr>
+          <a:xfrm>
+            <a:off x="664464" y="5282189"/>
+            <a:ext cx="4267200" cy="774700"/>
+          </a:xfrm>
+          <a:prstGeom prst="rect">
+            <a:avLst/>
+          </a:prstGeom>
+        </p:spPr>
+      </p:pic>
+      <p:sp>
+        <p:nvSpPr>
+          <p:cNvPr id="4" name="TextBox 3">
+            <a:extLst>
+              <a:ext uri="{FF2B5EF4-FFF2-40B4-BE49-F238E27FC236}">
+                <a16:creationId xmlns:a16="http://schemas.microsoft.com/office/drawing/2014/main" id="{E48E3256-AACD-3440-ABA5-1645D3E01D05}"/>
+              </a:ext>
+            </a:extLst>
+          </p:cNvPr>
+          <p:cNvSpPr txBox="1"/>
+          <p:nvPr/>
+        </p:nvSpPr>
+        <p:spPr>
+          <a:xfrm>
+            <a:off x="160529" y="4671748"/>
+            <a:ext cx="5606288" cy="307777"/>
+          </a:xfrm>
+          <a:prstGeom prst="rect">
+            <a:avLst/>
+          </a:prstGeom>
+          <a:noFill/>
+        </p:spPr>
+        <p:txBody>
+          <a:bodyPr wrap="square" rtlCol="0">
+            <a:spAutoFit/>
+          </a:bodyPr>
+          <a:lstStyle/>
+          <a:p>
+            <a:r>
+              <a:rPr lang="en-US" dirty="0"/>
+              <a:t>The degrees of freedom of Welch t-test is estimated as following:</a:t>
+            </a:r>
+          </a:p>
+        </p:txBody>
+      </p:sp>
     </p:spTree>
     <p:extLst>
       <p:ext uri="{BB962C8B-B14F-4D97-AF65-F5344CB8AC3E}">
@@ -19303,7 +20054,7 @@
 </p:sld>
 </file>
 
-<file path=ppt/slides/slide7.xml><?xml version="1.0" encoding="utf-8"?>
+<file path=ppt/slides/slide8.xml><?xml version="1.0" encoding="utf-8"?>
 <p:sld xmlns:a="http://schemas.openxmlformats.org/drawingml/2006/main" xmlns:r="http://schemas.openxmlformats.org/officeDocument/2006/relationships" xmlns:p="http://schemas.openxmlformats.org/presentationml/2006/main">
   <p:cSld>
     <p:spTree>
@@ -19586,7 +20337,7 @@
           <a:graphicData uri="http://schemas.openxmlformats.org/presentationml/2006/ole">
             <mc:AlternateContent xmlns:mc="http://schemas.openxmlformats.org/markup-compatibility/2006">
               <mc:Choice xmlns:v="urn:schemas-microsoft-com:vml" Requires="v">
-                <p:oleObj spid="_x0000_s16454" name="Equation" r:id="rId4" imgW="17373600" imgH="10058400" progId="Equation.3">
+                <p:oleObj spid="_x0000_s16484" name="Equation" r:id="rId4" imgW="17373600" imgH="10058400" progId="Equation.3">
                   <p:embed/>
                 </p:oleObj>
               </mc:Choice>
@@ -19717,7 +20468,7 @@
           <a:graphicData uri="http://schemas.openxmlformats.org/presentationml/2006/ole">
             <mc:AlternateContent xmlns:mc="http://schemas.openxmlformats.org/markup-compatibility/2006">
               <mc:Choice xmlns:v="urn:schemas-microsoft-com:vml" Requires="v">
-                <p:oleObj spid="_x0000_s16455" name="Equation" r:id="rId6" imgW="18592800" imgH="10363200" progId="Equation.3">
+                <p:oleObj spid="_x0000_s16485" name="Equation" r:id="rId6" imgW="18592800" imgH="10363200" progId="Equation.3">
                   <p:embed/>
                 </p:oleObj>
               </mc:Choice>
@@ -19793,7 +20544,7 @@
           <a:graphicData uri="http://schemas.openxmlformats.org/presentationml/2006/ole">
             <mc:AlternateContent xmlns:mc="http://schemas.openxmlformats.org/markup-compatibility/2006">
               <mc:Choice xmlns:v="urn:schemas-microsoft-com:vml" Requires="v">
-                <p:oleObj spid="_x0000_s16456" name="Equation" r:id="rId8" imgW="36271200" imgH="21945600" progId="Equation.3">
+                <p:oleObj spid="_x0000_s16486" name="Equation" r:id="rId8" imgW="36271200" imgH="21945600" progId="Equation.3">
                   <p:embed/>
                 </p:oleObj>
               </mc:Choice>
@@ -19869,7 +20620,7 @@
           <a:graphicData uri="http://schemas.openxmlformats.org/presentationml/2006/ole">
             <mc:AlternateContent xmlns:mc="http://schemas.openxmlformats.org/markup-compatibility/2006">
               <mc:Choice xmlns:v="urn:schemas-microsoft-com:vml" Requires="v">
-                <p:oleObj spid="_x0000_s16457" name="Equation" r:id="rId10" imgW="38404800" imgH="8839200" progId="Equation.3">
+                <p:oleObj spid="_x0000_s16487" name="Equation" r:id="rId10" imgW="38404800" imgH="8839200" progId="Equation.3">
                   <p:embed/>
                 </p:oleObj>
               </mc:Choice>
@@ -19945,7 +20696,7 @@
           <a:graphicData uri="http://schemas.openxmlformats.org/presentationml/2006/ole">
             <mc:AlternateContent xmlns:mc="http://schemas.openxmlformats.org/markup-compatibility/2006">
               <mc:Choice xmlns:v="urn:schemas-microsoft-com:vml" Requires="v">
-                <p:oleObj spid="_x0000_s16458" name="Equation" r:id="rId12" imgW="19812000" imgH="11277600" progId="Equation.3">
+                <p:oleObj spid="_x0000_s16488" name="Equation" r:id="rId12" imgW="19812000" imgH="11277600" progId="Equation.3">
                   <p:embed/>
                 </p:oleObj>
               </mc:Choice>
@@ -20021,7 +20772,7 @@
           <a:graphicData uri="http://schemas.openxmlformats.org/presentationml/2006/ole">
             <mc:AlternateContent xmlns:mc="http://schemas.openxmlformats.org/markup-compatibility/2006">
               <mc:Choice xmlns:v="urn:schemas-microsoft-com:vml" Requires="v">
-                <p:oleObj spid="_x0000_s16459" name="Equation" r:id="rId14" imgW="42976800" imgH="5791200" progId="Equation.3">
+                <p:oleObj spid="_x0000_s16489" name="Equation" r:id="rId14" imgW="42976800" imgH="5791200" progId="Equation.3">
                   <p:embed/>
                 </p:oleObj>
               </mc:Choice>
@@ -20117,7 +20868,7 @@
 </p:sld>
 </file>
 
-<file path=ppt/slides/slide8.xml><?xml version="1.0" encoding="utf-8"?>
+<file path=ppt/slides/slide9.xml><?xml version="1.0" encoding="utf-8"?>
 <p:sld xmlns:a="http://schemas.openxmlformats.org/drawingml/2006/main" xmlns:r="http://schemas.openxmlformats.org/officeDocument/2006/relationships" xmlns:p="http://schemas.openxmlformats.org/presentationml/2006/main">
   <p:cSld>
     <p:spTree>

--- a/statistics_07_t_distribution.pptx
+++ b/statistics_07_t_distribution.pptx
@@ -11,10 +11,10 @@
     <p:sldId id="275" r:id="rId2"/>
     <p:sldId id="280" r:id="rId3"/>
     <p:sldId id="281" r:id="rId4"/>
-    <p:sldId id="282" r:id="rId5"/>
-    <p:sldId id="283" r:id="rId6"/>
-    <p:sldId id="290" r:id="rId7"/>
-    <p:sldId id="289" r:id="rId8"/>
+    <p:sldId id="290" r:id="rId5"/>
+    <p:sldId id="289" r:id="rId6"/>
+    <p:sldId id="282" r:id="rId7"/>
+    <p:sldId id="283" r:id="rId8"/>
     <p:sldId id="284" r:id="rId9"/>
     <p:sldId id="288" r:id="rId10"/>
   </p:sldIdLst>
@@ -15792,8 +15792,8 @@
         </p:nvSpPr>
         <p:spPr>
           <a:xfrm>
-            <a:off x="1318961" y="5252489"/>
-            <a:ext cx="2143280" cy="523220"/>
+            <a:off x="1318960" y="5252489"/>
+            <a:ext cx="4911152" cy="307777"/>
           </a:xfrm>
           <a:prstGeom prst="rect">
             <a:avLst/>
@@ -15808,13 +15808,7 @@
           <a:p>
             <a:r>
               <a:rPr lang="en-US" dirty="0"/>
-              <a:t>----- Random variable, </a:t>
-            </a:r>
-          </a:p>
-          <a:p>
-            <a:r>
-              <a:rPr lang="en-US" dirty="0"/>
-              <a:t>       Normal distribution</a:t>
+              <a:t>----- Random variable with Normal distribution N(0,1) </a:t>
             </a:r>
           </a:p>
         </p:txBody>
@@ -16089,8 +16083,8 @@
         </p:nvSpPr>
         <p:spPr>
           <a:xfrm>
-            <a:off x="312820" y="1053033"/>
-            <a:ext cx="4946073" cy="4154984"/>
+            <a:off x="107735" y="703694"/>
+            <a:ext cx="5817577" cy="4339650"/>
           </a:xfrm>
           <a:prstGeom prst="rect">
             <a:avLst/>
@@ -16118,38 +16112,70 @@
           <a:p>
             <a:r>
               <a:rPr lang="en-US" sz="1200" dirty="0"/>
-              <a:t>When sample size is big ( &gt; 30 ), then in many cases</a:t>
-            </a:r>
+              <a:t>When sample size is big ( &gt; 30 ), then in many cases sample distribution is close to gaussian. So we use gaussian distribution and z-statistics.</a:t>
+            </a:r>
+          </a:p>
+          <a:p>
+            <a:endParaRPr lang="en-US" sz="1200" dirty="0"/>
           </a:p>
           <a:p>
             <a:r>
               <a:rPr lang="en-US" sz="1200" dirty="0"/>
-              <a:t>sample distribution is close to gaussian. So we use gaussian distribution and z-statistics.</a:t>
-            </a:r>
-          </a:p>
-          <a:p>
-            <a:endParaRPr lang="en-US" sz="1200" dirty="0"/>
-          </a:p>
-          <a:p>
-            <a:r>
-              <a:rPr lang="en-US" sz="1200" dirty="0"/>
-              <a:t>Suppose that variable x follows normal gaussian </a:t>
-            </a:r>
-          </a:p>
-          <a:p>
-            <a:r>
-              <a:rPr lang="en-US" sz="1200" dirty="0"/>
-              <a:t>distribution with mean value </a:t>
-            </a:r>
-            <a:r>
-              <a:rPr lang="el-GR" sz="1200" b="1" dirty="0">
-                <a:solidFill>
-                  <a:srgbClr val="FF0000"/>
+              <a:t>Suppose that variable x follows normal gaussian distribution </a:t>
+            </a:r>
+            <a:r>
+              <a:rPr lang="en-US" sz="1200" dirty="0">
+                <a:solidFill>
+                  <a:schemeClr val="tx1"/>
+                </a:solidFill>
+              </a:rPr>
+              <a:t>N(</a:t>
+            </a:r>
+            <a:r>
+              <a:rPr lang="el-GR" sz="1200" dirty="0">
+                <a:solidFill>
+                  <a:schemeClr val="tx1"/>
                 </a:solidFill>
               </a:rPr>
               <a:t>μ</a:t>
             </a:r>
             <a:r>
+              <a:rPr lang="en-US" sz="1200" dirty="0">
+                <a:solidFill>
+                  <a:schemeClr val="tx1"/>
+                </a:solidFill>
+              </a:rPr>
+              <a:t>, </a:t>
+            </a:r>
+            <a:r>
+              <a:rPr lang="el-GR" sz="1200" dirty="0">
+                <a:solidFill>
+                  <a:schemeClr val="tx1"/>
+                </a:solidFill>
+              </a:rPr>
+              <a:t>σ</a:t>
+            </a:r>
+            <a:r>
+              <a:rPr lang="en-US" sz="1200" dirty="0">
+                <a:solidFill>
+                  <a:schemeClr val="tx1"/>
+                </a:solidFill>
+              </a:rPr>
+              <a:t>)</a:t>
+            </a:r>
+            <a:r>
+              <a:rPr lang="en-US" sz="1200" dirty="0"/>
+              <a:t> with mean value </a:t>
+            </a:r>
+            <a:r>
+              <a:rPr lang="el-GR" sz="1200" b="1" dirty="0">
+                <a:solidFill>
+                  <a:srgbClr val="FF0000"/>
+                </a:solidFill>
+              </a:rPr>
+              <a:t>μ</a:t>
+            </a:r>
+            <a:r>
               <a:rPr lang="en-US" sz="1200" dirty="0"/>
               <a:t> and standard deviation</a:t>
             </a:r>
@@ -16173,19 +16199,19 @@
           <a:p>
             <a:r>
               <a:rPr lang="en-US" sz="1200" dirty="0"/>
-              <a:t>Then we can compose variable "z" which would follow </a:t>
-            </a:r>
-          </a:p>
-          <a:p>
+              <a:t>Then we can compose variable "</a:t>
+            </a:r>
+            <a:r>
+              <a:rPr lang="en-US" sz="1200" b="1" dirty="0">
+                <a:solidFill>
+                  <a:srgbClr val="FF0000"/>
+                </a:solidFill>
+              </a:rPr>
+              <a:t>z</a:t>
+            </a:r>
             <a:r>
               <a:rPr lang="en-US" sz="1200" dirty="0"/>
-              <a:t>standard normalized distribution with zero mean </a:t>
-            </a:r>
-          </a:p>
-          <a:p>
-            <a:r>
-              <a:rPr lang="en-US" sz="1200" dirty="0"/>
-              <a:t>and standard deviation = 1 like this:</a:t>
+              <a:t>" which would follow standard normalized distribution N(0,1) with zero mean and standard deviation = 1 like this:</a:t>
             </a:r>
           </a:p>
           <a:p>
@@ -16210,7 +16236,47 @@
                   <a:srgbClr val="FF0000"/>
                 </a:solidFill>
               </a:rPr>
-              <a:t>μ)/σ</a:t>
+              <a:t>μ)</a:t>
+            </a:r>
+            <a:r>
+              <a:rPr lang="en-US" sz="1200" b="1" dirty="0">
+                <a:solidFill>
+                  <a:srgbClr val="FF0000"/>
+                </a:solidFill>
+              </a:rPr>
+              <a:t> </a:t>
+            </a:r>
+            <a:r>
+              <a:rPr lang="el-GR" sz="1200" b="1" dirty="0">
+                <a:solidFill>
+                  <a:srgbClr val="FF0000"/>
+                </a:solidFill>
+              </a:rPr>
+              <a:t>/</a:t>
+            </a:r>
+            <a:r>
+              <a:rPr lang="en-US" sz="1200" b="1" dirty="0">
+                <a:solidFill>
+                  <a:srgbClr val="FF0000"/>
+                </a:solidFill>
+              </a:rPr>
+              <a:t> </a:t>
+            </a:r>
+            <a:r>
+              <a:rPr lang="el-GR" sz="1200" b="1" dirty="0">
+                <a:solidFill>
+                  <a:srgbClr val="FF0000"/>
+                </a:solidFill>
+              </a:rPr>
+              <a:t>σ</a:t>
+            </a:r>
+            <a:r>
+              <a:rPr lang="en-US" sz="1200" b="1" dirty="0">
+                <a:solidFill>
+                  <a:srgbClr val="FF0000"/>
+                </a:solidFill>
+              </a:rPr>
+              <a:t> </a:t>
             </a:r>
             <a:endParaRPr lang="en-US" sz="1200" dirty="0">
               <a:solidFill>
@@ -16224,13 +16290,7 @@
           <a:p>
             <a:r>
               <a:rPr lang="en-US" sz="1200" dirty="0"/>
-              <a:t>Z-score is simply the z-value which shows how far is </a:t>
-            </a:r>
-          </a:p>
-          <a:p>
-            <a:r>
-              <a:rPr lang="en-US" sz="1200" dirty="0"/>
-              <a:t>the value from the mean expressed in number of "</a:t>
+              <a:t>Z-score is simply the z-value which shows how far is the value from the mean expressed in number of "</a:t>
             </a:r>
             <a:r>
               <a:rPr lang="en-US" sz="1200" dirty="0" err="1"/>
@@ -16242,15 +16302,12 @@
             </a:r>
           </a:p>
           <a:p>
+            <a:endParaRPr lang="en-US" sz="1200" dirty="0"/>
+          </a:p>
+          <a:p>
             <a:r>
               <a:rPr lang="en-US" sz="1200" dirty="0"/>
-              <a:t>For example, if  z &gt; 2, that means that the original</a:t>
-            </a:r>
-          </a:p>
-          <a:p>
-            <a:r>
-              <a:rPr lang="en-US" sz="1200" dirty="0"/>
-              <a:t>value is more than two </a:t>
+              <a:t>For example, if  z &gt; 2, that means that the original value is more than two </a:t>
             </a:r>
             <a:r>
               <a:rPr lang="en-US" sz="1200" dirty="0" err="1"/>
@@ -16258,7 +16315,13 @@
             </a:r>
             <a:r>
               <a:rPr lang="en-US" sz="1200" dirty="0"/>
-              <a:t> away from the mean value.</a:t>
+              <a:t> away from the mean value. For normal distribution this means that the probability</a:t>
+            </a:r>
+          </a:p>
+          <a:p>
+            <a:r>
+              <a:rPr lang="en-US" sz="1200" dirty="0"/>
+              <a:t>of this event is less than 0.05.  (to be precise, the exact z-score for 0.05 is 1.96)</a:t>
             </a:r>
           </a:p>
           <a:p>
@@ -16267,19 +16330,156 @@
           <a:p>
             <a:r>
               <a:rPr lang="en-US" sz="1200" dirty="0"/>
-              <a:t>For normal distribution this means that the probability</a:t>
-            </a:r>
-          </a:p>
-          <a:p>
+              <a:t>Suppose we take a sample of n values from </a:t>
+            </a:r>
+            <a:r>
+              <a:rPr lang="en-US" sz="1200" dirty="0">
+                <a:solidFill>
+                  <a:schemeClr val="tx1"/>
+                </a:solidFill>
+              </a:rPr>
+              <a:t>N(</a:t>
+            </a:r>
+            <a:r>
+              <a:rPr lang="el-GR" sz="1200" dirty="0">
+                <a:solidFill>
+                  <a:schemeClr val="tx1"/>
+                </a:solidFill>
+              </a:rPr>
+              <a:t>μ</a:t>
+            </a:r>
+            <a:r>
+              <a:rPr lang="en-US" sz="1200" dirty="0">
+                <a:solidFill>
+                  <a:schemeClr val="tx1"/>
+                </a:solidFill>
+              </a:rPr>
+              <a:t>, </a:t>
+            </a:r>
+            <a:r>
+              <a:rPr lang="el-GR" sz="1200" dirty="0">
+                <a:solidFill>
+                  <a:schemeClr val="tx1"/>
+                </a:solidFill>
+              </a:rPr>
+              <a:t>σ</a:t>
+            </a:r>
+            <a:r>
+              <a:rPr lang="en-US" sz="1200" dirty="0">
+                <a:solidFill>
+                  <a:schemeClr val="tx1"/>
+                </a:solidFill>
+              </a:rPr>
+              <a:t>)</a:t>
+            </a:r>
             <a:r>
               <a:rPr lang="en-US" sz="1200" dirty="0"/>
-              <a:t>of this event is less than 0.05.</a:t>
-            </a:r>
-          </a:p>
-          <a:p>
-            <a:r>
+              <a:t>. </a:t>
+            </a:r>
+            <a:br>
               <a:rPr lang="en-US" sz="1200" dirty="0"/>
-              <a:t>(to be precise, the exact z-score for 0.05 is 1.96)</a:t>
+            </a:br>
+            <a:r>
+              <a:rPr lang="en-US" sz="1200" dirty="0"/>
+              <a:t>Let "</a:t>
+            </a:r>
+            <a:r>
+              <a:rPr lang="en-US" sz="1200" b="1" dirty="0">
+                <a:solidFill>
+                  <a:srgbClr val="FF0000"/>
+                </a:solidFill>
+              </a:rPr>
+              <a:t>X</a:t>
+            </a:r>
+            <a:r>
+              <a:rPr lang="en-US" sz="1200" dirty="0"/>
+              <a:t>" (big X) be the sample mean. Then it follows normal distribution </a:t>
+            </a:r>
+            <a:r>
+              <a:rPr lang="en-US" sz="1200" dirty="0">
+                <a:solidFill>
+                  <a:schemeClr val="tx1"/>
+                </a:solidFill>
+              </a:rPr>
+              <a:t>N(</a:t>
+            </a:r>
+            <a:r>
+              <a:rPr lang="el-GR" sz="1200" dirty="0">
+                <a:solidFill>
+                  <a:schemeClr val="tx1"/>
+                </a:solidFill>
+              </a:rPr>
+              <a:t>μ</a:t>
+            </a:r>
+            <a:r>
+              <a:rPr lang="en-US" sz="1200" dirty="0">
+                <a:solidFill>
+                  <a:schemeClr val="tx1"/>
+                </a:solidFill>
+              </a:rPr>
+              <a:t>, </a:t>
+            </a:r>
+            <a:r>
+              <a:rPr lang="el-GR" sz="1200" dirty="0">
+                <a:solidFill>
+                  <a:schemeClr val="tx1"/>
+                </a:solidFill>
+              </a:rPr>
+              <a:t>σ</a:t>
+            </a:r>
+            <a:r>
+              <a:rPr lang="en-US" sz="1200" dirty="0">
+                <a:solidFill>
+                  <a:schemeClr val="tx1"/>
+                </a:solidFill>
+              </a:rPr>
+              <a:t>/√(n) )</a:t>
+            </a:r>
+            <a:r>
+              <a:rPr lang="en-US" sz="1200" dirty="0"/>
+              <a:t> with mean value </a:t>
+            </a:r>
+            <a:r>
+              <a:rPr lang="el-GR" sz="1200" b="1" dirty="0">
+                <a:solidFill>
+                  <a:srgbClr val="FF0000"/>
+                </a:solidFill>
+              </a:rPr>
+              <a:t>μ</a:t>
+            </a:r>
+            <a:r>
+              <a:rPr lang="en-US" sz="1200" dirty="0"/>
+              <a:t> and standard deviation</a:t>
+            </a:r>
+            <a:r>
+              <a:rPr lang="el-GR" sz="1200" b="1" dirty="0"/>
+              <a:t> </a:t>
+            </a:r>
+            <a:r>
+              <a:rPr lang="el-GR" sz="1200" b="1" dirty="0">
+                <a:solidFill>
+                  <a:srgbClr val="FF0000"/>
+                </a:solidFill>
+              </a:rPr>
+              <a:t>σ</a:t>
+            </a:r>
+            <a:r>
+              <a:rPr lang="en-US" sz="1200" b="1" dirty="0">
+                <a:solidFill>
+                  <a:srgbClr val="FF0000"/>
+                </a:solidFill>
+              </a:rPr>
+              <a:t>/√(n) </a:t>
+            </a:r>
+            <a:r>
+              <a:rPr lang="en-US" sz="1200" dirty="0"/>
+              <a:t>. </a:t>
+            </a:r>
+          </a:p>
+          <a:p>
+            <a:r>
+              <a:rPr lang="en-US" sz="1200" dirty="0"/>
+              <a:t>So the standard deviation of the mean gets smaller with larger "n". </a:t>
             </a:r>
           </a:p>
         </p:txBody>
@@ -16298,8 +16498,8 @@
         </p:nvSpPr>
         <p:spPr>
           <a:xfrm>
-            <a:off x="6685911" y="222037"/>
-            <a:ext cx="4946073" cy="6217087"/>
+            <a:off x="6412992" y="228123"/>
+            <a:ext cx="5705625" cy="6586418"/>
           </a:xfrm>
           <a:prstGeom prst="rect">
             <a:avLst/>
@@ -16402,40 +16602,35 @@
           <a:p>
             <a:r>
               <a:rPr lang="en-US" sz="1200" dirty="0"/>
-              <a:t>Note that </a:t>
-            </a:r>
+              <a:t>z-distribution (normal) gives 95% confidence at z &lt;= 2 .</a:t>
+            </a:r>
+          </a:p>
+          <a:p>
+            <a:endParaRPr lang="en-US" sz="1200" dirty="0"/>
+          </a:p>
+          <a:p>
+            <a:r>
+              <a:rPr lang="en-US" sz="1200" dirty="0"/>
+              <a:t>t-distribution has "fat tails", so to get 95% confidence interval we need to use t-score larger than 2. </a:t>
+            </a:r>
+          </a:p>
+          <a:p>
+            <a:r>
+              <a:rPr lang="en-US" sz="1200" dirty="0"/>
+              <a:t>How much larger decreases with increasing the N of points in the sample.</a:t>
+            </a:r>
+          </a:p>
+          <a:p>
+            <a:endParaRPr lang="en-US" sz="1200" dirty="0"/>
+          </a:p>
+          <a:p>
             <a:r>
               <a:rPr lang="en-US" sz="1200" b="1" dirty="0">
                 <a:solidFill>
-                  <a:srgbClr val="FF0000"/>
+                  <a:srgbClr val="0070C0"/>
                 </a:solidFill>
               </a:rPr>
-              <a:t>t ~ √(n)</a:t>
-            </a:r>
-          </a:p>
-          <a:p>
-            <a:endParaRPr lang="en-US" sz="1200" dirty="0"/>
-          </a:p>
-          <a:p>
-            <a:r>
-              <a:rPr lang="en-US" sz="1200" dirty="0"/>
-              <a:t>t-distribution has "fat tails", so to get 95% confidence interval we need to use t-score larger than 2. How much larger depends on how many data points we have in the sample. </a:t>
-            </a:r>
-            <a:r>
-              <a:rPr lang="en-US" sz="1200" b="1" dirty="0" err="1">
-                <a:solidFill>
-                  <a:srgbClr val="0070C0"/>
-                </a:solidFill>
-              </a:rPr>
-              <a:t>df</a:t>
-            </a:r>
-            <a:r>
-              <a:rPr lang="en-US" sz="1200" b="1" dirty="0">
-                <a:solidFill>
-                  <a:srgbClr val="0070C0"/>
-                </a:solidFill>
-              </a:rPr>
-              <a:t> = degrees of freedom = N-1</a:t>
+              <a:t>df = degrees of freedom = N-1</a:t>
             </a:r>
           </a:p>
           <a:p>
@@ -16510,7 +16705,7 @@
               <a:rPr lang="en-US" sz="1200" dirty="0">
                 <a:latin typeface="Andale Mono" panose="020B0509000000000004" pitchFamily="49" charset="0"/>
               </a:rPr>
-              <a:t>30   :  2.04</a:t>
+              <a:t>30   :  2.04 – almost normal</a:t>
             </a:r>
           </a:p>
           <a:p>
@@ -16518,7 +16713,7 @@
               <a:rPr lang="en-US" sz="1200" dirty="0">
                 <a:latin typeface="Andale Mono" panose="020B0509000000000004" pitchFamily="49" charset="0"/>
               </a:rPr>
-              <a:t>60   :  2.00</a:t>
+              <a:t>60   :  2.00 – almost normal</a:t>
             </a:r>
           </a:p>
           <a:p>
@@ -16687,6 +16882,149 @@
           </a:p>
         </p:txBody>
       </p:sp>
+      <p:pic>
+        <p:nvPicPr>
+          <p:cNvPr id="7" name="Picture 6">
+            <a:extLst>
+              <a:ext uri="{FF2B5EF4-FFF2-40B4-BE49-F238E27FC236}">
+                <a16:creationId xmlns:a16="http://schemas.microsoft.com/office/drawing/2014/main" id="{D60F9381-AFE1-8E44-8641-FCB9DA5268A5}"/>
+              </a:ext>
+            </a:extLst>
+          </p:cNvPr>
+          <p:cNvPicPr>
+            <a:picLocks noChangeAspect="1"/>
+          </p:cNvPicPr>
+          <p:nvPr/>
+        </p:nvPicPr>
+        <p:blipFill>
+          <a:blip r:embed="rId2" cstate="email">
+            <a:extLst>
+              <a:ext uri="{28A0092B-C50C-407E-A947-70E740481C1C}">
+                <a14:useLocalDpi xmlns:a14="http://schemas.microsoft.com/office/drawing/2010/main"/>
+              </a:ext>
+            </a:extLst>
+          </a:blip>
+          <a:stretch>
+            <a:fillRect/>
+          </a:stretch>
+        </p:blipFill>
+        <p:spPr>
+          <a:xfrm>
+            <a:off x="1066640" y="5160901"/>
+            <a:ext cx="702080" cy="616692"/>
+          </a:xfrm>
+          <a:prstGeom prst="rect">
+            <a:avLst/>
+          </a:prstGeom>
+        </p:spPr>
+      </p:pic>
+      <p:sp>
+        <p:nvSpPr>
+          <p:cNvPr id="8" name="TextBox 7">
+            <a:extLst>
+              <a:ext uri="{FF2B5EF4-FFF2-40B4-BE49-F238E27FC236}">
+                <a16:creationId xmlns:a16="http://schemas.microsoft.com/office/drawing/2014/main" id="{E671D202-6AB6-6842-BA0B-3C01F1BCA08B}"/>
+              </a:ext>
+            </a:extLst>
+          </p:cNvPr>
+          <p:cNvSpPr txBox="1"/>
+          <p:nvPr/>
+        </p:nvSpPr>
+        <p:spPr>
+          <a:xfrm>
+            <a:off x="1770064" y="5330748"/>
+            <a:ext cx="3887024" cy="276999"/>
+          </a:xfrm>
+          <a:prstGeom prst="rect">
+            <a:avLst/>
+          </a:prstGeom>
+          <a:noFill/>
+        </p:spPr>
+        <p:txBody>
+          <a:bodyPr wrap="square" rtlCol="0">
+            <a:spAutoFit/>
+          </a:bodyPr>
+          <a:lstStyle/>
+          <a:p>
+            <a:r>
+              <a:rPr lang="en-US" sz="1200" dirty="0"/>
+              <a:t>  - Random variable with Normal distribution N(0,1) </a:t>
+            </a:r>
+          </a:p>
+        </p:txBody>
+      </p:sp>
+      <p:pic>
+        <p:nvPicPr>
+          <p:cNvPr id="9" name="Picture 8">
+            <a:extLst>
+              <a:ext uri="{FF2B5EF4-FFF2-40B4-BE49-F238E27FC236}">
+                <a16:creationId xmlns:a16="http://schemas.microsoft.com/office/drawing/2014/main" id="{3A5B4D7D-C6C8-0949-972B-F26D34ED0F6A}"/>
+              </a:ext>
+            </a:extLst>
+          </p:cNvPr>
+          <p:cNvPicPr>
+            <a:picLocks noChangeAspect="1"/>
+          </p:cNvPicPr>
+          <p:nvPr/>
+        </p:nvPicPr>
+        <p:blipFill>
+          <a:blip r:embed="rId3" cstate="email">
+            <a:extLst>
+              <a:ext uri="{28A0092B-C50C-407E-A947-70E740481C1C}">
+                <a14:useLocalDpi xmlns:a14="http://schemas.microsoft.com/office/drawing/2010/main"/>
+              </a:ext>
+            </a:extLst>
+          </a:blip>
+          <a:stretch>
+            <a:fillRect/>
+          </a:stretch>
+        </p:blipFill>
+        <p:spPr>
+          <a:xfrm>
+            <a:off x="10616529" y="1365380"/>
+            <a:ext cx="954729" cy="439036"/>
+          </a:xfrm>
+          <a:prstGeom prst="rect">
+            <a:avLst/>
+          </a:prstGeom>
+        </p:spPr>
+      </p:pic>
+      <p:pic>
+        <p:nvPicPr>
+          <p:cNvPr id="10" name="Picture 9">
+            <a:extLst>
+              <a:ext uri="{FF2B5EF4-FFF2-40B4-BE49-F238E27FC236}">
+                <a16:creationId xmlns:a16="http://schemas.microsoft.com/office/drawing/2014/main" id="{6F5DC8A1-56E3-F94D-8F90-D0724F1D0D2C}"/>
+              </a:ext>
+            </a:extLst>
+          </p:cNvPr>
+          <p:cNvPicPr>
+            <a:picLocks noChangeAspect="1"/>
+          </p:cNvPicPr>
+          <p:nvPr/>
+        </p:nvPicPr>
+        <p:blipFill>
+          <a:blip r:embed="rId4" cstate="email">
+            <a:extLst>
+              <a:ext uri="{28A0092B-C50C-407E-A947-70E740481C1C}">
+                <a14:useLocalDpi xmlns:a14="http://schemas.microsoft.com/office/drawing/2010/main"/>
+              </a:ext>
+            </a:extLst>
+          </a:blip>
+          <a:stretch>
+            <a:fillRect/>
+          </a:stretch>
+        </p:blipFill>
+        <p:spPr>
+          <a:xfrm>
+            <a:off x="10616529" y="1804416"/>
+            <a:ext cx="1551736" cy="400653"/>
+          </a:xfrm>
+          <a:prstGeom prst="rect">
+            <a:avLst/>
+          </a:prstGeom>
+        </p:spPr>
+      </p:pic>
     </p:spTree>
     <p:extLst>
       <p:ext uri="{BB962C8B-B14F-4D97-AF65-F5344CB8AC3E}">
@@ -17436,6 +17774,1030 @@
       </p:grpSpPr>
       <p:sp>
         <p:nvSpPr>
+          <p:cNvPr id="5" name="TextBox 4">
+            <a:extLst>
+              <a:ext uri="{FF2B5EF4-FFF2-40B4-BE49-F238E27FC236}">
+                <a16:creationId xmlns:a16="http://schemas.microsoft.com/office/drawing/2014/main" id="{95839D38-840F-AB46-91D6-AE1BF857766F}"/>
+              </a:ext>
+            </a:extLst>
+          </p:cNvPr>
+          <p:cNvSpPr txBox="1"/>
+          <p:nvPr/>
+        </p:nvSpPr>
+        <p:spPr>
+          <a:xfrm>
+            <a:off x="59637" y="79516"/>
+            <a:ext cx="4830417" cy="523220"/>
+          </a:xfrm>
+          <a:prstGeom prst="rect">
+            <a:avLst/>
+          </a:prstGeom>
+          <a:noFill/>
+        </p:spPr>
+        <p:txBody>
+          <a:bodyPr wrap="square" rtlCol="0">
+            <a:spAutoFit/>
+          </a:bodyPr>
+          <a:lstStyle/>
+          <a:p>
+            <a:r>
+              <a:rPr lang="en-US" sz="2800" b="1" dirty="0"/>
+              <a:t>Independent t-test formula</a:t>
+            </a:r>
+          </a:p>
+        </p:txBody>
+      </p:sp>
+      <p:sp>
+        <p:nvSpPr>
+          <p:cNvPr id="6" name="TextBox 5">
+            <a:extLst>
+              <a:ext uri="{FF2B5EF4-FFF2-40B4-BE49-F238E27FC236}">
+                <a16:creationId xmlns:a16="http://schemas.microsoft.com/office/drawing/2014/main" id="{0678EC34-E769-A049-B0D4-14A84745DEFB}"/>
+              </a:ext>
+            </a:extLst>
+          </p:cNvPr>
+          <p:cNvSpPr txBox="1"/>
+          <p:nvPr/>
+        </p:nvSpPr>
+        <p:spPr>
+          <a:xfrm>
+            <a:off x="59637" y="777481"/>
+            <a:ext cx="5068956" cy="523220"/>
+          </a:xfrm>
+          <a:prstGeom prst="rect">
+            <a:avLst/>
+          </a:prstGeom>
+          <a:noFill/>
+        </p:spPr>
+        <p:txBody>
+          <a:bodyPr wrap="square" rtlCol="0">
+            <a:spAutoFit/>
+          </a:bodyPr>
+          <a:lstStyle/>
+          <a:p>
+            <a:r>
+              <a:rPr lang="en-US" sz="2800" b="1" dirty="0">
+                <a:solidFill>
+                  <a:srgbClr val="0070C0"/>
+                </a:solidFill>
+              </a:rPr>
+              <a:t>Student t-test formula</a:t>
+            </a:r>
+          </a:p>
+        </p:txBody>
+      </p:sp>
+      <p:sp>
+        <p:nvSpPr>
+          <p:cNvPr id="7" name="TextBox 6">
+            <a:extLst>
+              <a:ext uri="{FF2B5EF4-FFF2-40B4-BE49-F238E27FC236}">
+                <a16:creationId xmlns:a16="http://schemas.microsoft.com/office/drawing/2014/main" id="{44A88323-6919-B943-8EF7-07DDBC73846E}"/>
+              </a:ext>
+            </a:extLst>
+          </p:cNvPr>
+          <p:cNvSpPr txBox="1"/>
+          <p:nvPr/>
+        </p:nvSpPr>
+        <p:spPr>
+          <a:xfrm>
+            <a:off x="59637" y="1417745"/>
+            <a:ext cx="5665304" cy="738664"/>
+          </a:xfrm>
+          <a:prstGeom prst="rect">
+            <a:avLst/>
+          </a:prstGeom>
+          <a:noFill/>
+        </p:spPr>
+        <p:txBody>
+          <a:bodyPr wrap="square" rtlCol="0">
+            <a:spAutoFit/>
+          </a:bodyPr>
+          <a:lstStyle/>
+          <a:p>
+            <a:r>
+              <a:rPr lang="en-US" dirty="0"/>
+              <a:t>If the variance of the two groups are equivalent (</a:t>
+            </a:r>
+            <a:r>
+              <a:rPr lang="en-US" b="1" dirty="0">
+                <a:solidFill>
+                  <a:srgbClr val="FF0000"/>
+                </a:solidFill>
+              </a:rPr>
+              <a:t>homoscedasticity</a:t>
+            </a:r>
+            <a:r>
+              <a:rPr lang="en-US" dirty="0"/>
+              <a:t>), the t-test value, comparing the two samples (A and B), can be calculated as following:</a:t>
+            </a:r>
+          </a:p>
+        </p:txBody>
+      </p:sp>
+      <p:pic>
+        <p:nvPicPr>
+          <p:cNvPr id="8" name="Picture 7">
+            <a:extLst>
+              <a:ext uri="{FF2B5EF4-FFF2-40B4-BE49-F238E27FC236}">
+                <a16:creationId xmlns:a16="http://schemas.microsoft.com/office/drawing/2014/main" id="{1B3E1D2C-D1B0-CF4C-BC05-AA7BFCDFCFB3}"/>
+              </a:ext>
+            </a:extLst>
+          </p:cNvPr>
+          <p:cNvPicPr>
+            <a:picLocks noChangeAspect="1"/>
+          </p:cNvPicPr>
+          <p:nvPr/>
+        </p:nvPicPr>
+        <p:blipFill>
+          <a:blip r:embed="rId2" cstate="email">
+            <a:extLst>
+              <a:ext uri="{28A0092B-C50C-407E-A947-70E740481C1C}">
+                <a14:useLocalDpi xmlns:a14="http://schemas.microsoft.com/office/drawing/2010/main"/>
+              </a:ext>
+            </a:extLst>
+          </a:blip>
+          <a:stretch>
+            <a:fillRect/>
+          </a:stretch>
+        </p:blipFill>
+        <p:spPr>
+          <a:xfrm>
+            <a:off x="1573145" y="2290420"/>
+            <a:ext cx="1803400" cy="939800"/>
+          </a:xfrm>
+          <a:prstGeom prst="rect">
+            <a:avLst/>
+          </a:prstGeom>
+        </p:spPr>
+      </p:pic>
+      <p:sp>
+        <p:nvSpPr>
+          <p:cNvPr id="9" name="TextBox 8">
+            <a:extLst>
+              <a:ext uri="{FF2B5EF4-FFF2-40B4-BE49-F238E27FC236}">
+                <a16:creationId xmlns:a16="http://schemas.microsoft.com/office/drawing/2014/main" id="{8D88D210-1CC6-294A-ABBF-BD40990F5A04}"/>
+              </a:ext>
+            </a:extLst>
+          </p:cNvPr>
+          <p:cNvSpPr txBox="1"/>
+          <p:nvPr/>
+        </p:nvSpPr>
+        <p:spPr>
+          <a:xfrm>
+            <a:off x="258418" y="3498577"/>
+            <a:ext cx="6202017" cy="1169551"/>
+          </a:xfrm>
+          <a:prstGeom prst="rect">
+            <a:avLst/>
+          </a:prstGeom>
+          <a:noFill/>
+        </p:spPr>
+        <p:txBody>
+          <a:bodyPr wrap="square" rtlCol="0">
+            <a:spAutoFit/>
+          </a:bodyPr>
+          <a:lstStyle/>
+          <a:p>
+            <a:r>
+              <a:rPr lang="en-US" dirty="0"/>
+              <a:t>where,</a:t>
+            </a:r>
+          </a:p>
+          <a:p>
+            <a:pPr marL="285750" indent="-285750">
+              <a:buFont typeface="Arial" panose="020B0604020202020204" pitchFamily="34" charset="0"/>
+              <a:buChar char="•"/>
+            </a:pPr>
+            <a:r>
+              <a:rPr lang="en-US" dirty="0"/>
+              <a:t>m</a:t>
+            </a:r>
+            <a:r>
+              <a:rPr lang="en-US" baseline="-25000" dirty="0"/>
+              <a:t>A</a:t>
+            </a:r>
+            <a:r>
+              <a:rPr lang="en-US" dirty="0"/>
+              <a:t> and </a:t>
+            </a:r>
+            <a:r>
+              <a:rPr lang="en-US" dirty="0" err="1"/>
+              <a:t>m</a:t>
+            </a:r>
+            <a:r>
+              <a:rPr lang="en-US" baseline="-25000" dirty="0" err="1"/>
+              <a:t>B</a:t>
+            </a:r>
+            <a:r>
+              <a:rPr lang="en-US" dirty="0"/>
+              <a:t> represent the mean value of the group A and B, respectively.</a:t>
+            </a:r>
+          </a:p>
+          <a:p>
+            <a:pPr marL="285750" indent="-285750">
+              <a:buFont typeface="Arial" panose="020B0604020202020204" pitchFamily="34" charset="0"/>
+              <a:buChar char="•"/>
+            </a:pPr>
+            <a:r>
+              <a:rPr lang="en-US" dirty="0" err="1"/>
+              <a:t>n</a:t>
+            </a:r>
+            <a:r>
+              <a:rPr lang="en-US" baseline="-25000" dirty="0" err="1"/>
+              <a:t>A</a:t>
+            </a:r>
+            <a:r>
+              <a:rPr lang="en-US" dirty="0"/>
+              <a:t> and </a:t>
+            </a:r>
+            <a:r>
+              <a:rPr lang="en-US" dirty="0" err="1"/>
+              <a:t>n</a:t>
+            </a:r>
+            <a:r>
+              <a:rPr lang="en-US" baseline="-25000" dirty="0" err="1"/>
+              <a:t>B</a:t>
+            </a:r>
+            <a:r>
+              <a:rPr lang="en-US" dirty="0"/>
+              <a:t> represent the sizes of the group A and B, respectively.</a:t>
+            </a:r>
+          </a:p>
+          <a:p>
+            <a:pPr marL="285750" indent="-285750">
+              <a:buFont typeface="Arial" panose="020B0604020202020204" pitchFamily="34" charset="0"/>
+              <a:buChar char="•"/>
+            </a:pPr>
+            <a:r>
+              <a:rPr lang="en-US" dirty="0"/>
+              <a:t>S</a:t>
+            </a:r>
+            <a:r>
+              <a:rPr lang="en-US" baseline="30000" dirty="0"/>
+              <a:t>2</a:t>
+            </a:r>
+            <a:r>
+              <a:rPr lang="en-US" dirty="0"/>
+              <a:t> is an estimator of the pooled variance of the two groups. </a:t>
+            </a:r>
+            <a:br>
+              <a:rPr lang="en-US" dirty="0"/>
+            </a:br>
+            <a:r>
+              <a:rPr lang="en-US" dirty="0"/>
+              <a:t>It can be calculated as following :</a:t>
+            </a:r>
+          </a:p>
+        </p:txBody>
+      </p:sp>
+      <p:pic>
+        <p:nvPicPr>
+          <p:cNvPr id="10" name="Picture 9">
+            <a:extLst>
+              <a:ext uri="{FF2B5EF4-FFF2-40B4-BE49-F238E27FC236}">
+                <a16:creationId xmlns:a16="http://schemas.microsoft.com/office/drawing/2014/main" id="{4C19111F-E2D5-8E4A-8C2B-4ABC7790F639}"/>
+              </a:ext>
+            </a:extLst>
+          </p:cNvPr>
+          <p:cNvPicPr>
+            <a:picLocks noChangeAspect="1"/>
+          </p:cNvPicPr>
+          <p:nvPr/>
+        </p:nvPicPr>
+        <p:blipFill>
+          <a:blip r:embed="rId3" cstate="email">
+            <a:extLst>
+              <a:ext uri="{28A0092B-C50C-407E-A947-70E740481C1C}">
+                <a14:useLocalDpi xmlns:a14="http://schemas.microsoft.com/office/drawing/2010/main"/>
+              </a:ext>
+            </a:extLst>
+          </a:blip>
+          <a:stretch>
+            <a:fillRect/>
+          </a:stretch>
+        </p:blipFill>
+        <p:spPr>
+          <a:xfrm>
+            <a:off x="1614006" y="4830802"/>
+            <a:ext cx="3860800" cy="825500"/>
+          </a:xfrm>
+          <a:prstGeom prst="rect">
+            <a:avLst/>
+          </a:prstGeom>
+        </p:spPr>
+      </p:pic>
+      <p:sp>
+        <p:nvSpPr>
+          <p:cNvPr id="11" name="TextBox 10">
+            <a:extLst>
+              <a:ext uri="{FF2B5EF4-FFF2-40B4-BE49-F238E27FC236}">
+                <a16:creationId xmlns:a16="http://schemas.microsoft.com/office/drawing/2014/main" id="{C37B3D75-5E54-2642-B093-F70EA2BD9854}"/>
+              </a:ext>
+            </a:extLst>
+          </p:cNvPr>
+          <p:cNvSpPr txBox="1"/>
+          <p:nvPr/>
+        </p:nvSpPr>
+        <p:spPr>
+          <a:xfrm>
+            <a:off x="258418" y="5865795"/>
+            <a:ext cx="5466523" cy="307777"/>
+          </a:xfrm>
+          <a:prstGeom prst="rect">
+            <a:avLst/>
+          </a:prstGeom>
+          <a:noFill/>
+        </p:spPr>
+        <p:txBody>
+          <a:bodyPr wrap="square" rtlCol="0">
+            <a:spAutoFit/>
+          </a:bodyPr>
+          <a:lstStyle/>
+          <a:p>
+            <a:r>
+              <a:rPr lang="en-US" dirty="0"/>
+              <a:t>Degrees of freedom (df): df=nA+nB−2</a:t>
+            </a:r>
+          </a:p>
+        </p:txBody>
+      </p:sp>
+      <p:sp>
+        <p:nvSpPr>
+          <p:cNvPr id="12" name="TextBox 11">
+            <a:extLst>
+              <a:ext uri="{FF2B5EF4-FFF2-40B4-BE49-F238E27FC236}">
+                <a16:creationId xmlns:a16="http://schemas.microsoft.com/office/drawing/2014/main" id="{710416CA-81B5-7043-A0E5-9BDC3E96E0DA}"/>
+              </a:ext>
+            </a:extLst>
+          </p:cNvPr>
+          <p:cNvSpPr txBox="1"/>
+          <p:nvPr/>
+        </p:nvSpPr>
+        <p:spPr>
+          <a:xfrm>
+            <a:off x="7195931" y="221687"/>
+            <a:ext cx="4472608" cy="523220"/>
+          </a:xfrm>
+          <a:prstGeom prst="rect">
+            <a:avLst/>
+          </a:prstGeom>
+          <a:noFill/>
+        </p:spPr>
+        <p:txBody>
+          <a:bodyPr wrap="square" rtlCol="0">
+            <a:spAutoFit/>
+          </a:bodyPr>
+          <a:lstStyle/>
+          <a:p>
+            <a:r>
+              <a:rPr lang="en-US" sz="2800" b="1" dirty="0"/>
+              <a:t>Paired t-test formula</a:t>
+            </a:r>
+          </a:p>
+        </p:txBody>
+      </p:sp>
+      <p:pic>
+        <p:nvPicPr>
+          <p:cNvPr id="13" name="Picture 12">
+            <a:extLst>
+              <a:ext uri="{FF2B5EF4-FFF2-40B4-BE49-F238E27FC236}">
+                <a16:creationId xmlns:a16="http://schemas.microsoft.com/office/drawing/2014/main" id="{2CBE27C7-6F21-A64B-963A-DC7497965794}"/>
+              </a:ext>
+            </a:extLst>
+          </p:cNvPr>
+          <p:cNvPicPr>
+            <a:picLocks noChangeAspect="1"/>
+          </p:cNvPicPr>
+          <p:nvPr/>
+        </p:nvPicPr>
+        <p:blipFill>
+          <a:blip r:embed="rId4" cstate="email">
+            <a:extLst>
+              <a:ext uri="{28A0092B-C50C-407E-A947-70E740481C1C}">
+                <a14:useLocalDpi xmlns:a14="http://schemas.microsoft.com/office/drawing/2010/main"/>
+              </a:ext>
+            </a:extLst>
+          </a:blip>
+          <a:stretch>
+            <a:fillRect/>
+          </a:stretch>
+        </p:blipFill>
+        <p:spPr>
+          <a:xfrm>
+            <a:off x="8443291" y="1727445"/>
+            <a:ext cx="1143000" cy="698500"/>
+          </a:xfrm>
+          <a:prstGeom prst="rect">
+            <a:avLst/>
+          </a:prstGeom>
+        </p:spPr>
+      </p:pic>
+      <p:sp>
+        <p:nvSpPr>
+          <p:cNvPr id="14" name="TextBox 13">
+            <a:extLst>
+              <a:ext uri="{FF2B5EF4-FFF2-40B4-BE49-F238E27FC236}">
+                <a16:creationId xmlns:a16="http://schemas.microsoft.com/office/drawing/2014/main" id="{9B3D9FCD-309C-6240-B32B-8BF14D48E17D}"/>
+              </a:ext>
+            </a:extLst>
+          </p:cNvPr>
+          <p:cNvSpPr txBox="1"/>
+          <p:nvPr/>
+        </p:nvSpPr>
+        <p:spPr>
+          <a:xfrm>
+            <a:off x="7434471" y="2981739"/>
+            <a:ext cx="3717234" cy="1384995"/>
+          </a:xfrm>
+          <a:prstGeom prst="rect">
+            <a:avLst/>
+          </a:prstGeom>
+          <a:noFill/>
+        </p:spPr>
+        <p:txBody>
+          <a:bodyPr wrap="square" rtlCol="0">
+            <a:spAutoFit/>
+          </a:bodyPr>
+          <a:lstStyle/>
+          <a:p>
+            <a:r>
+              <a:rPr lang="en-US" dirty="0"/>
+              <a:t>where,</a:t>
+            </a:r>
+          </a:p>
+          <a:p>
+            <a:endParaRPr lang="en-US" dirty="0"/>
+          </a:p>
+          <a:p>
+            <a:pPr marL="285750" indent="-285750">
+              <a:buFont typeface="Arial" panose="020B0604020202020204" pitchFamily="34" charset="0"/>
+              <a:buChar char="•"/>
+            </a:pPr>
+            <a:r>
+              <a:rPr lang="en-US" dirty="0"/>
+              <a:t>m is the mean differences</a:t>
+            </a:r>
+          </a:p>
+          <a:p>
+            <a:pPr marL="285750" indent="-285750">
+              <a:buFont typeface="Arial" panose="020B0604020202020204" pitchFamily="34" charset="0"/>
+              <a:buChar char="•"/>
+            </a:pPr>
+            <a:r>
+              <a:rPr lang="en-US" dirty="0"/>
+              <a:t>n is the sample size (i.e., size of d)</a:t>
+            </a:r>
+          </a:p>
+          <a:p>
+            <a:pPr marL="285750" indent="-285750">
+              <a:buFont typeface="Arial" panose="020B0604020202020204" pitchFamily="34" charset="0"/>
+              <a:buChar char="•"/>
+            </a:pPr>
+            <a:r>
+              <a:rPr lang="en-US" dirty="0"/>
+              <a:t>s is the standard deviation of d</a:t>
+            </a:r>
+          </a:p>
+          <a:p>
+            <a:pPr marL="285750" indent="-285750">
+              <a:buFont typeface="Arial" panose="020B0604020202020204" pitchFamily="34" charset="0"/>
+              <a:buChar char="•"/>
+            </a:pPr>
+            <a:r>
+              <a:rPr lang="en-US" dirty="0"/>
+              <a:t>Degrees of freedom (df): df=n−1</a:t>
+            </a:r>
+          </a:p>
+        </p:txBody>
+      </p:sp>
+      <p:sp>
+        <p:nvSpPr>
+          <p:cNvPr id="15" name="TextBox 14">
+            <a:extLst>
+              <a:ext uri="{FF2B5EF4-FFF2-40B4-BE49-F238E27FC236}">
+                <a16:creationId xmlns:a16="http://schemas.microsoft.com/office/drawing/2014/main" id="{4156CE12-3B00-0E4E-826A-95BB91E56C61}"/>
+              </a:ext>
+            </a:extLst>
+          </p:cNvPr>
+          <p:cNvSpPr txBox="1"/>
+          <p:nvPr/>
+        </p:nvSpPr>
+        <p:spPr>
+          <a:xfrm>
+            <a:off x="7275443" y="777481"/>
+            <a:ext cx="4393096" cy="523220"/>
+          </a:xfrm>
+          <a:prstGeom prst="rect">
+            <a:avLst/>
+          </a:prstGeom>
+          <a:noFill/>
+        </p:spPr>
+        <p:txBody>
+          <a:bodyPr wrap="square" rtlCol="0">
+            <a:spAutoFit/>
+          </a:bodyPr>
+          <a:lstStyle/>
+          <a:p>
+            <a:r>
+              <a:rPr lang="en-US" dirty="0"/>
+              <a:t>The </a:t>
+            </a:r>
+            <a:r>
+              <a:rPr lang="en-US" b="1" dirty="0"/>
+              <a:t>paired t-test</a:t>
+            </a:r>
+            <a:r>
+              <a:rPr lang="en-US" dirty="0"/>
+              <a:t> is used to compare the means of two related groups of samples</a:t>
+            </a:r>
+          </a:p>
+        </p:txBody>
+      </p:sp>
+      <p:cxnSp>
+        <p:nvCxnSpPr>
+          <p:cNvPr id="17" name="Straight Connector 16">
+            <a:extLst>
+              <a:ext uri="{FF2B5EF4-FFF2-40B4-BE49-F238E27FC236}">
+                <a16:creationId xmlns:a16="http://schemas.microsoft.com/office/drawing/2014/main" id="{BB233B1F-891E-9141-BEE8-8AC67EB81D35}"/>
+              </a:ext>
+            </a:extLst>
+          </p:cNvPr>
+          <p:cNvCxnSpPr/>
+          <p:nvPr/>
+        </p:nvCxnSpPr>
+        <p:spPr>
+          <a:xfrm>
+            <a:off x="6599583" y="79516"/>
+            <a:ext cx="0" cy="6399143"/>
+          </a:xfrm>
+          <a:prstGeom prst="line">
+            <a:avLst/>
+          </a:prstGeom>
+          <a:ln w="63500"/>
+        </p:spPr>
+        <p:style>
+          <a:lnRef idx="1">
+            <a:schemeClr val="accent1"/>
+          </a:lnRef>
+          <a:fillRef idx="0">
+            <a:schemeClr val="accent1"/>
+          </a:fillRef>
+          <a:effectRef idx="0">
+            <a:schemeClr val="accent1"/>
+          </a:effectRef>
+          <a:fontRef idx="minor">
+            <a:schemeClr val="tx1"/>
+          </a:fontRef>
+        </p:style>
+      </p:cxnSp>
+    </p:spTree>
+    <p:extLst>
+      <p:ext uri="{BB962C8B-B14F-4D97-AF65-F5344CB8AC3E}">
+        <p14:creationId xmlns:p14="http://schemas.microsoft.com/office/powerpoint/2010/main" val="2869005700"/>
+      </p:ext>
+    </p:extLst>
+  </p:cSld>
+  <p:clrMapOvr>
+    <a:masterClrMapping/>
+  </p:clrMapOvr>
+</p:sld>
+</file>
+
+<file path=ppt/slides/slide5.xml><?xml version="1.0" encoding="utf-8"?>
+<p:sld xmlns:a="http://schemas.openxmlformats.org/drawingml/2006/main" xmlns:r="http://schemas.openxmlformats.org/officeDocument/2006/relationships" xmlns:p="http://schemas.openxmlformats.org/presentationml/2006/main">
+  <p:cSld>
+    <p:spTree>
+      <p:nvGrpSpPr>
+        <p:cNvPr id="1" name=""/>
+        <p:cNvGrpSpPr/>
+        <p:nvPr/>
+      </p:nvGrpSpPr>
+      <p:grpSpPr>
+        <a:xfrm>
+          <a:off x="0" y="0"/>
+          <a:ext cx="0" cy="0"/>
+          <a:chOff x="0" y="0"/>
+          <a:chExt cx="0" cy="0"/>
+        </a:xfrm>
+      </p:grpSpPr>
+      <p:sp>
+        <p:nvSpPr>
+          <p:cNvPr id="5" name="TextBox 4">
+            <a:extLst>
+              <a:ext uri="{FF2B5EF4-FFF2-40B4-BE49-F238E27FC236}">
+                <a16:creationId xmlns:a16="http://schemas.microsoft.com/office/drawing/2014/main" id="{A47F806F-C963-C443-8137-5603A474DE43}"/>
+              </a:ext>
+            </a:extLst>
+          </p:cNvPr>
+          <p:cNvSpPr txBox="1"/>
+          <p:nvPr/>
+        </p:nvSpPr>
+        <p:spPr>
+          <a:xfrm>
+            <a:off x="243840" y="173666"/>
+            <a:ext cx="5291328" cy="738664"/>
+          </a:xfrm>
+          <a:prstGeom prst="rect">
+            <a:avLst/>
+          </a:prstGeom>
+          <a:noFill/>
+        </p:spPr>
+        <p:txBody>
+          <a:bodyPr wrap="square" rtlCol="0">
+            <a:spAutoFit/>
+          </a:bodyPr>
+          <a:lstStyle/>
+          <a:p>
+            <a:r>
+              <a:rPr lang="en-US" dirty="0"/>
+              <a:t>When the two independent samples are assumed to be drawn </a:t>
+            </a:r>
+          </a:p>
+          <a:p>
+            <a:r>
+              <a:rPr lang="en-US" dirty="0"/>
+              <a:t>from populations with </a:t>
+            </a:r>
+            <a:r>
+              <a:rPr lang="en-US" b="1" dirty="0">
+                <a:solidFill>
+                  <a:srgbClr val="0070C0"/>
+                </a:solidFill>
+              </a:rPr>
+              <a:t>unequal variances</a:t>
+            </a:r>
+            <a:r>
+              <a:rPr lang="el-GR" dirty="0"/>
+              <a:t>, </a:t>
+            </a:r>
+            <a:endParaRPr lang="en-US" dirty="0"/>
+          </a:p>
+          <a:p>
+            <a:r>
+              <a:rPr lang="en-US" dirty="0"/>
+              <a:t>the test statistic t is computed as </a:t>
+            </a:r>
+            <a:r>
+              <a:rPr lang="en-US" b="1" dirty="0">
+                <a:solidFill>
+                  <a:srgbClr val="0070C0"/>
+                </a:solidFill>
+              </a:rPr>
+              <a:t>Welch’s t test</a:t>
+            </a:r>
+            <a:r>
+              <a:rPr lang="en-US" dirty="0"/>
+              <a:t>:</a:t>
+            </a:r>
+          </a:p>
+        </p:txBody>
+      </p:sp>
+      <p:sp>
+        <p:nvSpPr>
+          <p:cNvPr id="8" name="TextBox 7">
+            <a:extLst>
+              <a:ext uri="{FF2B5EF4-FFF2-40B4-BE49-F238E27FC236}">
+                <a16:creationId xmlns:a16="http://schemas.microsoft.com/office/drawing/2014/main" id="{22DAE4BB-2800-A14E-A6C3-02DE368C36A6}"/>
+              </a:ext>
+            </a:extLst>
+          </p:cNvPr>
+          <p:cNvSpPr txBox="1"/>
+          <p:nvPr/>
+        </p:nvSpPr>
+        <p:spPr>
+          <a:xfrm>
+            <a:off x="243840" y="2802325"/>
+            <a:ext cx="4291577" cy="1169551"/>
+          </a:xfrm>
+          <a:prstGeom prst="rect">
+            <a:avLst/>
+          </a:prstGeom>
+          <a:noFill/>
+        </p:spPr>
+        <p:txBody>
+          <a:bodyPr wrap="square" rtlCol="0">
+            <a:spAutoFit/>
+          </a:bodyPr>
+          <a:lstStyle/>
+          <a:p>
+            <a:r>
+              <a:rPr lang="en-US" dirty="0"/>
+              <a:t>n</a:t>
+            </a:r>
+            <a:r>
+              <a:rPr lang="en-US" baseline="-25000" dirty="0"/>
+              <a:t>1</a:t>
+            </a:r>
+            <a:r>
+              <a:rPr lang="en-US" dirty="0"/>
+              <a:t>, n</a:t>
+            </a:r>
+            <a:r>
+              <a:rPr lang="en-US" baseline="-25000" dirty="0"/>
+              <a:t>2</a:t>
+            </a:r>
+            <a:r>
+              <a:rPr lang="en-US" dirty="0"/>
+              <a:t> = sample sizes (i.e., number of observations) </a:t>
+            </a:r>
+          </a:p>
+          <a:p>
+            <a:endParaRPr lang="en-US" dirty="0"/>
+          </a:p>
+          <a:p>
+            <a:r>
+              <a:rPr lang="en-US" dirty="0"/>
+              <a:t>x¯</a:t>
+            </a:r>
+            <a:r>
+              <a:rPr lang="en-US" baseline="-25000" dirty="0"/>
+              <a:t>1</a:t>
+            </a:r>
+            <a:r>
+              <a:rPr lang="en-US" dirty="0"/>
+              <a:t> , x¯</a:t>
+            </a:r>
+            <a:r>
+              <a:rPr lang="en-US" baseline="-25000" dirty="0"/>
+              <a:t>2 </a:t>
+            </a:r>
+            <a:r>
+              <a:rPr lang="en-US" dirty="0"/>
+              <a:t>= mean values of samples</a:t>
+            </a:r>
+          </a:p>
+          <a:p>
+            <a:endParaRPr lang="en-US" dirty="0"/>
+          </a:p>
+          <a:p>
+            <a:r>
+              <a:rPr lang="en-US" dirty="0"/>
+              <a:t>s</a:t>
+            </a:r>
+            <a:r>
+              <a:rPr lang="en-US" baseline="-25000" dirty="0"/>
+              <a:t>1</a:t>
+            </a:r>
+            <a:r>
+              <a:rPr lang="en-US" dirty="0"/>
+              <a:t> , s</a:t>
+            </a:r>
+            <a:r>
+              <a:rPr lang="en-US" baseline="-25000" dirty="0"/>
+              <a:t>2</a:t>
+            </a:r>
+            <a:r>
+              <a:rPr lang="en-US" dirty="0"/>
+              <a:t> = standard deviations of samples</a:t>
+            </a:r>
+          </a:p>
+        </p:txBody>
+      </p:sp>
+      <p:sp>
+        <p:nvSpPr>
+          <p:cNvPr id="9" name="TextBox 8">
+            <a:extLst>
+              <a:ext uri="{FF2B5EF4-FFF2-40B4-BE49-F238E27FC236}">
+                <a16:creationId xmlns:a16="http://schemas.microsoft.com/office/drawing/2014/main" id="{D3D314F0-7B71-354C-970C-65F2B47262EB}"/>
+              </a:ext>
+            </a:extLst>
+          </p:cNvPr>
+          <p:cNvSpPr txBox="1"/>
+          <p:nvPr/>
+        </p:nvSpPr>
+        <p:spPr>
+          <a:xfrm>
+            <a:off x="158496" y="2399243"/>
+            <a:ext cx="1011936" cy="307777"/>
+          </a:xfrm>
+          <a:prstGeom prst="rect">
+            <a:avLst/>
+          </a:prstGeom>
+          <a:noFill/>
+        </p:spPr>
+        <p:txBody>
+          <a:bodyPr wrap="square" rtlCol="0">
+            <a:spAutoFit/>
+          </a:bodyPr>
+          <a:lstStyle/>
+          <a:p>
+            <a:r>
+              <a:rPr lang="en-US" dirty="0"/>
+              <a:t>Where:</a:t>
+            </a:r>
+          </a:p>
+        </p:txBody>
+      </p:sp>
+      <p:pic>
+        <p:nvPicPr>
+          <p:cNvPr id="11" name="Picture 10">
+            <a:extLst>
+              <a:ext uri="{FF2B5EF4-FFF2-40B4-BE49-F238E27FC236}">
+                <a16:creationId xmlns:a16="http://schemas.microsoft.com/office/drawing/2014/main" id="{0FC688BB-FA34-104C-A9D4-A1591AE65B4F}"/>
+              </a:ext>
+            </a:extLst>
+          </p:cNvPr>
+          <p:cNvPicPr>
+            <a:picLocks noChangeAspect="1"/>
+          </p:cNvPicPr>
+          <p:nvPr/>
+        </p:nvPicPr>
+        <p:blipFill>
+          <a:blip r:embed="rId2" cstate="email">
+            <a:extLst>
+              <a:ext uri="{28A0092B-C50C-407E-A947-70E740481C1C}">
+                <a14:useLocalDpi xmlns:a14="http://schemas.microsoft.com/office/drawing/2010/main"/>
+              </a:ext>
+            </a:extLst>
+          </a:blip>
+          <a:stretch>
+            <a:fillRect/>
+          </a:stretch>
+        </p:blipFill>
+        <p:spPr>
+          <a:xfrm>
+            <a:off x="917845" y="967298"/>
+            <a:ext cx="2400300" cy="1460500"/>
+          </a:xfrm>
+          <a:prstGeom prst="rect">
+            <a:avLst/>
+          </a:prstGeom>
+        </p:spPr>
+      </p:pic>
+      <p:pic>
+        <p:nvPicPr>
+          <p:cNvPr id="2" name="Picture 1">
+            <a:extLst>
+              <a:ext uri="{FF2B5EF4-FFF2-40B4-BE49-F238E27FC236}">
+                <a16:creationId xmlns:a16="http://schemas.microsoft.com/office/drawing/2014/main" id="{5106897E-A2FF-554B-A65C-9BCCFAACB20F}"/>
+              </a:ext>
+            </a:extLst>
+          </p:cNvPr>
+          <p:cNvPicPr>
+            <a:picLocks noChangeAspect="1"/>
+          </p:cNvPicPr>
+          <p:nvPr/>
+        </p:nvPicPr>
+        <p:blipFill>
+          <a:blip r:embed="rId3" cstate="email">
+            <a:extLst>
+              <a:ext uri="{28A0092B-C50C-407E-A947-70E740481C1C}">
+                <a14:useLocalDpi xmlns:a14="http://schemas.microsoft.com/office/drawing/2010/main"/>
+              </a:ext>
+            </a:extLst>
+          </a:blip>
+          <a:stretch>
+            <a:fillRect/>
+          </a:stretch>
+        </p:blipFill>
+        <p:spPr>
+          <a:xfrm>
+            <a:off x="664464" y="5111501"/>
+            <a:ext cx="4267200" cy="774700"/>
+          </a:xfrm>
+          <a:prstGeom prst="rect">
+            <a:avLst/>
+          </a:prstGeom>
+        </p:spPr>
+      </p:pic>
+      <p:sp>
+        <p:nvSpPr>
+          <p:cNvPr id="4" name="TextBox 3">
+            <a:extLst>
+              <a:ext uri="{FF2B5EF4-FFF2-40B4-BE49-F238E27FC236}">
+                <a16:creationId xmlns:a16="http://schemas.microsoft.com/office/drawing/2014/main" id="{E48E3256-AACD-3440-ABA5-1645D3E01D05}"/>
+              </a:ext>
+            </a:extLst>
+          </p:cNvPr>
+          <p:cNvSpPr txBox="1"/>
+          <p:nvPr/>
+        </p:nvSpPr>
+        <p:spPr>
+          <a:xfrm>
+            <a:off x="160529" y="4501060"/>
+            <a:ext cx="5606288" cy="307777"/>
+          </a:xfrm>
+          <a:prstGeom prst="rect">
+            <a:avLst/>
+          </a:prstGeom>
+          <a:noFill/>
+        </p:spPr>
+        <p:txBody>
+          <a:bodyPr wrap="square" rtlCol="0">
+            <a:spAutoFit/>
+          </a:bodyPr>
+          <a:lstStyle/>
+          <a:p>
+            <a:r>
+              <a:rPr lang="en-US" dirty="0"/>
+              <a:t>The degrees of freedom of Welch t-test is estimated as following:</a:t>
+            </a:r>
+          </a:p>
+        </p:txBody>
+      </p:sp>
+      <p:pic>
+        <p:nvPicPr>
+          <p:cNvPr id="12" name="Picture 11">
+            <a:extLst>
+              <a:ext uri="{FF2B5EF4-FFF2-40B4-BE49-F238E27FC236}">
+                <a16:creationId xmlns:a16="http://schemas.microsoft.com/office/drawing/2014/main" id="{9F6B35D5-712F-8E49-BDB9-51654615D5DA}"/>
+              </a:ext>
+            </a:extLst>
+          </p:cNvPr>
+          <p:cNvPicPr>
+            <a:picLocks noChangeAspect="1"/>
+          </p:cNvPicPr>
+          <p:nvPr/>
+        </p:nvPicPr>
+        <p:blipFill>
+          <a:blip r:embed="rId4" cstate="email">
+            <a:extLst>
+              <a:ext uri="{28A0092B-C50C-407E-A947-70E740481C1C}">
+                <a14:useLocalDpi xmlns:a14="http://schemas.microsoft.com/office/drawing/2010/main"/>
+              </a:ext>
+            </a:extLst>
+          </a:blip>
+          <a:stretch>
+            <a:fillRect/>
+          </a:stretch>
+        </p:blipFill>
+        <p:spPr>
+          <a:xfrm>
+            <a:off x="4286747" y="3746536"/>
+            <a:ext cx="1897513" cy="489932"/>
+          </a:xfrm>
+          <a:prstGeom prst="rect">
+            <a:avLst/>
+          </a:prstGeom>
+        </p:spPr>
+      </p:pic>
+      <p:pic>
+        <p:nvPicPr>
+          <p:cNvPr id="13" name="Picture 12">
+            <a:extLst>
+              <a:ext uri="{FF2B5EF4-FFF2-40B4-BE49-F238E27FC236}">
+                <a16:creationId xmlns:a16="http://schemas.microsoft.com/office/drawing/2014/main" id="{4AC8E85E-59BB-FB45-95F4-DC6ECBACAB23}"/>
+              </a:ext>
+            </a:extLst>
+          </p:cNvPr>
+          <p:cNvPicPr>
+            <a:picLocks noChangeAspect="1"/>
+          </p:cNvPicPr>
+          <p:nvPr/>
+        </p:nvPicPr>
+        <p:blipFill>
+          <a:blip r:embed="rId5" cstate="email">
+            <a:extLst>
+              <a:ext uri="{28A0092B-C50C-407E-A947-70E740481C1C}">
+                <a14:useLocalDpi xmlns:a14="http://schemas.microsoft.com/office/drawing/2010/main"/>
+              </a:ext>
+            </a:extLst>
+          </a:blip>
+          <a:stretch>
+            <a:fillRect/>
+          </a:stretch>
+        </p:blipFill>
+        <p:spPr>
+          <a:xfrm>
+            <a:off x="4314311" y="3164777"/>
+            <a:ext cx="1029852" cy="473582"/>
+          </a:xfrm>
+          <a:prstGeom prst="rect">
+            <a:avLst/>
+          </a:prstGeom>
+        </p:spPr>
+      </p:pic>
+    </p:spTree>
+    <p:extLst>
+      <p:ext uri="{BB962C8B-B14F-4D97-AF65-F5344CB8AC3E}">
+        <p14:creationId xmlns:p14="http://schemas.microsoft.com/office/powerpoint/2010/main" val="3953362428"/>
+      </p:ext>
+    </p:extLst>
+  </p:cSld>
+  <p:clrMapOvr>
+    <a:masterClrMapping/>
+  </p:clrMapOvr>
+</p:sld>
+</file>
+
+<file path=ppt/slides/slide6.xml><?xml version="1.0" encoding="utf-8"?>
+<p:sld xmlns:a="http://schemas.openxmlformats.org/drawingml/2006/main" xmlns:r="http://schemas.openxmlformats.org/officeDocument/2006/relationships" xmlns:p="http://schemas.openxmlformats.org/presentationml/2006/main">
+  <p:cSld>
+    <p:spTree>
+      <p:nvGrpSpPr>
+        <p:cNvPr id="1" name=""/>
+        <p:cNvGrpSpPr/>
+        <p:nvPr/>
+      </p:nvGrpSpPr>
+      <p:grpSpPr>
+        <a:xfrm>
+          <a:off x="0" y="0"/>
+          <a:ext cx="0" cy="0"/>
+          <a:chOff x="0" y="0"/>
+          <a:chExt cx="0" cy="0"/>
+        </a:xfrm>
+      </p:grpSpPr>
+      <p:sp>
+        <p:nvSpPr>
           <p:cNvPr id="3" name="Title 1"/>
           <p:cNvSpPr>
             <a:spLocks noGrp="1"/>
@@ -17724,7 +19086,7 @@
           <a:graphicData uri="http://schemas.openxmlformats.org/presentationml/2006/ole">
             <mc:AlternateContent xmlns:mc="http://schemas.openxmlformats.org/markup-compatibility/2006">
               <mc:Choice xmlns:v="urn:schemas-microsoft-com:vml" Requires="v">
-                <p:oleObj spid="_x0000_s2626" name="Equation" r:id="rId3" imgW="2438280" imgH="444240" progId="Equation.DSMT4">
+                <p:oleObj spid="_x0000_s2641" name="Equation" r:id="rId3" imgW="2438280" imgH="444240" progId="Equation.DSMT4">
                   <p:embed/>
                 </p:oleObj>
               </mc:Choice>
@@ -17852,7 +19214,7 @@
         <p:spPr>
           <a:xfrm>
             <a:off x="7245928" y="941391"/>
-            <a:ext cx="3685309" cy="615553"/>
+            <a:ext cx="4336472" cy="615553"/>
           </a:xfrm>
           <a:prstGeom prst="rect">
             <a:avLst/>
@@ -17867,13 +19229,49 @@
           <a:p>
             <a:r>
               <a:rPr lang="en-US" sz="2000" b="1" dirty="0"/>
-              <a:t>Estimating m from sample</a:t>
+              <a:t>Estimating </a:t>
+            </a:r>
+            <a:r>
+              <a:rPr lang="en-US" sz="2000" b="1" dirty="0">
+                <a:solidFill>
+                  <a:srgbClr val="FF0000"/>
+                </a:solidFill>
+              </a:rPr>
+              <a:t>"</a:t>
+            </a:r>
+            <a:r>
+              <a:rPr lang="el-GR" sz="2000" b="1" dirty="0">
+                <a:solidFill>
+                  <a:srgbClr val="FF0000"/>
+                </a:solidFill>
+              </a:rPr>
+              <a:t>μ</a:t>
+            </a:r>
+            <a:r>
+              <a:rPr lang="en-US" sz="2000" b="1" dirty="0">
+                <a:solidFill>
+                  <a:srgbClr val="FF0000"/>
+                </a:solidFill>
+              </a:rPr>
+              <a:t>"</a:t>
+            </a:r>
+            <a:r>
+              <a:rPr lang="en-US" sz="2000" b="1" dirty="0"/>
+              <a:t> from sample</a:t>
             </a:r>
           </a:p>
           <a:p>
             <a:r>
               <a:rPr lang="en-US" dirty="0"/>
-              <a:t>(use sample mean and sample deviation)</a:t>
+              <a:t>(use sample mean "M" and sample deviation S</a:t>
+            </a:r>
+            <a:r>
+              <a:rPr lang="en-US" baseline="-25000" dirty="0"/>
+              <a:t>M</a:t>
+            </a:r>
+            <a:r>
+              <a:rPr lang="en-US" dirty="0"/>
+              <a:t>)</a:t>
             </a:r>
           </a:p>
         </p:txBody>
@@ -17906,7 +19304,7 @@
           <a:graphicData uri="http://schemas.openxmlformats.org/presentationml/2006/ole">
             <mc:AlternateContent xmlns:mc="http://schemas.openxmlformats.org/markup-compatibility/2006">
               <mc:Choice xmlns:v="urn:schemas-microsoft-com:vml" Requires="v">
-                <p:oleObj spid="_x0000_s2627" name="Equation" r:id="rId5" imgW="660113" imgH="431613" progId="Equation.3">
+                <p:oleObj spid="_x0000_s2642" name="Equation" r:id="rId5" imgW="660113" imgH="431613" progId="Equation.3">
                   <p:embed/>
                 </p:oleObj>
               </mc:Choice>
@@ -17982,7 +19380,7 @@
           <a:graphicData uri="http://schemas.openxmlformats.org/presentationml/2006/ole">
             <mc:AlternateContent xmlns:mc="http://schemas.openxmlformats.org/markup-compatibility/2006">
               <mc:Choice xmlns:v="urn:schemas-microsoft-com:vml" Requires="v">
-                <p:oleObj spid="_x0000_s2628" name="Equation" r:id="rId7" imgW="787058" imgH="215806" progId="Equation.3">
+                <p:oleObj spid="_x0000_s2643" name="Equation" r:id="rId7" imgW="787058" imgH="215806" progId="Equation.3">
                   <p:embed/>
                 </p:oleObj>
               </mc:Choice>
@@ -18148,7 +19546,7 @@
 </p:sld>
 </file>
 
-<file path=ppt/slides/slide5.xml><?xml version="1.0" encoding="utf-8"?>
+<file path=ppt/slides/slide7.xml><?xml version="1.0" encoding="utf-8"?>
 <p:sld xmlns:a="http://schemas.openxmlformats.org/drawingml/2006/main" xmlns:r="http://schemas.openxmlformats.org/officeDocument/2006/relationships" xmlns:p="http://schemas.openxmlformats.org/presentationml/2006/main">
   <p:cSld>
     <p:spTree>
@@ -18368,7 +19766,7 @@
           <a:graphicData uri="http://schemas.openxmlformats.org/presentationml/2006/ole">
             <mc:AlternateContent xmlns:mc="http://schemas.openxmlformats.org/markup-compatibility/2006">
               <mc:Choice xmlns:v="urn:schemas-microsoft-com:vml" Requires="v">
-                <p:oleObj spid="_x0000_s3839" name="Equation" r:id="rId4" imgW="1054100" imgH="228600" progId="Equation.3">
+                <p:oleObj spid="_x0000_s3855" name="Equation" r:id="rId4" imgW="1054100" imgH="228600" progId="Equation.3">
                   <p:embed/>
                 </p:oleObj>
               </mc:Choice>
@@ -18479,7 +19877,7 @@
           <a:graphicData uri="http://schemas.openxmlformats.org/presentationml/2006/ole">
             <mc:AlternateContent xmlns:mc="http://schemas.openxmlformats.org/markup-compatibility/2006">
               <mc:Choice xmlns:v="urn:schemas-microsoft-com:vml" Requires="v">
-                <p:oleObj spid="_x0000_s3840" name="Equation" r:id="rId6" imgW="1701800" imgH="495300" progId="Equation.3">
+                <p:oleObj spid="_x0000_s3856" name="Equation" r:id="rId6" imgW="1701800" imgH="495300" progId="Equation.3">
                   <p:embed/>
                 </p:oleObj>
               </mc:Choice>
@@ -18555,7 +19953,7 @@
           <a:graphicData uri="http://schemas.openxmlformats.org/presentationml/2006/ole">
             <mc:AlternateContent xmlns:mc="http://schemas.openxmlformats.org/markup-compatibility/2006">
               <mc:Choice xmlns:v="urn:schemas-microsoft-com:vml" Requires="v">
-                <p:oleObj spid="_x0000_s3841" name="Equation" r:id="rId8" imgW="1282700" imgH="546100" progId="Equation.3">
+                <p:oleObj spid="_x0000_s3857" name="Equation" r:id="rId8" imgW="1282700" imgH="546100" progId="Equation.3">
                   <p:embed/>
                 </p:oleObj>
               </mc:Choice>
@@ -18666,7 +20064,7 @@
           <a:graphicData uri="http://schemas.openxmlformats.org/presentationml/2006/ole">
             <mc:AlternateContent xmlns:mc="http://schemas.openxmlformats.org/markup-compatibility/2006">
               <mc:Choice xmlns:v="urn:schemas-microsoft-com:vml" Requires="v">
-                <p:oleObj spid="_x0000_s3842" name="Equation" r:id="rId10" imgW="927100" imgH="431800" progId="Equation.3">
+                <p:oleObj spid="_x0000_s3858" name="Equation" r:id="rId10" imgW="927100" imgH="431800" progId="Equation.3">
                   <p:embed/>
                 </p:oleObj>
               </mc:Choice>
@@ -18910,1150 +20308,6 @@
 </p:sld>
 </file>
 
-<file path=ppt/slides/slide6.xml><?xml version="1.0" encoding="utf-8"?>
-<p:sld xmlns:a="http://schemas.openxmlformats.org/drawingml/2006/main" xmlns:r="http://schemas.openxmlformats.org/officeDocument/2006/relationships" xmlns:p="http://schemas.openxmlformats.org/presentationml/2006/main">
-  <p:cSld>
-    <p:spTree>
-      <p:nvGrpSpPr>
-        <p:cNvPr id="1" name=""/>
-        <p:cNvGrpSpPr/>
-        <p:nvPr/>
-      </p:nvGrpSpPr>
-      <p:grpSpPr>
-        <a:xfrm>
-          <a:off x="0" y="0"/>
-          <a:ext cx="0" cy="0"/>
-          <a:chOff x="0" y="0"/>
-          <a:chExt cx="0" cy="0"/>
-        </a:xfrm>
-      </p:grpSpPr>
-      <p:sp>
-        <p:nvSpPr>
-          <p:cNvPr id="5" name="TextBox 4">
-            <a:extLst>
-              <a:ext uri="{FF2B5EF4-FFF2-40B4-BE49-F238E27FC236}">
-                <a16:creationId xmlns:a16="http://schemas.microsoft.com/office/drawing/2014/main" id="{95839D38-840F-AB46-91D6-AE1BF857766F}"/>
-              </a:ext>
-            </a:extLst>
-          </p:cNvPr>
-          <p:cNvSpPr txBox="1"/>
-          <p:nvPr/>
-        </p:nvSpPr>
-        <p:spPr>
-          <a:xfrm>
-            <a:off x="59637" y="79516"/>
-            <a:ext cx="4830417" cy="523220"/>
-          </a:xfrm>
-          <a:prstGeom prst="rect">
-            <a:avLst/>
-          </a:prstGeom>
-          <a:noFill/>
-        </p:spPr>
-        <p:txBody>
-          <a:bodyPr wrap="square" rtlCol="0">
-            <a:spAutoFit/>
-          </a:bodyPr>
-          <a:lstStyle/>
-          <a:p>
-            <a:r>
-              <a:rPr lang="en-US" sz="2800" b="1" dirty="0"/>
-              <a:t>Independent t-test formula</a:t>
-            </a:r>
-          </a:p>
-        </p:txBody>
-      </p:sp>
-      <p:sp>
-        <p:nvSpPr>
-          <p:cNvPr id="6" name="TextBox 5">
-            <a:extLst>
-              <a:ext uri="{FF2B5EF4-FFF2-40B4-BE49-F238E27FC236}">
-                <a16:creationId xmlns:a16="http://schemas.microsoft.com/office/drawing/2014/main" id="{0678EC34-E769-A049-B0D4-14A84745DEFB}"/>
-              </a:ext>
-            </a:extLst>
-          </p:cNvPr>
-          <p:cNvSpPr txBox="1"/>
-          <p:nvPr/>
-        </p:nvSpPr>
-        <p:spPr>
-          <a:xfrm>
-            <a:off x="59637" y="777481"/>
-            <a:ext cx="5068956" cy="523220"/>
-          </a:xfrm>
-          <a:prstGeom prst="rect">
-            <a:avLst/>
-          </a:prstGeom>
-          <a:noFill/>
-        </p:spPr>
-        <p:txBody>
-          <a:bodyPr wrap="square" rtlCol="0">
-            <a:spAutoFit/>
-          </a:bodyPr>
-          <a:lstStyle/>
-          <a:p>
-            <a:r>
-              <a:rPr lang="en-US" sz="2800" b="1" dirty="0">
-                <a:solidFill>
-                  <a:srgbClr val="0070C0"/>
-                </a:solidFill>
-              </a:rPr>
-              <a:t>Student t-test formula</a:t>
-            </a:r>
-          </a:p>
-        </p:txBody>
-      </p:sp>
-      <p:sp>
-        <p:nvSpPr>
-          <p:cNvPr id="7" name="TextBox 6">
-            <a:extLst>
-              <a:ext uri="{FF2B5EF4-FFF2-40B4-BE49-F238E27FC236}">
-                <a16:creationId xmlns:a16="http://schemas.microsoft.com/office/drawing/2014/main" id="{44A88323-6919-B943-8EF7-07DDBC73846E}"/>
-              </a:ext>
-            </a:extLst>
-          </p:cNvPr>
-          <p:cNvSpPr txBox="1"/>
-          <p:nvPr/>
-        </p:nvSpPr>
-        <p:spPr>
-          <a:xfrm>
-            <a:off x="59637" y="1417745"/>
-            <a:ext cx="5665304" cy="738664"/>
-          </a:xfrm>
-          <a:prstGeom prst="rect">
-            <a:avLst/>
-          </a:prstGeom>
-          <a:noFill/>
-        </p:spPr>
-        <p:txBody>
-          <a:bodyPr wrap="square" rtlCol="0">
-            <a:spAutoFit/>
-          </a:bodyPr>
-          <a:lstStyle/>
-          <a:p>
-            <a:r>
-              <a:rPr lang="en-US" dirty="0"/>
-              <a:t>If the variance of the two groups are equivalent (</a:t>
-            </a:r>
-            <a:r>
-              <a:rPr lang="en-US" b="1" dirty="0">
-                <a:solidFill>
-                  <a:srgbClr val="FF0000"/>
-                </a:solidFill>
-              </a:rPr>
-              <a:t>homoscedasticity</a:t>
-            </a:r>
-            <a:r>
-              <a:rPr lang="en-US" dirty="0"/>
-              <a:t>), the t-test value, comparing the two samples (A and B), can be calculated as following:</a:t>
-            </a:r>
-          </a:p>
-        </p:txBody>
-      </p:sp>
-      <p:pic>
-        <p:nvPicPr>
-          <p:cNvPr id="8" name="Picture 7">
-            <a:extLst>
-              <a:ext uri="{FF2B5EF4-FFF2-40B4-BE49-F238E27FC236}">
-                <a16:creationId xmlns:a16="http://schemas.microsoft.com/office/drawing/2014/main" id="{1B3E1D2C-D1B0-CF4C-BC05-AA7BFCDFCFB3}"/>
-              </a:ext>
-            </a:extLst>
-          </p:cNvPr>
-          <p:cNvPicPr>
-            <a:picLocks noChangeAspect="1"/>
-          </p:cNvPicPr>
-          <p:nvPr/>
-        </p:nvPicPr>
-        <p:blipFill>
-          <a:blip r:embed="rId2" cstate="email">
-            <a:extLst>
-              <a:ext uri="{28A0092B-C50C-407E-A947-70E740481C1C}">
-                <a14:useLocalDpi xmlns:a14="http://schemas.microsoft.com/office/drawing/2010/main"/>
-              </a:ext>
-            </a:extLst>
-          </a:blip>
-          <a:stretch>
-            <a:fillRect/>
-          </a:stretch>
-        </p:blipFill>
-        <p:spPr>
-          <a:xfrm>
-            <a:off x="1573145" y="2290420"/>
-            <a:ext cx="1803400" cy="939800"/>
-          </a:xfrm>
-          <a:prstGeom prst="rect">
-            <a:avLst/>
-          </a:prstGeom>
-        </p:spPr>
-      </p:pic>
-      <p:sp>
-        <p:nvSpPr>
-          <p:cNvPr id="9" name="TextBox 8">
-            <a:extLst>
-              <a:ext uri="{FF2B5EF4-FFF2-40B4-BE49-F238E27FC236}">
-                <a16:creationId xmlns:a16="http://schemas.microsoft.com/office/drawing/2014/main" id="{8D88D210-1CC6-294A-ABBF-BD40990F5A04}"/>
-              </a:ext>
-            </a:extLst>
-          </p:cNvPr>
-          <p:cNvSpPr txBox="1"/>
-          <p:nvPr/>
-        </p:nvSpPr>
-        <p:spPr>
-          <a:xfrm>
-            <a:off x="258418" y="3498577"/>
-            <a:ext cx="6202017" cy="1169551"/>
-          </a:xfrm>
-          <a:prstGeom prst="rect">
-            <a:avLst/>
-          </a:prstGeom>
-          <a:noFill/>
-        </p:spPr>
-        <p:txBody>
-          <a:bodyPr wrap="square" rtlCol="0">
-            <a:spAutoFit/>
-          </a:bodyPr>
-          <a:lstStyle/>
-          <a:p>
-            <a:r>
-              <a:rPr lang="en-US" dirty="0"/>
-              <a:t>where,</a:t>
-            </a:r>
-          </a:p>
-          <a:p>
-            <a:pPr marL="285750" indent="-285750">
-              <a:buFont typeface="Arial" panose="020B0604020202020204" pitchFamily="34" charset="0"/>
-              <a:buChar char="•"/>
-            </a:pPr>
-            <a:r>
-              <a:rPr lang="en-US" dirty="0"/>
-              <a:t>m</a:t>
-            </a:r>
-            <a:r>
-              <a:rPr lang="en-US" baseline="-25000" dirty="0"/>
-              <a:t>A</a:t>
-            </a:r>
-            <a:r>
-              <a:rPr lang="en-US" dirty="0"/>
-              <a:t> and </a:t>
-            </a:r>
-            <a:r>
-              <a:rPr lang="en-US" dirty="0" err="1"/>
-              <a:t>m</a:t>
-            </a:r>
-            <a:r>
-              <a:rPr lang="en-US" baseline="-25000" dirty="0" err="1"/>
-              <a:t>B</a:t>
-            </a:r>
-            <a:r>
-              <a:rPr lang="en-US" dirty="0"/>
-              <a:t> represent the mean value of the group A and B, respectively.</a:t>
-            </a:r>
-          </a:p>
-          <a:p>
-            <a:pPr marL="285750" indent="-285750">
-              <a:buFont typeface="Arial" panose="020B0604020202020204" pitchFamily="34" charset="0"/>
-              <a:buChar char="•"/>
-            </a:pPr>
-            <a:r>
-              <a:rPr lang="en-US" dirty="0" err="1"/>
-              <a:t>n</a:t>
-            </a:r>
-            <a:r>
-              <a:rPr lang="en-US" baseline="-25000" dirty="0" err="1"/>
-              <a:t>A</a:t>
-            </a:r>
-            <a:r>
-              <a:rPr lang="en-US" dirty="0"/>
-              <a:t> and </a:t>
-            </a:r>
-            <a:r>
-              <a:rPr lang="en-US" dirty="0" err="1"/>
-              <a:t>n</a:t>
-            </a:r>
-            <a:r>
-              <a:rPr lang="en-US" baseline="-25000" dirty="0" err="1"/>
-              <a:t>B</a:t>
-            </a:r>
-            <a:r>
-              <a:rPr lang="en-US" dirty="0"/>
-              <a:t> represent the sizes of the group A and B, respectively.</a:t>
-            </a:r>
-          </a:p>
-          <a:p>
-            <a:pPr marL="285750" indent="-285750">
-              <a:buFont typeface="Arial" panose="020B0604020202020204" pitchFamily="34" charset="0"/>
-              <a:buChar char="•"/>
-            </a:pPr>
-            <a:r>
-              <a:rPr lang="en-US" dirty="0"/>
-              <a:t>S</a:t>
-            </a:r>
-            <a:r>
-              <a:rPr lang="en-US" baseline="30000" dirty="0"/>
-              <a:t>2</a:t>
-            </a:r>
-            <a:r>
-              <a:rPr lang="en-US" dirty="0"/>
-              <a:t> is an estimator of the pooled variance of the two groups. </a:t>
-            </a:r>
-            <a:br>
-              <a:rPr lang="en-US" dirty="0"/>
-            </a:br>
-            <a:r>
-              <a:rPr lang="en-US" dirty="0"/>
-              <a:t>It can be calculated as following :</a:t>
-            </a:r>
-          </a:p>
-        </p:txBody>
-      </p:sp>
-      <p:pic>
-        <p:nvPicPr>
-          <p:cNvPr id="10" name="Picture 9">
-            <a:extLst>
-              <a:ext uri="{FF2B5EF4-FFF2-40B4-BE49-F238E27FC236}">
-                <a16:creationId xmlns:a16="http://schemas.microsoft.com/office/drawing/2014/main" id="{4C19111F-E2D5-8E4A-8C2B-4ABC7790F639}"/>
-              </a:ext>
-            </a:extLst>
-          </p:cNvPr>
-          <p:cNvPicPr>
-            <a:picLocks noChangeAspect="1"/>
-          </p:cNvPicPr>
-          <p:nvPr/>
-        </p:nvPicPr>
-        <p:blipFill>
-          <a:blip r:embed="rId3" cstate="email">
-            <a:extLst>
-              <a:ext uri="{28A0092B-C50C-407E-A947-70E740481C1C}">
-                <a14:useLocalDpi xmlns:a14="http://schemas.microsoft.com/office/drawing/2010/main"/>
-              </a:ext>
-            </a:extLst>
-          </a:blip>
-          <a:stretch>
-            <a:fillRect/>
-          </a:stretch>
-        </p:blipFill>
-        <p:spPr>
-          <a:xfrm>
-            <a:off x="1614006" y="4830802"/>
-            <a:ext cx="3860800" cy="825500"/>
-          </a:xfrm>
-          <a:prstGeom prst="rect">
-            <a:avLst/>
-          </a:prstGeom>
-        </p:spPr>
-      </p:pic>
-      <p:sp>
-        <p:nvSpPr>
-          <p:cNvPr id="11" name="TextBox 10">
-            <a:extLst>
-              <a:ext uri="{FF2B5EF4-FFF2-40B4-BE49-F238E27FC236}">
-                <a16:creationId xmlns:a16="http://schemas.microsoft.com/office/drawing/2014/main" id="{C37B3D75-5E54-2642-B093-F70EA2BD9854}"/>
-              </a:ext>
-            </a:extLst>
-          </p:cNvPr>
-          <p:cNvSpPr txBox="1"/>
-          <p:nvPr/>
-        </p:nvSpPr>
-        <p:spPr>
-          <a:xfrm>
-            <a:off x="258418" y="5865795"/>
-            <a:ext cx="5466523" cy="307777"/>
-          </a:xfrm>
-          <a:prstGeom prst="rect">
-            <a:avLst/>
-          </a:prstGeom>
-          <a:noFill/>
-        </p:spPr>
-        <p:txBody>
-          <a:bodyPr wrap="square" rtlCol="0">
-            <a:spAutoFit/>
-          </a:bodyPr>
-          <a:lstStyle/>
-          <a:p>
-            <a:r>
-              <a:rPr lang="en-US" dirty="0"/>
-              <a:t>Degrees of freedom (df): df=nA+nB−2</a:t>
-            </a:r>
-          </a:p>
-        </p:txBody>
-      </p:sp>
-      <p:sp>
-        <p:nvSpPr>
-          <p:cNvPr id="12" name="TextBox 11">
-            <a:extLst>
-              <a:ext uri="{FF2B5EF4-FFF2-40B4-BE49-F238E27FC236}">
-                <a16:creationId xmlns:a16="http://schemas.microsoft.com/office/drawing/2014/main" id="{710416CA-81B5-7043-A0E5-9BDC3E96E0DA}"/>
-              </a:ext>
-            </a:extLst>
-          </p:cNvPr>
-          <p:cNvSpPr txBox="1"/>
-          <p:nvPr/>
-        </p:nvSpPr>
-        <p:spPr>
-          <a:xfrm>
-            <a:off x="7195931" y="221687"/>
-            <a:ext cx="4472608" cy="523220"/>
-          </a:xfrm>
-          <a:prstGeom prst="rect">
-            <a:avLst/>
-          </a:prstGeom>
-          <a:noFill/>
-        </p:spPr>
-        <p:txBody>
-          <a:bodyPr wrap="square" rtlCol="0">
-            <a:spAutoFit/>
-          </a:bodyPr>
-          <a:lstStyle/>
-          <a:p>
-            <a:r>
-              <a:rPr lang="en-US" sz="2800" b="1" dirty="0"/>
-              <a:t>Paired t-test formula</a:t>
-            </a:r>
-          </a:p>
-        </p:txBody>
-      </p:sp>
-      <p:pic>
-        <p:nvPicPr>
-          <p:cNvPr id="13" name="Picture 12">
-            <a:extLst>
-              <a:ext uri="{FF2B5EF4-FFF2-40B4-BE49-F238E27FC236}">
-                <a16:creationId xmlns:a16="http://schemas.microsoft.com/office/drawing/2014/main" id="{2CBE27C7-6F21-A64B-963A-DC7497965794}"/>
-              </a:ext>
-            </a:extLst>
-          </p:cNvPr>
-          <p:cNvPicPr>
-            <a:picLocks noChangeAspect="1"/>
-          </p:cNvPicPr>
-          <p:nvPr/>
-        </p:nvPicPr>
-        <p:blipFill>
-          <a:blip r:embed="rId4" cstate="email">
-            <a:extLst>
-              <a:ext uri="{28A0092B-C50C-407E-A947-70E740481C1C}">
-                <a14:useLocalDpi xmlns:a14="http://schemas.microsoft.com/office/drawing/2010/main"/>
-              </a:ext>
-            </a:extLst>
-          </a:blip>
-          <a:stretch>
-            <a:fillRect/>
-          </a:stretch>
-        </p:blipFill>
-        <p:spPr>
-          <a:xfrm>
-            <a:off x="8443291" y="1727445"/>
-            <a:ext cx="1143000" cy="698500"/>
-          </a:xfrm>
-          <a:prstGeom prst="rect">
-            <a:avLst/>
-          </a:prstGeom>
-        </p:spPr>
-      </p:pic>
-      <p:sp>
-        <p:nvSpPr>
-          <p:cNvPr id="14" name="TextBox 13">
-            <a:extLst>
-              <a:ext uri="{FF2B5EF4-FFF2-40B4-BE49-F238E27FC236}">
-                <a16:creationId xmlns:a16="http://schemas.microsoft.com/office/drawing/2014/main" id="{9B3D9FCD-309C-6240-B32B-8BF14D48E17D}"/>
-              </a:ext>
-            </a:extLst>
-          </p:cNvPr>
-          <p:cNvSpPr txBox="1"/>
-          <p:nvPr/>
-        </p:nvSpPr>
-        <p:spPr>
-          <a:xfrm>
-            <a:off x="7434471" y="2981739"/>
-            <a:ext cx="3717234" cy="1384995"/>
-          </a:xfrm>
-          <a:prstGeom prst="rect">
-            <a:avLst/>
-          </a:prstGeom>
-          <a:noFill/>
-        </p:spPr>
-        <p:txBody>
-          <a:bodyPr wrap="square" rtlCol="0">
-            <a:spAutoFit/>
-          </a:bodyPr>
-          <a:lstStyle/>
-          <a:p>
-            <a:r>
-              <a:rPr lang="en-US" dirty="0"/>
-              <a:t>where,</a:t>
-            </a:r>
-          </a:p>
-          <a:p>
-            <a:endParaRPr lang="en-US" dirty="0"/>
-          </a:p>
-          <a:p>
-            <a:pPr marL="285750" indent="-285750">
-              <a:buFont typeface="Arial" panose="020B0604020202020204" pitchFamily="34" charset="0"/>
-              <a:buChar char="•"/>
-            </a:pPr>
-            <a:r>
-              <a:rPr lang="en-US" dirty="0"/>
-              <a:t>m is the mean differences</a:t>
-            </a:r>
-          </a:p>
-          <a:p>
-            <a:pPr marL="285750" indent="-285750">
-              <a:buFont typeface="Arial" panose="020B0604020202020204" pitchFamily="34" charset="0"/>
-              <a:buChar char="•"/>
-            </a:pPr>
-            <a:r>
-              <a:rPr lang="en-US" dirty="0"/>
-              <a:t>n is the sample size (i.e., size of d)</a:t>
-            </a:r>
-          </a:p>
-          <a:p>
-            <a:pPr marL="285750" indent="-285750">
-              <a:buFont typeface="Arial" panose="020B0604020202020204" pitchFamily="34" charset="0"/>
-              <a:buChar char="•"/>
-            </a:pPr>
-            <a:r>
-              <a:rPr lang="en-US" dirty="0"/>
-              <a:t>s is the standard deviation of d</a:t>
-            </a:r>
-          </a:p>
-          <a:p>
-            <a:pPr marL="285750" indent="-285750">
-              <a:buFont typeface="Arial" panose="020B0604020202020204" pitchFamily="34" charset="0"/>
-              <a:buChar char="•"/>
-            </a:pPr>
-            <a:r>
-              <a:rPr lang="en-US" dirty="0"/>
-              <a:t>Degrees of freedom (df): df=n−1</a:t>
-            </a:r>
-          </a:p>
-        </p:txBody>
-      </p:sp>
-      <p:sp>
-        <p:nvSpPr>
-          <p:cNvPr id="15" name="TextBox 14">
-            <a:extLst>
-              <a:ext uri="{FF2B5EF4-FFF2-40B4-BE49-F238E27FC236}">
-                <a16:creationId xmlns:a16="http://schemas.microsoft.com/office/drawing/2014/main" id="{4156CE12-3B00-0E4E-826A-95BB91E56C61}"/>
-              </a:ext>
-            </a:extLst>
-          </p:cNvPr>
-          <p:cNvSpPr txBox="1"/>
-          <p:nvPr/>
-        </p:nvSpPr>
-        <p:spPr>
-          <a:xfrm>
-            <a:off x="7275443" y="777481"/>
-            <a:ext cx="4393096" cy="523220"/>
-          </a:xfrm>
-          <a:prstGeom prst="rect">
-            <a:avLst/>
-          </a:prstGeom>
-          <a:noFill/>
-        </p:spPr>
-        <p:txBody>
-          <a:bodyPr wrap="square" rtlCol="0">
-            <a:spAutoFit/>
-          </a:bodyPr>
-          <a:lstStyle/>
-          <a:p>
-            <a:r>
-              <a:rPr lang="en-US" dirty="0"/>
-              <a:t>The </a:t>
-            </a:r>
-            <a:r>
-              <a:rPr lang="en-US" b="1" dirty="0"/>
-              <a:t>paired t-test</a:t>
-            </a:r>
-            <a:r>
-              <a:rPr lang="en-US" dirty="0"/>
-              <a:t> is used to compare the means of two related groups of samples</a:t>
-            </a:r>
-          </a:p>
-        </p:txBody>
-      </p:sp>
-      <p:cxnSp>
-        <p:nvCxnSpPr>
-          <p:cNvPr id="17" name="Straight Connector 16">
-            <a:extLst>
-              <a:ext uri="{FF2B5EF4-FFF2-40B4-BE49-F238E27FC236}">
-                <a16:creationId xmlns:a16="http://schemas.microsoft.com/office/drawing/2014/main" id="{BB233B1F-891E-9141-BEE8-8AC67EB81D35}"/>
-              </a:ext>
-            </a:extLst>
-          </p:cNvPr>
-          <p:cNvCxnSpPr/>
-          <p:nvPr/>
-        </p:nvCxnSpPr>
-        <p:spPr>
-          <a:xfrm>
-            <a:off x="6599583" y="79516"/>
-            <a:ext cx="0" cy="6399143"/>
-          </a:xfrm>
-          <a:prstGeom prst="line">
-            <a:avLst/>
-          </a:prstGeom>
-          <a:ln w="63500"/>
-        </p:spPr>
-        <p:style>
-          <a:lnRef idx="1">
-            <a:schemeClr val="accent1"/>
-          </a:lnRef>
-          <a:fillRef idx="0">
-            <a:schemeClr val="accent1"/>
-          </a:fillRef>
-          <a:effectRef idx="0">
-            <a:schemeClr val="accent1"/>
-          </a:effectRef>
-          <a:fontRef idx="minor">
-            <a:schemeClr val="tx1"/>
-          </a:fontRef>
-        </p:style>
-      </p:cxnSp>
-    </p:spTree>
-    <p:extLst>
-      <p:ext uri="{BB962C8B-B14F-4D97-AF65-F5344CB8AC3E}">
-        <p14:creationId xmlns:p14="http://schemas.microsoft.com/office/powerpoint/2010/main" val="2869005700"/>
-      </p:ext>
-    </p:extLst>
-  </p:cSld>
-  <p:clrMapOvr>
-    <a:masterClrMapping/>
-  </p:clrMapOvr>
-</p:sld>
-</file>
-
-<file path=ppt/slides/slide7.xml><?xml version="1.0" encoding="utf-8"?>
-<p:sld xmlns:a="http://schemas.openxmlformats.org/drawingml/2006/main" xmlns:r="http://schemas.openxmlformats.org/officeDocument/2006/relationships" xmlns:p="http://schemas.openxmlformats.org/presentationml/2006/main">
-  <p:cSld>
-    <p:spTree>
-      <p:nvGrpSpPr>
-        <p:cNvPr id="1" name=""/>
-        <p:cNvGrpSpPr/>
-        <p:nvPr/>
-      </p:nvGrpSpPr>
-      <p:grpSpPr>
-        <a:xfrm>
-          <a:off x="0" y="0"/>
-          <a:ext cx="0" cy="0"/>
-          <a:chOff x="0" y="0"/>
-          <a:chExt cx="0" cy="0"/>
-        </a:xfrm>
-      </p:grpSpPr>
-      <p:sp>
-        <p:nvSpPr>
-          <p:cNvPr id="5" name="TextBox 4">
-            <a:extLst>
-              <a:ext uri="{FF2B5EF4-FFF2-40B4-BE49-F238E27FC236}">
-                <a16:creationId xmlns:a16="http://schemas.microsoft.com/office/drawing/2014/main" id="{A47F806F-C963-C443-8137-5603A474DE43}"/>
-              </a:ext>
-            </a:extLst>
-          </p:cNvPr>
-          <p:cNvSpPr txBox="1"/>
-          <p:nvPr/>
-        </p:nvSpPr>
-        <p:spPr>
-          <a:xfrm>
-            <a:off x="243840" y="173666"/>
-            <a:ext cx="5291328" cy="738664"/>
-          </a:xfrm>
-          <a:prstGeom prst="rect">
-            <a:avLst/>
-          </a:prstGeom>
-          <a:noFill/>
-        </p:spPr>
-        <p:txBody>
-          <a:bodyPr wrap="square" rtlCol="0">
-            <a:spAutoFit/>
-          </a:bodyPr>
-          <a:lstStyle/>
-          <a:p>
-            <a:r>
-              <a:rPr lang="en-US" dirty="0"/>
-              <a:t>When the two independent samples are assumed to be drawn </a:t>
-            </a:r>
-          </a:p>
-          <a:p>
-            <a:r>
-              <a:rPr lang="en-US" dirty="0"/>
-              <a:t>from populations with </a:t>
-            </a:r>
-            <a:r>
-              <a:rPr lang="en-US" b="1" dirty="0">
-                <a:solidFill>
-                  <a:srgbClr val="0070C0"/>
-                </a:solidFill>
-              </a:rPr>
-              <a:t>unequal variances</a:t>
-            </a:r>
-            <a:r>
-              <a:rPr lang="el-GR" dirty="0"/>
-              <a:t>, </a:t>
-            </a:r>
-            <a:endParaRPr lang="en-US" dirty="0"/>
-          </a:p>
-          <a:p>
-            <a:r>
-              <a:rPr lang="en-US" dirty="0"/>
-              <a:t>the test statistic t is computed as </a:t>
-            </a:r>
-            <a:r>
-              <a:rPr lang="en-US" b="1" dirty="0">
-                <a:solidFill>
-                  <a:srgbClr val="0070C0"/>
-                </a:solidFill>
-              </a:rPr>
-              <a:t>Welch’s t test</a:t>
-            </a:r>
-            <a:r>
-              <a:rPr lang="en-US" dirty="0"/>
-              <a:t>:</a:t>
-            </a:r>
-          </a:p>
-        </p:txBody>
-      </p:sp>
-      <p:sp>
-        <p:nvSpPr>
-          <p:cNvPr id="8" name="TextBox 7">
-            <a:extLst>
-              <a:ext uri="{FF2B5EF4-FFF2-40B4-BE49-F238E27FC236}">
-                <a16:creationId xmlns:a16="http://schemas.microsoft.com/office/drawing/2014/main" id="{22DAE4BB-2800-A14E-A6C3-02DE368C36A6}"/>
-              </a:ext>
-            </a:extLst>
-          </p:cNvPr>
-          <p:cNvSpPr txBox="1"/>
-          <p:nvPr/>
-        </p:nvSpPr>
-        <p:spPr>
-          <a:xfrm>
-            <a:off x="243840" y="2802325"/>
-            <a:ext cx="5606288" cy="1384995"/>
-          </a:xfrm>
-          <a:prstGeom prst="rect">
-            <a:avLst/>
-          </a:prstGeom>
-          <a:noFill/>
-        </p:spPr>
-        <p:txBody>
-          <a:bodyPr wrap="square" rtlCol="0">
-            <a:spAutoFit/>
-          </a:bodyPr>
-          <a:lstStyle/>
-          <a:p>
-            <a:r>
-              <a:rPr lang="en-US" dirty="0"/>
-              <a:t>x¯</a:t>
-            </a:r>
-            <a:r>
-              <a:rPr lang="en-US" baseline="-25000" dirty="0"/>
-              <a:t>1</a:t>
-            </a:r>
-            <a:r>
-              <a:rPr lang="en-US" dirty="0"/>
-              <a:t> = Mean of first sample</a:t>
-            </a:r>
-          </a:p>
-          <a:p>
-            <a:r>
-              <a:rPr lang="en-US" dirty="0"/>
-              <a:t>x¯</a:t>
-            </a:r>
-            <a:r>
-              <a:rPr lang="en-US" baseline="-25000" dirty="0"/>
-              <a:t>2</a:t>
-            </a:r>
-            <a:r>
-              <a:rPr lang="en-US" dirty="0"/>
-              <a:t> = Mean of second sample</a:t>
-            </a:r>
-          </a:p>
-          <a:p>
-            <a:r>
-              <a:rPr lang="en-US" dirty="0"/>
-              <a:t>n</a:t>
-            </a:r>
-            <a:r>
-              <a:rPr lang="en-US" baseline="-25000" dirty="0"/>
-              <a:t>1</a:t>
-            </a:r>
-            <a:r>
-              <a:rPr lang="en-US" dirty="0"/>
-              <a:t> = Sample size (i.e., number of observations) of first sample</a:t>
-            </a:r>
-          </a:p>
-          <a:p>
-            <a:r>
-              <a:rPr lang="en-US" dirty="0"/>
-              <a:t>n</a:t>
-            </a:r>
-            <a:r>
-              <a:rPr lang="en-US" baseline="-25000" dirty="0"/>
-              <a:t>2</a:t>
-            </a:r>
-            <a:r>
-              <a:rPr lang="en-US" dirty="0"/>
-              <a:t> = Sample size (i.e., number of observations) of second sample</a:t>
-            </a:r>
-          </a:p>
-          <a:p>
-            <a:r>
-              <a:rPr lang="en-US" dirty="0"/>
-              <a:t>s</a:t>
-            </a:r>
-            <a:r>
-              <a:rPr lang="en-US" baseline="-25000" dirty="0"/>
-              <a:t>1</a:t>
-            </a:r>
-            <a:r>
-              <a:rPr lang="en-US" dirty="0"/>
-              <a:t> = Standard deviation of first sample</a:t>
-            </a:r>
-          </a:p>
-          <a:p>
-            <a:r>
-              <a:rPr lang="en-US" dirty="0"/>
-              <a:t>s</a:t>
-            </a:r>
-            <a:r>
-              <a:rPr lang="en-US" baseline="-25000" dirty="0"/>
-              <a:t>2</a:t>
-            </a:r>
-            <a:r>
-              <a:rPr lang="en-US" dirty="0"/>
-              <a:t> = Standard deviation of second sample</a:t>
-            </a:r>
-          </a:p>
-        </p:txBody>
-      </p:sp>
-      <p:sp>
-        <p:nvSpPr>
-          <p:cNvPr id="9" name="TextBox 8">
-            <a:extLst>
-              <a:ext uri="{FF2B5EF4-FFF2-40B4-BE49-F238E27FC236}">
-                <a16:creationId xmlns:a16="http://schemas.microsoft.com/office/drawing/2014/main" id="{D3D314F0-7B71-354C-970C-65F2B47262EB}"/>
-              </a:ext>
-            </a:extLst>
-          </p:cNvPr>
-          <p:cNvSpPr txBox="1"/>
-          <p:nvPr/>
-        </p:nvSpPr>
-        <p:spPr>
-          <a:xfrm>
-            <a:off x="158496" y="2399243"/>
-            <a:ext cx="1011936" cy="307777"/>
-          </a:xfrm>
-          <a:prstGeom prst="rect">
-            <a:avLst/>
-          </a:prstGeom>
-          <a:noFill/>
-        </p:spPr>
-        <p:txBody>
-          <a:bodyPr wrap="square" rtlCol="0">
-            <a:spAutoFit/>
-          </a:bodyPr>
-          <a:lstStyle/>
-          <a:p>
-            <a:r>
-              <a:rPr lang="en-US" dirty="0"/>
-              <a:t>Where:</a:t>
-            </a:r>
-          </a:p>
-        </p:txBody>
-      </p:sp>
-      <p:sp>
-        <p:nvSpPr>
-          <p:cNvPr id="10" name="TextBox 9">
-            <a:extLst>
-              <a:ext uri="{FF2B5EF4-FFF2-40B4-BE49-F238E27FC236}">
-                <a16:creationId xmlns:a16="http://schemas.microsoft.com/office/drawing/2014/main" id="{2132E263-18B8-1547-A9D9-02886A939AE9}"/>
-              </a:ext>
-            </a:extLst>
-          </p:cNvPr>
-          <p:cNvSpPr txBox="1"/>
-          <p:nvPr/>
-        </p:nvSpPr>
-        <p:spPr>
-          <a:xfrm>
-            <a:off x="7129405" y="1196691"/>
-            <a:ext cx="4401312" cy="3200876"/>
-          </a:xfrm>
-          <a:prstGeom prst="rect">
-            <a:avLst/>
-          </a:prstGeom>
-          <a:noFill/>
-        </p:spPr>
-        <p:txBody>
-          <a:bodyPr wrap="square" rtlCol="0">
-            <a:spAutoFit/>
-          </a:bodyPr>
-          <a:lstStyle/>
-          <a:p>
-            <a:r>
-              <a:rPr lang="en-US" sz="2000" b="1" dirty="0"/>
-              <a:t>Simple estimate:</a:t>
-            </a:r>
-          </a:p>
-          <a:p>
-            <a:endParaRPr lang="en-US" dirty="0"/>
-          </a:p>
-          <a:p>
-            <a:endParaRPr lang="en-US" dirty="0"/>
-          </a:p>
-          <a:p>
-            <a:r>
-              <a:rPr lang="en-US" dirty="0"/>
-              <a:t>Suppose that standard deviations are about the same</a:t>
-            </a:r>
-          </a:p>
-          <a:p>
-            <a:r>
-              <a:rPr lang="en-US" dirty="0"/>
-              <a:t>(s</a:t>
-            </a:r>
-            <a:r>
-              <a:rPr lang="en-US" baseline="-25000" dirty="0"/>
-              <a:t>1</a:t>
-            </a:r>
-            <a:r>
-              <a:rPr lang="en-US" dirty="0"/>
-              <a:t> = s</a:t>
-            </a:r>
-            <a:r>
-              <a:rPr lang="en-US" baseline="-25000" dirty="0"/>
-              <a:t>2</a:t>
-            </a:r>
-            <a:r>
-              <a:rPr lang="en-US" dirty="0"/>
-              <a:t> = s)</a:t>
-            </a:r>
-          </a:p>
-          <a:p>
-            <a:endParaRPr lang="en-US" dirty="0"/>
-          </a:p>
-          <a:p>
-            <a:r>
-              <a:rPr lang="en-US" dirty="0"/>
-              <a:t>and numbers of observations are equal and large</a:t>
-            </a:r>
-          </a:p>
-          <a:p>
-            <a:r>
-              <a:rPr lang="en-US" dirty="0"/>
-              <a:t>(n</a:t>
-            </a:r>
-            <a:r>
-              <a:rPr lang="en-US" baseline="-25000" dirty="0"/>
-              <a:t>1</a:t>
-            </a:r>
-            <a:r>
-              <a:rPr lang="en-US" dirty="0"/>
-              <a:t> = n</a:t>
-            </a:r>
-            <a:r>
-              <a:rPr lang="en-US" baseline="-25000" dirty="0"/>
-              <a:t>2</a:t>
-            </a:r>
-            <a:r>
-              <a:rPr lang="en-US" dirty="0"/>
-              <a:t> = n)</a:t>
-            </a:r>
-          </a:p>
-          <a:p>
-            <a:endParaRPr lang="en-US" dirty="0"/>
-          </a:p>
-          <a:p>
-            <a:r>
-              <a:rPr lang="en-US" dirty="0"/>
-              <a:t>Then t-statistics simplifies to:</a:t>
-            </a:r>
-          </a:p>
-          <a:p>
-            <a:endParaRPr lang="en-US" dirty="0"/>
-          </a:p>
-          <a:p>
-            <a:r>
-              <a:rPr lang="en-US" dirty="0"/>
-              <a:t>      t = (x¯</a:t>
-            </a:r>
-            <a:r>
-              <a:rPr lang="en-US" baseline="-25000" dirty="0"/>
-              <a:t>1</a:t>
-            </a:r>
-            <a:r>
-              <a:rPr lang="en-US" dirty="0"/>
-              <a:t> - x¯</a:t>
-            </a:r>
-            <a:r>
-              <a:rPr lang="en-US" baseline="-25000" dirty="0"/>
-              <a:t>2</a:t>
-            </a:r>
-            <a:r>
-              <a:rPr lang="en-US" dirty="0"/>
-              <a:t>) / ( s*√(2/n) )</a:t>
-            </a:r>
-          </a:p>
-          <a:p>
-            <a:endParaRPr lang="en-US" dirty="0"/>
-          </a:p>
-          <a:p>
-            <a:r>
-              <a:rPr lang="en-US" dirty="0"/>
-              <a:t>so  t  grows as √(n)</a:t>
-            </a:r>
-          </a:p>
-        </p:txBody>
-      </p:sp>
-      <p:pic>
-        <p:nvPicPr>
-          <p:cNvPr id="11" name="Picture 10">
-            <a:extLst>
-              <a:ext uri="{FF2B5EF4-FFF2-40B4-BE49-F238E27FC236}">
-                <a16:creationId xmlns:a16="http://schemas.microsoft.com/office/drawing/2014/main" id="{0FC688BB-FA34-104C-A9D4-A1591AE65B4F}"/>
-              </a:ext>
-            </a:extLst>
-          </p:cNvPr>
-          <p:cNvPicPr>
-            <a:picLocks noChangeAspect="1"/>
-          </p:cNvPicPr>
-          <p:nvPr/>
-        </p:nvPicPr>
-        <p:blipFill>
-          <a:blip r:embed="rId2" cstate="email">
-            <a:extLst>
-              <a:ext uri="{28A0092B-C50C-407E-A947-70E740481C1C}">
-                <a14:useLocalDpi xmlns:a14="http://schemas.microsoft.com/office/drawing/2010/main"/>
-              </a:ext>
-            </a:extLst>
-          </a:blip>
-          <a:stretch>
-            <a:fillRect/>
-          </a:stretch>
-        </p:blipFill>
-        <p:spPr>
-          <a:xfrm>
-            <a:off x="917845" y="967298"/>
-            <a:ext cx="2400300" cy="1460500"/>
-          </a:xfrm>
-          <a:prstGeom prst="rect">
-            <a:avLst/>
-          </a:prstGeom>
-        </p:spPr>
-      </p:pic>
-      <p:cxnSp>
-        <p:nvCxnSpPr>
-          <p:cNvPr id="3" name="Straight Connector 2">
-            <a:extLst>
-              <a:ext uri="{FF2B5EF4-FFF2-40B4-BE49-F238E27FC236}">
-                <a16:creationId xmlns:a16="http://schemas.microsoft.com/office/drawing/2014/main" id="{04AACF8B-CD37-7B41-B7C1-CCFE29570096}"/>
-              </a:ext>
-            </a:extLst>
-          </p:cNvPr>
-          <p:cNvCxnSpPr/>
-          <p:nvPr/>
-        </p:nvCxnSpPr>
-        <p:spPr>
-          <a:xfrm>
-            <a:off x="6656832" y="256032"/>
-            <a:ext cx="0" cy="6291072"/>
-          </a:xfrm>
-          <a:prstGeom prst="line">
-            <a:avLst/>
-          </a:prstGeom>
-          <a:ln w="63500"/>
-        </p:spPr>
-        <p:style>
-          <a:lnRef idx="1">
-            <a:schemeClr val="accent1"/>
-          </a:lnRef>
-          <a:fillRef idx="0">
-            <a:schemeClr val="accent1"/>
-          </a:fillRef>
-          <a:effectRef idx="0">
-            <a:schemeClr val="accent1"/>
-          </a:effectRef>
-          <a:fontRef idx="minor">
-            <a:schemeClr val="tx1"/>
-          </a:fontRef>
-        </p:style>
-      </p:cxnSp>
-      <p:pic>
-        <p:nvPicPr>
-          <p:cNvPr id="2" name="Picture 1">
-            <a:extLst>
-              <a:ext uri="{FF2B5EF4-FFF2-40B4-BE49-F238E27FC236}">
-                <a16:creationId xmlns:a16="http://schemas.microsoft.com/office/drawing/2014/main" id="{5106897E-A2FF-554B-A65C-9BCCFAACB20F}"/>
-              </a:ext>
-            </a:extLst>
-          </p:cNvPr>
-          <p:cNvPicPr>
-            <a:picLocks noChangeAspect="1"/>
-          </p:cNvPicPr>
-          <p:nvPr/>
-        </p:nvPicPr>
-        <p:blipFill>
-          <a:blip r:embed="rId3" cstate="email">
-            <a:extLst>
-              <a:ext uri="{28A0092B-C50C-407E-A947-70E740481C1C}">
-                <a14:useLocalDpi xmlns:a14="http://schemas.microsoft.com/office/drawing/2010/main"/>
-              </a:ext>
-            </a:extLst>
-          </a:blip>
-          <a:stretch>
-            <a:fillRect/>
-          </a:stretch>
-        </p:blipFill>
-        <p:spPr>
-          <a:xfrm>
-            <a:off x="664464" y="5282189"/>
-            <a:ext cx="4267200" cy="774700"/>
-          </a:xfrm>
-          <a:prstGeom prst="rect">
-            <a:avLst/>
-          </a:prstGeom>
-        </p:spPr>
-      </p:pic>
-      <p:sp>
-        <p:nvSpPr>
-          <p:cNvPr id="4" name="TextBox 3">
-            <a:extLst>
-              <a:ext uri="{FF2B5EF4-FFF2-40B4-BE49-F238E27FC236}">
-                <a16:creationId xmlns:a16="http://schemas.microsoft.com/office/drawing/2014/main" id="{E48E3256-AACD-3440-ABA5-1645D3E01D05}"/>
-              </a:ext>
-            </a:extLst>
-          </p:cNvPr>
-          <p:cNvSpPr txBox="1"/>
-          <p:nvPr/>
-        </p:nvSpPr>
-        <p:spPr>
-          <a:xfrm>
-            <a:off x="160529" y="4671748"/>
-            <a:ext cx="5606288" cy="307777"/>
-          </a:xfrm>
-          <a:prstGeom prst="rect">
-            <a:avLst/>
-          </a:prstGeom>
-          <a:noFill/>
-        </p:spPr>
-        <p:txBody>
-          <a:bodyPr wrap="square" rtlCol="0">
-            <a:spAutoFit/>
-          </a:bodyPr>
-          <a:lstStyle/>
-          <a:p>
-            <a:r>
-              <a:rPr lang="en-US" dirty="0"/>
-              <a:t>The degrees of freedom of Welch t-test is estimated as following:</a:t>
-            </a:r>
-          </a:p>
-        </p:txBody>
-      </p:sp>
-    </p:spTree>
-    <p:extLst>
-      <p:ext uri="{BB962C8B-B14F-4D97-AF65-F5344CB8AC3E}">
-        <p14:creationId xmlns:p14="http://schemas.microsoft.com/office/powerpoint/2010/main" val="3953362428"/>
-      </p:ext>
-    </p:extLst>
-  </p:cSld>
-  <p:clrMapOvr>
-    <a:masterClrMapping/>
-  </p:clrMapOvr>
-</p:sld>
-</file>
-
 <file path=ppt/slides/slide8.xml><?xml version="1.0" encoding="utf-8"?>
 <p:sld xmlns:a="http://schemas.openxmlformats.org/drawingml/2006/main" xmlns:r="http://schemas.openxmlformats.org/officeDocument/2006/relationships" xmlns:p="http://schemas.openxmlformats.org/presentationml/2006/main">
   <p:cSld>
@@ -20337,7 +20591,7 @@
           <a:graphicData uri="http://schemas.openxmlformats.org/presentationml/2006/ole">
             <mc:AlternateContent xmlns:mc="http://schemas.openxmlformats.org/markup-compatibility/2006">
               <mc:Choice xmlns:v="urn:schemas-microsoft-com:vml" Requires="v">
-                <p:oleObj spid="_x0000_s16484" name="Equation" r:id="rId4" imgW="17373600" imgH="10058400" progId="Equation.3">
+                <p:oleObj spid="_x0000_s16508" name="Equation" r:id="rId4" imgW="17373600" imgH="10058400" progId="Equation.3">
                   <p:embed/>
                 </p:oleObj>
               </mc:Choice>
@@ -20468,7 +20722,7 @@
           <a:graphicData uri="http://schemas.openxmlformats.org/presentationml/2006/ole">
             <mc:AlternateContent xmlns:mc="http://schemas.openxmlformats.org/markup-compatibility/2006">
               <mc:Choice xmlns:v="urn:schemas-microsoft-com:vml" Requires="v">
-                <p:oleObj spid="_x0000_s16485" name="Equation" r:id="rId6" imgW="18592800" imgH="10363200" progId="Equation.3">
+                <p:oleObj spid="_x0000_s16509" name="Equation" r:id="rId6" imgW="18592800" imgH="10363200" progId="Equation.3">
                   <p:embed/>
                 </p:oleObj>
               </mc:Choice>
@@ -20544,7 +20798,7 @@
           <a:graphicData uri="http://schemas.openxmlformats.org/presentationml/2006/ole">
             <mc:AlternateContent xmlns:mc="http://schemas.openxmlformats.org/markup-compatibility/2006">
               <mc:Choice xmlns:v="urn:schemas-microsoft-com:vml" Requires="v">
-                <p:oleObj spid="_x0000_s16486" name="Equation" r:id="rId8" imgW="36271200" imgH="21945600" progId="Equation.3">
+                <p:oleObj spid="_x0000_s16510" name="Equation" r:id="rId8" imgW="36271200" imgH="21945600" progId="Equation.3">
                   <p:embed/>
                 </p:oleObj>
               </mc:Choice>
@@ -20620,7 +20874,7 @@
           <a:graphicData uri="http://schemas.openxmlformats.org/presentationml/2006/ole">
             <mc:AlternateContent xmlns:mc="http://schemas.openxmlformats.org/markup-compatibility/2006">
               <mc:Choice xmlns:v="urn:schemas-microsoft-com:vml" Requires="v">
-                <p:oleObj spid="_x0000_s16487" name="Equation" r:id="rId10" imgW="38404800" imgH="8839200" progId="Equation.3">
+                <p:oleObj spid="_x0000_s16511" name="Equation" r:id="rId10" imgW="38404800" imgH="8839200" progId="Equation.3">
                   <p:embed/>
                 </p:oleObj>
               </mc:Choice>
@@ -20696,7 +20950,7 @@
           <a:graphicData uri="http://schemas.openxmlformats.org/presentationml/2006/ole">
             <mc:AlternateContent xmlns:mc="http://schemas.openxmlformats.org/markup-compatibility/2006">
               <mc:Choice xmlns:v="urn:schemas-microsoft-com:vml" Requires="v">
-                <p:oleObj spid="_x0000_s16488" name="Equation" r:id="rId12" imgW="19812000" imgH="11277600" progId="Equation.3">
+                <p:oleObj spid="_x0000_s16512" name="Equation" r:id="rId12" imgW="19812000" imgH="11277600" progId="Equation.3">
                   <p:embed/>
                 </p:oleObj>
               </mc:Choice>
@@ -20772,7 +21026,7 @@
           <a:graphicData uri="http://schemas.openxmlformats.org/presentationml/2006/ole">
             <mc:AlternateContent xmlns:mc="http://schemas.openxmlformats.org/markup-compatibility/2006">
               <mc:Choice xmlns:v="urn:schemas-microsoft-com:vml" Requires="v">
-                <p:oleObj spid="_x0000_s16489" name="Equation" r:id="rId14" imgW="42976800" imgH="5791200" progId="Equation.3">
+                <p:oleObj spid="_x0000_s16513" name="Equation" r:id="rId14" imgW="42976800" imgH="5791200" progId="Equation.3">
                   <p:embed/>
                 </p:oleObj>
               </mc:Choice>

--- a/statistics_07_t_distribution.pptx
+++ b/statistics_07_t_distribution.pptx
@@ -18766,6 +18766,367 @@
           </a:prstGeom>
         </p:spPr>
       </p:pic>
+      <p:cxnSp>
+        <p:nvCxnSpPr>
+          <p:cNvPr id="10" name="Straight Connector 9">
+            <a:extLst>
+              <a:ext uri="{FF2B5EF4-FFF2-40B4-BE49-F238E27FC236}">
+                <a16:creationId xmlns:a16="http://schemas.microsoft.com/office/drawing/2014/main" id="{E96D4F79-F593-184E-A120-0B962658494B}"/>
+              </a:ext>
+            </a:extLst>
+          </p:cNvPr>
+          <p:cNvCxnSpPr/>
+          <p:nvPr/>
+        </p:nvCxnSpPr>
+        <p:spPr>
+          <a:xfrm>
+            <a:off x="6599583" y="79516"/>
+            <a:ext cx="0" cy="6399143"/>
+          </a:xfrm>
+          <a:prstGeom prst="line">
+            <a:avLst/>
+          </a:prstGeom>
+          <a:ln w="63500"/>
+        </p:spPr>
+        <p:style>
+          <a:lnRef idx="1">
+            <a:schemeClr val="accent1"/>
+          </a:lnRef>
+          <a:fillRef idx="0">
+            <a:schemeClr val="accent1"/>
+          </a:fillRef>
+          <a:effectRef idx="0">
+            <a:schemeClr val="accent1"/>
+          </a:effectRef>
+          <a:fontRef idx="minor">
+            <a:schemeClr val="tx1"/>
+          </a:fontRef>
+        </p:style>
+      </p:cxnSp>
+      <p:sp>
+        <p:nvSpPr>
+          <p:cNvPr id="14" name="TextBox 13">
+            <a:extLst>
+              <a:ext uri="{FF2B5EF4-FFF2-40B4-BE49-F238E27FC236}">
+                <a16:creationId xmlns:a16="http://schemas.microsoft.com/office/drawing/2014/main" id="{1781D600-015B-DB46-89AB-1CB41A09C125}"/>
+              </a:ext>
+            </a:extLst>
+          </p:cNvPr>
+          <p:cNvSpPr txBox="1"/>
+          <p:nvPr/>
+        </p:nvSpPr>
+        <p:spPr>
+          <a:xfrm>
+            <a:off x="7115359" y="1156170"/>
+            <a:ext cx="4625535" cy="3600986"/>
+          </a:xfrm>
+          <a:prstGeom prst="rect">
+            <a:avLst/>
+          </a:prstGeom>
+          <a:noFill/>
+        </p:spPr>
+        <p:txBody>
+          <a:bodyPr wrap="square" rtlCol="0">
+            <a:spAutoFit/>
+          </a:bodyPr>
+          <a:lstStyle/>
+          <a:p>
+            <a:r>
+              <a:rPr lang="en-US" sz="1800" b="1" dirty="0">
+                <a:solidFill>
+                  <a:srgbClr val="0070C0"/>
+                </a:solidFill>
+              </a:rPr>
+              <a:t>Simple example.</a:t>
+            </a:r>
+          </a:p>
+          <a:p>
+            <a:endParaRPr lang="en-US" dirty="0"/>
+          </a:p>
+          <a:p>
+            <a:r>
+              <a:rPr lang="en-US" dirty="0">
+                <a:solidFill>
+                  <a:schemeClr val="tx1"/>
+                </a:solidFill>
+              </a:rPr>
+              <a:t>Suppose x</a:t>
+            </a:r>
+            <a:r>
+              <a:rPr lang="en-US" baseline="-25000" dirty="0">
+                <a:solidFill>
+                  <a:schemeClr val="tx1"/>
+                </a:solidFill>
+              </a:rPr>
+              <a:t>1</a:t>
+            </a:r>
+            <a:r>
+              <a:rPr lang="en-US" dirty="0">
+                <a:solidFill>
+                  <a:schemeClr val="tx1"/>
+                </a:solidFill>
+              </a:rPr>
+              <a:t> and x</a:t>
+            </a:r>
+            <a:r>
+              <a:rPr lang="en-US" baseline="-25000" dirty="0">
+                <a:solidFill>
+                  <a:schemeClr val="tx1"/>
+                </a:solidFill>
+              </a:rPr>
+              <a:t>2</a:t>
+            </a:r>
+            <a:r>
+              <a:rPr lang="en-US" dirty="0">
+                <a:solidFill>
+                  <a:schemeClr val="tx1"/>
+                </a:solidFill>
+              </a:rPr>
+              <a:t> are drawn from normal distributions </a:t>
+            </a:r>
+          </a:p>
+          <a:p>
+            <a:r>
+              <a:rPr lang="en-US" dirty="0">
+                <a:solidFill>
+                  <a:schemeClr val="tx1"/>
+                </a:solidFill>
+              </a:rPr>
+              <a:t>with means 0 and 3, and </a:t>
+            </a:r>
+            <a:r>
+              <a:rPr lang="el-GR" dirty="0">
+                <a:solidFill>
+                  <a:schemeClr val="tx1"/>
+                </a:solidFill>
+              </a:rPr>
+              <a:t>σ</a:t>
+            </a:r>
+            <a:r>
+              <a:rPr lang="en-US" dirty="0">
+                <a:solidFill>
+                  <a:schemeClr val="tx1"/>
+                </a:solidFill>
+              </a:rPr>
+              <a:t> = 1. </a:t>
+            </a:r>
+          </a:p>
+          <a:p>
+            <a:r>
+              <a:rPr lang="en-US" dirty="0">
+                <a:solidFill>
+                  <a:schemeClr val="tx1"/>
+                </a:solidFill>
+              </a:rPr>
+              <a:t>Suppose that n</a:t>
+            </a:r>
+            <a:r>
+              <a:rPr lang="en-US" baseline="-25000" dirty="0">
+                <a:solidFill>
+                  <a:schemeClr val="tx1"/>
+                </a:solidFill>
+              </a:rPr>
+              <a:t>1</a:t>
+            </a:r>
+            <a:r>
+              <a:rPr lang="en-US" dirty="0">
+                <a:solidFill>
+                  <a:schemeClr val="tx1"/>
+                </a:solidFill>
+              </a:rPr>
+              <a:t> = n</a:t>
+            </a:r>
+            <a:r>
+              <a:rPr lang="en-US" baseline="-25000" dirty="0">
+                <a:solidFill>
+                  <a:schemeClr val="tx1"/>
+                </a:solidFill>
+              </a:rPr>
+              <a:t>2</a:t>
+            </a:r>
+            <a:r>
+              <a:rPr lang="en-US" dirty="0">
+                <a:solidFill>
+                  <a:schemeClr val="tx1"/>
+                </a:solidFill>
+              </a:rPr>
+              <a:t> = N  (equal and large). </a:t>
+            </a:r>
+          </a:p>
+          <a:p>
+            <a:r>
+              <a:rPr lang="en-US" dirty="0">
+                <a:solidFill>
+                  <a:schemeClr val="tx1"/>
+                </a:solidFill>
+              </a:rPr>
+              <a:t>Then s</a:t>
+            </a:r>
+            <a:r>
+              <a:rPr lang="en-US" baseline="-25000" dirty="0">
+                <a:solidFill>
+                  <a:schemeClr val="tx1"/>
+                </a:solidFill>
+              </a:rPr>
+              <a:t>1</a:t>
+            </a:r>
+            <a:r>
+              <a:rPr lang="en-US" dirty="0">
+                <a:solidFill>
+                  <a:schemeClr val="tx1"/>
+                </a:solidFill>
+              </a:rPr>
+              <a:t> = s</a:t>
+            </a:r>
+            <a:r>
+              <a:rPr lang="en-US" baseline="-25000" dirty="0">
+                <a:solidFill>
+                  <a:schemeClr val="tx1"/>
+                </a:solidFill>
+              </a:rPr>
+              <a:t>2</a:t>
+            </a:r>
+            <a:r>
+              <a:rPr lang="en-US" dirty="0">
+                <a:solidFill>
+                  <a:schemeClr val="tx1"/>
+                </a:solidFill>
+              </a:rPr>
+              <a:t> = </a:t>
+            </a:r>
+            <a:r>
+              <a:rPr lang="el-GR" dirty="0">
+                <a:solidFill>
+                  <a:schemeClr val="tx1"/>
+                </a:solidFill>
+              </a:rPr>
+              <a:t>σ</a:t>
+            </a:r>
+            <a:r>
+              <a:rPr lang="en-US" dirty="0">
+                <a:solidFill>
+                  <a:schemeClr val="tx1"/>
+                </a:solidFill>
+              </a:rPr>
+              <a:t> = 1.</a:t>
+            </a:r>
+          </a:p>
+          <a:p>
+            <a:endParaRPr lang="en-US" dirty="0">
+              <a:solidFill>
+                <a:schemeClr val="tx1"/>
+              </a:solidFill>
+            </a:endParaRPr>
+          </a:p>
+          <a:p>
+            <a:r>
+              <a:rPr lang="en-US" dirty="0">
+                <a:solidFill>
+                  <a:schemeClr val="tx1"/>
+                </a:solidFill>
+              </a:rPr>
+              <a:t>Then t ~= (3</a:t>
+            </a:r>
+            <a:r>
+              <a:rPr lang="en-US" dirty="0"/>
+              <a:t>  -  0) / sqrt(2/N)  ~= 2*sqrt(N)</a:t>
+            </a:r>
+          </a:p>
+          <a:p>
+            <a:endParaRPr lang="en-US" dirty="0"/>
+          </a:p>
+          <a:p>
+            <a:r>
+              <a:rPr lang="en-US" dirty="0">
+                <a:latin typeface="Menlo" panose="020B0609030804020204" pitchFamily="49" charset="0"/>
+                <a:ea typeface="Menlo" panose="020B0609030804020204" pitchFamily="49" charset="0"/>
+                <a:cs typeface="Menlo" panose="020B0609030804020204" pitchFamily="49" charset="0"/>
+              </a:rPr>
+              <a:t>So:</a:t>
+            </a:r>
+          </a:p>
+          <a:p>
+            <a:r>
+              <a:rPr lang="en-US" dirty="0">
+                <a:latin typeface="Menlo" panose="020B0609030804020204" pitchFamily="49" charset="0"/>
+                <a:ea typeface="Menlo" panose="020B0609030804020204" pitchFamily="49" charset="0"/>
+                <a:cs typeface="Menlo" panose="020B0609030804020204" pitchFamily="49" charset="0"/>
+              </a:rPr>
+              <a:t>    N      t       df</a:t>
+            </a:r>
+          </a:p>
+          <a:p>
+            <a:r>
+              <a:rPr lang="en-US" dirty="0">
+                <a:latin typeface="Menlo" panose="020B0609030804020204" pitchFamily="49" charset="0"/>
+                <a:ea typeface="Menlo" panose="020B0609030804020204" pitchFamily="49" charset="0"/>
+                <a:cs typeface="Menlo" panose="020B0609030804020204" pitchFamily="49" charset="0"/>
+              </a:rPr>
+              <a:t>-----------------------</a:t>
+            </a:r>
+          </a:p>
+          <a:p>
+            <a:r>
+              <a:rPr lang="en-US" dirty="0">
+                <a:latin typeface="Menlo" panose="020B0609030804020204" pitchFamily="49" charset="0"/>
+                <a:ea typeface="Menlo" panose="020B0609030804020204" pitchFamily="49" charset="0"/>
+                <a:cs typeface="Menlo" panose="020B0609030804020204" pitchFamily="49" charset="0"/>
+              </a:rPr>
+              <a:t>   100     20        99</a:t>
+            </a:r>
+          </a:p>
+          <a:p>
+            <a:r>
+              <a:rPr lang="en-US" dirty="0">
+                <a:latin typeface="Menlo" panose="020B0609030804020204" pitchFamily="49" charset="0"/>
+                <a:ea typeface="Menlo" panose="020B0609030804020204" pitchFamily="49" charset="0"/>
+                <a:cs typeface="Menlo" panose="020B0609030804020204" pitchFamily="49" charset="0"/>
+              </a:rPr>
+              <a:t>10,000    200     9,999</a:t>
+            </a:r>
+          </a:p>
+          <a:p>
+            <a:r>
+              <a:rPr lang="en-US" dirty="0">
+                <a:latin typeface="Menlo" panose="020B0609030804020204" pitchFamily="49" charset="0"/>
+                <a:ea typeface="Menlo" panose="020B0609030804020204" pitchFamily="49" charset="0"/>
+                <a:cs typeface="Menlo" panose="020B0609030804020204" pitchFamily="49" charset="0"/>
+              </a:rPr>
+              <a:t> 1 </a:t>
+            </a:r>
+            <a:r>
+              <a:rPr lang="en-US" dirty="0" err="1">
+                <a:latin typeface="Menlo" panose="020B0609030804020204" pitchFamily="49" charset="0"/>
+                <a:ea typeface="Menlo" panose="020B0609030804020204" pitchFamily="49" charset="0"/>
+                <a:cs typeface="Menlo" panose="020B0609030804020204" pitchFamily="49" charset="0"/>
+              </a:rPr>
+              <a:t>Mln</a:t>
+            </a:r>
+            <a:r>
+              <a:rPr lang="en-US" dirty="0">
+                <a:latin typeface="Menlo" panose="020B0609030804020204" pitchFamily="49" charset="0"/>
+                <a:ea typeface="Menlo" panose="020B0609030804020204" pitchFamily="49" charset="0"/>
+                <a:cs typeface="Menlo" panose="020B0609030804020204" pitchFamily="49" charset="0"/>
+              </a:rPr>
+              <a:t>  2,000   999,999</a:t>
+            </a:r>
+          </a:p>
+          <a:p>
+            <a:r>
+              <a:rPr lang="en-US" dirty="0">
+                <a:latin typeface="Menlo" panose="020B0609030804020204" pitchFamily="49" charset="0"/>
+                <a:ea typeface="Menlo" panose="020B0609030804020204" pitchFamily="49" charset="0"/>
+                <a:cs typeface="Menlo" panose="020B0609030804020204" pitchFamily="49" charset="0"/>
+              </a:rPr>
+              <a:t>etc.    </a:t>
+            </a:r>
+            <a:r>
+              <a:rPr lang="en-US" dirty="0"/>
+              <a:t>     </a:t>
+            </a:r>
+          </a:p>
+        </p:txBody>
+      </p:sp>
     </p:spTree>
     <p:extLst>
       <p:ext uri="{BB962C8B-B14F-4D97-AF65-F5344CB8AC3E}">
@@ -19086,7 +19447,7 @@
           <a:graphicData uri="http://schemas.openxmlformats.org/presentationml/2006/ole">
             <mc:AlternateContent xmlns:mc="http://schemas.openxmlformats.org/markup-compatibility/2006">
               <mc:Choice xmlns:v="urn:schemas-microsoft-com:vml" Requires="v">
-                <p:oleObj spid="_x0000_s2641" name="Equation" r:id="rId3" imgW="2438280" imgH="444240" progId="Equation.DSMT4">
+                <p:oleObj spid="_x0000_s2647" name="Equation" r:id="rId3" imgW="2438280" imgH="444240" progId="Equation.DSMT4">
                   <p:embed/>
                 </p:oleObj>
               </mc:Choice>
@@ -19304,7 +19665,7 @@
           <a:graphicData uri="http://schemas.openxmlformats.org/presentationml/2006/ole">
             <mc:AlternateContent xmlns:mc="http://schemas.openxmlformats.org/markup-compatibility/2006">
               <mc:Choice xmlns:v="urn:schemas-microsoft-com:vml" Requires="v">
-                <p:oleObj spid="_x0000_s2642" name="Equation" r:id="rId5" imgW="660113" imgH="431613" progId="Equation.3">
+                <p:oleObj spid="_x0000_s2648" name="Equation" r:id="rId5" imgW="660113" imgH="431613" progId="Equation.3">
                   <p:embed/>
                 </p:oleObj>
               </mc:Choice>
@@ -19380,7 +19741,7 @@
           <a:graphicData uri="http://schemas.openxmlformats.org/presentationml/2006/ole">
             <mc:AlternateContent xmlns:mc="http://schemas.openxmlformats.org/markup-compatibility/2006">
               <mc:Choice xmlns:v="urn:schemas-microsoft-com:vml" Requires="v">
-                <p:oleObj spid="_x0000_s2643" name="Equation" r:id="rId7" imgW="787058" imgH="215806" progId="Equation.3">
+                <p:oleObj spid="_x0000_s2649" name="Equation" r:id="rId7" imgW="787058" imgH="215806" progId="Equation.3">
                   <p:embed/>
                 </p:oleObj>
               </mc:Choice>
@@ -19766,7 +20127,7 @@
           <a:graphicData uri="http://schemas.openxmlformats.org/presentationml/2006/ole">
             <mc:AlternateContent xmlns:mc="http://schemas.openxmlformats.org/markup-compatibility/2006">
               <mc:Choice xmlns:v="urn:schemas-microsoft-com:vml" Requires="v">
-                <p:oleObj spid="_x0000_s3855" name="Equation" r:id="rId4" imgW="1054100" imgH="228600" progId="Equation.3">
+                <p:oleObj spid="_x0000_s3863" name="Equation" r:id="rId4" imgW="1054100" imgH="228600" progId="Equation.3">
                   <p:embed/>
                 </p:oleObj>
               </mc:Choice>
@@ -19877,7 +20238,7 @@
           <a:graphicData uri="http://schemas.openxmlformats.org/presentationml/2006/ole">
             <mc:AlternateContent xmlns:mc="http://schemas.openxmlformats.org/markup-compatibility/2006">
               <mc:Choice xmlns:v="urn:schemas-microsoft-com:vml" Requires="v">
-                <p:oleObj spid="_x0000_s3856" name="Equation" r:id="rId6" imgW="1701800" imgH="495300" progId="Equation.3">
+                <p:oleObj spid="_x0000_s3864" name="Equation" r:id="rId6" imgW="1701800" imgH="495300" progId="Equation.3">
                   <p:embed/>
                 </p:oleObj>
               </mc:Choice>
@@ -19953,7 +20314,7 @@
           <a:graphicData uri="http://schemas.openxmlformats.org/presentationml/2006/ole">
             <mc:AlternateContent xmlns:mc="http://schemas.openxmlformats.org/markup-compatibility/2006">
               <mc:Choice xmlns:v="urn:schemas-microsoft-com:vml" Requires="v">
-                <p:oleObj spid="_x0000_s3857" name="Equation" r:id="rId8" imgW="1282700" imgH="546100" progId="Equation.3">
+                <p:oleObj spid="_x0000_s3865" name="Equation" r:id="rId8" imgW="1282700" imgH="546100" progId="Equation.3">
                   <p:embed/>
                 </p:oleObj>
               </mc:Choice>
@@ -20064,7 +20425,7 @@
           <a:graphicData uri="http://schemas.openxmlformats.org/presentationml/2006/ole">
             <mc:AlternateContent xmlns:mc="http://schemas.openxmlformats.org/markup-compatibility/2006">
               <mc:Choice xmlns:v="urn:schemas-microsoft-com:vml" Requires="v">
-                <p:oleObj spid="_x0000_s3858" name="Equation" r:id="rId10" imgW="927100" imgH="431800" progId="Equation.3">
+                <p:oleObj spid="_x0000_s3866" name="Equation" r:id="rId10" imgW="927100" imgH="431800" progId="Equation.3">
                   <p:embed/>
                 </p:oleObj>
               </mc:Choice>
@@ -20591,7 +20952,7 @@
           <a:graphicData uri="http://schemas.openxmlformats.org/presentationml/2006/ole">
             <mc:AlternateContent xmlns:mc="http://schemas.openxmlformats.org/markup-compatibility/2006">
               <mc:Choice xmlns:v="urn:schemas-microsoft-com:vml" Requires="v">
-                <p:oleObj spid="_x0000_s16508" name="Equation" r:id="rId4" imgW="17373600" imgH="10058400" progId="Equation.3">
+                <p:oleObj spid="_x0000_s16520" name="Equation" r:id="rId4" imgW="17373600" imgH="10058400" progId="Equation.3">
                   <p:embed/>
                 </p:oleObj>
               </mc:Choice>
@@ -20722,7 +21083,7 @@
           <a:graphicData uri="http://schemas.openxmlformats.org/presentationml/2006/ole">
             <mc:AlternateContent xmlns:mc="http://schemas.openxmlformats.org/markup-compatibility/2006">
               <mc:Choice xmlns:v="urn:schemas-microsoft-com:vml" Requires="v">
-                <p:oleObj spid="_x0000_s16509" name="Equation" r:id="rId6" imgW="18592800" imgH="10363200" progId="Equation.3">
+                <p:oleObj spid="_x0000_s16521" name="Equation" r:id="rId6" imgW="18592800" imgH="10363200" progId="Equation.3">
                   <p:embed/>
                 </p:oleObj>
               </mc:Choice>
@@ -20798,7 +21159,7 @@
           <a:graphicData uri="http://schemas.openxmlformats.org/presentationml/2006/ole">
             <mc:AlternateContent xmlns:mc="http://schemas.openxmlformats.org/markup-compatibility/2006">
               <mc:Choice xmlns:v="urn:schemas-microsoft-com:vml" Requires="v">
-                <p:oleObj spid="_x0000_s16510" name="Equation" r:id="rId8" imgW="36271200" imgH="21945600" progId="Equation.3">
+                <p:oleObj spid="_x0000_s16522" name="Equation" r:id="rId8" imgW="36271200" imgH="21945600" progId="Equation.3">
                   <p:embed/>
                 </p:oleObj>
               </mc:Choice>
@@ -20874,7 +21235,7 @@
           <a:graphicData uri="http://schemas.openxmlformats.org/presentationml/2006/ole">
             <mc:AlternateContent xmlns:mc="http://schemas.openxmlformats.org/markup-compatibility/2006">
               <mc:Choice xmlns:v="urn:schemas-microsoft-com:vml" Requires="v">
-                <p:oleObj spid="_x0000_s16511" name="Equation" r:id="rId10" imgW="38404800" imgH="8839200" progId="Equation.3">
+                <p:oleObj spid="_x0000_s16523" name="Equation" r:id="rId10" imgW="38404800" imgH="8839200" progId="Equation.3">
                   <p:embed/>
                 </p:oleObj>
               </mc:Choice>
@@ -20950,7 +21311,7 @@
           <a:graphicData uri="http://schemas.openxmlformats.org/presentationml/2006/ole">
             <mc:AlternateContent xmlns:mc="http://schemas.openxmlformats.org/markup-compatibility/2006">
               <mc:Choice xmlns:v="urn:schemas-microsoft-com:vml" Requires="v">
-                <p:oleObj spid="_x0000_s16512" name="Equation" r:id="rId12" imgW="19812000" imgH="11277600" progId="Equation.3">
+                <p:oleObj spid="_x0000_s16524" name="Equation" r:id="rId12" imgW="19812000" imgH="11277600" progId="Equation.3">
                   <p:embed/>
                 </p:oleObj>
               </mc:Choice>
@@ -21026,7 +21387,7 @@
           <a:graphicData uri="http://schemas.openxmlformats.org/presentationml/2006/ole">
             <mc:AlternateContent xmlns:mc="http://schemas.openxmlformats.org/markup-compatibility/2006">
               <mc:Choice xmlns:v="urn:schemas-microsoft-com:vml" Requires="v">
-                <p:oleObj spid="_x0000_s16513" name="Equation" r:id="rId14" imgW="42976800" imgH="5791200" progId="Equation.3">
+                <p:oleObj spid="_x0000_s16525" name="Equation" r:id="rId14" imgW="42976800" imgH="5791200" progId="Equation.3">
                   <p:embed/>
                 </p:oleObj>
               </mc:Choice>
